--- a/Documentation/Firday_3_6_2026_Presentation.pptx
+++ b/Documentation/Firday_3_6_2026_Presentation.pptx
@@ -7,6 +7,14 @@
   <p:sldIdLst>
     <p:sldId id="256" r:id="rId2"/>
     <p:sldId id="257" r:id="rId3"/>
+    <p:sldId id="260" r:id="rId4"/>
+    <p:sldId id="267" r:id="rId5"/>
+    <p:sldId id="265" r:id="rId6"/>
+    <p:sldId id="266" r:id="rId7"/>
+    <p:sldId id="261" r:id="rId8"/>
+    <p:sldId id="262" r:id="rId9"/>
+    <p:sldId id="264" r:id="rId10"/>
+    <p:sldId id="263" r:id="rId11"/>
   </p:sldIdLst>
   <p:sldSz cx="12192000" cy="6858000"/>
   <p:notesSz cx="6858000" cy="9144000"/>
@@ -105,7 +113,1404 @@
       </a:defRPr>
     </a:lvl9pPr>
   </p:defaultTextStyle>
+  <p:extLst>
+    <p:ext uri="{EFAFB233-063F-42B5-8137-9DF3F51BA10A}">
+      <p15:sldGuideLst xmlns:p15="http://schemas.microsoft.com/office/powerpoint/2012/main"/>
+    </p:ext>
+  </p:extLst>
 </p:presentation>
+</file>
+
+<file path=ppt/revisionInfo.xml><?xml version="1.0" encoding="utf-8"?>
+<p1510:revInfo xmlns:a="http://schemas.openxmlformats.org/drawingml/2006/main" xmlns:r="http://schemas.openxmlformats.org/officeDocument/2006/relationships" xmlns:p1510="http://schemas.microsoft.com/office/powerpoint/2015/10/main">
+  <p1510:revLst>
+    <p1510:client id="{0CA25B7D-AD09-4D28-8E3E-2D4B53D04A2D}" v="42" dt="2026-03-06T19:46:54.180"/>
+    <p1510:client id="{987C8A0E-8667-2A57-F6CF-E25A13441029}" v="11" dt="2026-03-05T23:46:06.406"/>
+  </p1510:revLst>
+</p1510:revInfo>
+</file>
+
+<file path=ppt/changesInfos/changesInfo1.xml><?xml version="1.0" encoding="utf-8"?>
+<pc:chgInfo xmlns:a="http://schemas.openxmlformats.org/drawingml/2006/main" xmlns:r="http://schemas.openxmlformats.org/officeDocument/2006/relationships" xmlns:ac="http://schemas.microsoft.com/office/drawing/2013/main/command" xmlns:pc="http://schemas.microsoft.com/office/powerpoint/2013/main/command">
+  <pc:docChgLst>
+    <pc:chgData name="Guest User" userId="S::urn:spo:tenantanon#164ba61e-39ec-4f5d-89ff-aa1f00a521b4::" providerId="AD" clId="Web-{57FAAD45-EC59-08F2-40EF-4343AF078D53}"/>
+    <pc:docChg chg="delSld modSld">
+      <pc:chgData name="Guest User" userId="S::urn:spo:tenantanon#164ba61e-39ec-4f5d-89ff-aa1f00a521b4::" providerId="AD" clId="Web-{57FAAD45-EC59-08F2-40EF-4343AF078D53}" dt="2026-03-03T05:36:15.979" v="93" actId="14100"/>
+      <pc:docMkLst>
+        <pc:docMk/>
+      </pc:docMkLst>
+      <pc:sldChg chg="addSp modSp">
+        <pc:chgData name="Guest User" userId="S::urn:spo:tenantanon#164ba61e-39ec-4f5d-89ff-aa1f00a521b4::" providerId="AD" clId="Web-{57FAAD45-EC59-08F2-40EF-4343AF078D53}" dt="2026-03-03T05:36:15.979" v="93" actId="14100"/>
+        <pc:sldMkLst>
+          <pc:docMk/>
+          <pc:sldMk cId="3283190877" sldId="257"/>
+        </pc:sldMkLst>
+        <pc:spChg chg="mod">
+          <ac:chgData name="Guest User" userId="S::urn:spo:tenantanon#164ba61e-39ec-4f5d-89ff-aa1f00a521b4::" providerId="AD" clId="Web-{57FAAD45-EC59-08F2-40EF-4343AF078D53}" dt="2026-03-03T05:34:42.824" v="86" actId="20577"/>
+          <ac:spMkLst>
+            <pc:docMk/>
+            <pc:sldMk cId="3283190877" sldId="257"/>
+            <ac:spMk id="3" creationId="{62D2861A-4FD2-ECDC-97BE-BE73ACDE508E}"/>
+          </ac:spMkLst>
+        </pc:spChg>
+        <pc:picChg chg="add mod">
+          <ac:chgData name="Guest User" userId="S::urn:spo:tenantanon#164ba61e-39ec-4f5d-89ff-aa1f00a521b4::" providerId="AD" clId="Web-{57FAAD45-EC59-08F2-40EF-4343AF078D53}" dt="2026-03-03T05:34:49.199" v="88" actId="1076"/>
+          <ac:picMkLst>
+            <pc:docMk/>
+            <pc:sldMk cId="3283190877" sldId="257"/>
+            <ac:picMk id="4" creationId="{EE6768F9-5F1E-A1FA-BDBE-B38F93E7B669}"/>
+          </ac:picMkLst>
+        </pc:picChg>
+        <pc:picChg chg="add mod">
+          <ac:chgData name="Guest User" userId="S::urn:spo:tenantanon#164ba61e-39ec-4f5d-89ff-aa1f00a521b4::" providerId="AD" clId="Web-{57FAAD45-EC59-08F2-40EF-4343AF078D53}" dt="2026-03-03T05:36:15.979" v="93" actId="14100"/>
+          <ac:picMkLst>
+            <pc:docMk/>
+            <pc:sldMk cId="3283190877" sldId="257"/>
+            <ac:picMk id="5" creationId="{46979884-427F-B8B1-3F8E-97FFD80D3776}"/>
+          </ac:picMkLst>
+        </pc:picChg>
+      </pc:sldChg>
+    </pc:docChg>
+  </pc:docChgLst>
+  <pc:docChgLst>
+    <pc:chgData name="Guest User" userId="S::urn:spo:tenantanon#164ba61e-39ec-4f5d-89ff-aa1f00a521b4::" providerId="AD" clId="Web-{A920C29C-9FEE-2FCF-C90E-886123E04E7C}"/>
+    <pc:docChg chg="modSld">
+      <pc:chgData name="Guest User" userId="S::urn:spo:tenantanon#164ba61e-39ec-4f5d-89ff-aa1f00a521b4::" providerId="AD" clId="Web-{A920C29C-9FEE-2FCF-C90E-886123E04E7C}" dt="2026-03-04T23:19:59.703" v="111" actId="1076"/>
+      <pc:docMkLst>
+        <pc:docMk/>
+      </pc:docMkLst>
+      <pc:sldChg chg="addSp modSp">
+        <pc:chgData name="Guest User" userId="S::urn:spo:tenantanon#164ba61e-39ec-4f5d-89ff-aa1f00a521b4::" providerId="AD" clId="Web-{A920C29C-9FEE-2FCF-C90E-886123E04E7C}" dt="2026-03-04T23:19:59.703" v="111" actId="1076"/>
+        <pc:sldMkLst>
+          <pc:docMk/>
+          <pc:sldMk cId="783867445" sldId="260"/>
+        </pc:sldMkLst>
+        <pc:spChg chg="mod">
+          <ac:chgData name="Guest User" userId="S::urn:spo:tenantanon#164ba61e-39ec-4f5d-89ff-aa1f00a521b4::" providerId="AD" clId="Web-{A920C29C-9FEE-2FCF-C90E-886123E04E7C}" dt="2026-03-04T23:16:02.306" v="88" actId="20577"/>
+          <ac:spMkLst>
+            <pc:docMk/>
+            <pc:sldMk cId="783867445" sldId="260"/>
+            <ac:spMk id="3" creationId="{3C3157D2-31E4-C17C-F799-F0C5A16C4D35}"/>
+          </ac:spMkLst>
+        </pc:spChg>
+        <pc:picChg chg="add mod">
+          <ac:chgData name="Guest User" userId="S::urn:spo:tenantanon#164ba61e-39ec-4f5d-89ff-aa1f00a521b4::" providerId="AD" clId="Web-{A920C29C-9FEE-2FCF-C90E-886123E04E7C}" dt="2026-03-04T23:19:02.855" v="103" actId="1076"/>
+          <ac:picMkLst>
+            <pc:docMk/>
+            <pc:sldMk cId="783867445" sldId="260"/>
+            <ac:picMk id="4" creationId="{6DAF3E27-BF4F-D680-0CBB-0087C310032D}"/>
+          </ac:picMkLst>
+        </pc:picChg>
+        <pc:picChg chg="add mod">
+          <ac:chgData name="Guest User" userId="S::urn:spo:tenantanon#164ba61e-39ec-4f5d-89ff-aa1f00a521b4::" providerId="AD" clId="Web-{A920C29C-9FEE-2FCF-C90E-886123E04E7C}" dt="2026-03-04T23:19:59.703" v="111" actId="1076"/>
+          <ac:picMkLst>
+            <pc:docMk/>
+            <pc:sldMk cId="783867445" sldId="260"/>
+            <ac:picMk id="5" creationId="{BDBFA0B5-E842-DDAA-DBDC-B26D8398417D}"/>
+          </ac:picMkLst>
+        </pc:picChg>
+        <pc:picChg chg="add mod">
+          <ac:chgData name="Guest User" userId="S::urn:spo:tenantanon#164ba61e-39ec-4f5d-89ff-aa1f00a521b4::" providerId="AD" clId="Web-{A920C29C-9FEE-2FCF-C90E-886123E04E7C}" dt="2026-03-04T23:19:59.094" v="110" actId="1076"/>
+          <ac:picMkLst>
+            <pc:docMk/>
+            <pc:sldMk cId="783867445" sldId="260"/>
+            <ac:picMk id="6" creationId="{F7E822F0-9BC7-3701-EEDF-441DFD6E3E18}"/>
+          </ac:picMkLst>
+        </pc:picChg>
+      </pc:sldChg>
+    </pc:docChg>
+  </pc:docChgLst>
+  <pc:docChgLst>
+    <pc:chgData name="Guest User" userId="S::urn:spo:tenantanon#164ba61e-39ec-4f5d-89ff-aa1f00a521b4::" providerId="AD" clId="Web-{EDE3981A-167C-BDDC-7AD3-C0CCD89377FA}"/>
+    <pc:docChg chg="addSld modSld">
+      <pc:chgData name="Guest User" userId="S::urn:spo:tenantanon#164ba61e-39ec-4f5d-89ff-aa1f00a521b4::" providerId="AD" clId="Web-{EDE3981A-167C-BDDC-7AD3-C0CCD89377FA}" dt="2026-03-03T05:16:00.776" v="96" actId="20577"/>
+      <pc:docMkLst>
+        <pc:docMk/>
+      </pc:docMkLst>
+      <pc:sldChg chg="modSp">
+        <pc:chgData name="Guest User" userId="S::urn:spo:tenantanon#164ba61e-39ec-4f5d-89ff-aa1f00a521b4::" providerId="AD" clId="Web-{EDE3981A-167C-BDDC-7AD3-C0CCD89377FA}" dt="2026-03-03T05:16:00.776" v="96" actId="20577"/>
+        <pc:sldMkLst>
+          <pc:docMk/>
+          <pc:sldMk cId="3283190877" sldId="257"/>
+        </pc:sldMkLst>
+        <pc:spChg chg="mod">
+          <ac:chgData name="Guest User" userId="S::urn:spo:tenantanon#164ba61e-39ec-4f5d-89ff-aa1f00a521b4::" providerId="AD" clId="Web-{EDE3981A-167C-BDDC-7AD3-C0CCD89377FA}" dt="2026-03-03T05:14:47.462" v="37" actId="20577"/>
+          <ac:spMkLst>
+            <pc:docMk/>
+            <pc:sldMk cId="3283190877" sldId="257"/>
+            <ac:spMk id="2" creationId="{6FF15B66-687C-A79F-8534-2A1C07A2E395}"/>
+          </ac:spMkLst>
+        </pc:spChg>
+        <pc:spChg chg="mod">
+          <ac:chgData name="Guest User" userId="S::urn:spo:tenantanon#164ba61e-39ec-4f5d-89ff-aa1f00a521b4::" providerId="AD" clId="Web-{EDE3981A-167C-BDDC-7AD3-C0CCD89377FA}" dt="2026-03-03T05:16:00.776" v="96" actId="20577"/>
+          <ac:spMkLst>
+            <pc:docMk/>
+            <pc:sldMk cId="3283190877" sldId="257"/>
+            <ac:spMk id="3" creationId="{62D2861A-4FD2-ECDC-97BE-BE73ACDE508E}"/>
+          </ac:spMkLst>
+        </pc:spChg>
+      </pc:sldChg>
+      <pc:sldChg chg="modSp new">
+        <pc:chgData name="Guest User" userId="S::urn:spo:tenantanon#164ba61e-39ec-4f5d-89ff-aa1f00a521b4::" providerId="AD" clId="Web-{EDE3981A-167C-BDDC-7AD3-C0CCD89377FA}" dt="2026-03-03T05:07:13.705" v="28" actId="20577"/>
+        <pc:sldMkLst>
+          <pc:docMk/>
+          <pc:sldMk cId="783867445" sldId="260"/>
+        </pc:sldMkLst>
+        <pc:spChg chg="mod">
+          <ac:chgData name="Guest User" userId="S::urn:spo:tenantanon#164ba61e-39ec-4f5d-89ff-aa1f00a521b4::" providerId="AD" clId="Web-{EDE3981A-167C-BDDC-7AD3-C0CCD89377FA}" dt="2026-03-03T05:07:13.705" v="28" actId="20577"/>
+          <ac:spMkLst>
+            <pc:docMk/>
+            <pc:sldMk cId="783867445" sldId="260"/>
+            <ac:spMk id="2" creationId="{36818FCC-53A4-1EFC-18A3-635040B56451}"/>
+          </ac:spMkLst>
+        </pc:spChg>
+      </pc:sldChg>
+    </pc:docChg>
+  </pc:docChgLst>
+  <pc:docChgLst>
+    <pc:chgData name="Keeyan Canlas" userId="S::kcanlas@cpp.edu::65e9c99f-8a9d-4f4a-ad46-bebdd41008a0" providerId="AD" clId="Web-{987C8A0E-8667-2A57-F6CF-E25A13441029}"/>
+    <pc:docChg chg="modSld">
+      <pc:chgData name="Keeyan Canlas" userId="S::kcanlas@cpp.edu::65e9c99f-8a9d-4f4a-ad46-bebdd41008a0" providerId="AD" clId="Web-{987C8A0E-8667-2A57-F6CF-E25A13441029}" dt="2026-03-05T23:46:06.406" v="9" actId="1076"/>
+      <pc:docMkLst>
+        <pc:docMk/>
+      </pc:docMkLst>
+      <pc:sldChg chg="addSp delSp modSp">
+        <pc:chgData name="Keeyan Canlas" userId="S::kcanlas@cpp.edu::65e9c99f-8a9d-4f4a-ad46-bebdd41008a0" providerId="AD" clId="Web-{987C8A0E-8667-2A57-F6CF-E25A13441029}" dt="2026-03-05T23:46:06.406" v="9" actId="1076"/>
+        <pc:sldMkLst>
+          <pc:docMk/>
+          <pc:sldMk cId="464883383" sldId="262"/>
+        </pc:sldMkLst>
+        <pc:spChg chg="add del mod">
+          <ac:chgData name="Keeyan Canlas" userId="S::kcanlas@cpp.edu::65e9c99f-8a9d-4f4a-ad46-bebdd41008a0" providerId="AD" clId="Web-{987C8A0E-8667-2A57-F6CF-E25A13441029}" dt="2026-03-05T23:44:22.953" v="1"/>
+          <ac:spMkLst>
+            <pc:docMk/>
+            <pc:sldMk cId="464883383" sldId="262"/>
+            <ac:spMk id="5" creationId="{4D0236B6-3238-5796-88F8-94B0EEE6669E}"/>
+          </ac:spMkLst>
+        </pc:spChg>
+        <pc:picChg chg="del">
+          <ac:chgData name="Keeyan Canlas" userId="S::kcanlas@cpp.edu::65e9c99f-8a9d-4f4a-ad46-bebdd41008a0" providerId="AD" clId="Web-{987C8A0E-8667-2A57-F6CF-E25A13441029}" dt="2026-03-05T23:31:18.657" v="0"/>
+          <ac:picMkLst>
+            <pc:docMk/>
+            <pc:sldMk cId="464883383" sldId="262"/>
+            <ac:picMk id="4" creationId="{BD9DE767-C9A5-D8E0-FD20-927DCA758860}"/>
+          </ac:picMkLst>
+        </pc:picChg>
+        <pc:picChg chg="add mod ord">
+          <ac:chgData name="Keeyan Canlas" userId="S::kcanlas@cpp.edu::65e9c99f-8a9d-4f4a-ad46-bebdd41008a0" providerId="AD" clId="Web-{987C8A0E-8667-2A57-F6CF-E25A13441029}" dt="2026-03-05T23:45:25.375" v="6" actId="1076"/>
+          <ac:picMkLst>
+            <pc:docMk/>
+            <pc:sldMk cId="464883383" sldId="262"/>
+            <ac:picMk id="6" creationId="{C550AD97-3311-9FD8-AE41-C541F41EB31D}"/>
+          </ac:picMkLst>
+        </pc:picChg>
+        <pc:picChg chg="add mod">
+          <ac:chgData name="Keeyan Canlas" userId="S::kcanlas@cpp.edu::65e9c99f-8a9d-4f4a-ad46-bebdd41008a0" providerId="AD" clId="Web-{987C8A0E-8667-2A57-F6CF-E25A13441029}" dt="2026-03-05T23:46:06.406" v="9" actId="1076"/>
+          <ac:picMkLst>
+            <pc:docMk/>
+            <pc:sldMk cId="464883383" sldId="262"/>
+            <ac:picMk id="7" creationId="{0C1ECB9C-2624-71BF-70EA-1F69CE1EB032}"/>
+          </ac:picMkLst>
+        </pc:picChg>
+      </pc:sldChg>
+    </pc:docChg>
+  </pc:docChgLst>
+  <pc:docChgLst>
+    <pc:chgData name="Kaung Nyi Naing" userId="5a99cc02-cb89-4ca5-b1ec-1f82f4f974cc" providerId="ADAL" clId="{38D6FE23-4415-44DB-9B99-5C09F2291F92}"/>
+    <pc:docChg chg="undo custSel addSld modSld sldOrd modMainMaster">
+      <pc:chgData name="Kaung Nyi Naing" userId="5a99cc02-cb89-4ca5-b1ec-1f82f4f974cc" providerId="ADAL" clId="{38D6FE23-4415-44DB-9B99-5C09F2291F92}" dt="2026-03-06T19:51:57.199" v="1594" actId="14100"/>
+      <pc:docMkLst>
+        <pc:docMk/>
+      </pc:docMkLst>
+      <pc:sldChg chg="addSp modSp mod setBg addAnim">
+        <pc:chgData name="Kaung Nyi Naing" userId="5a99cc02-cb89-4ca5-b1ec-1f82f4f974cc" providerId="ADAL" clId="{38D6FE23-4415-44DB-9B99-5C09F2291F92}" dt="2026-03-06T19:36:57.049" v="1456"/>
+        <pc:sldMkLst>
+          <pc:docMk/>
+          <pc:sldMk cId="1739604087" sldId="256"/>
+        </pc:sldMkLst>
+        <pc:spChg chg="mod">
+          <ac:chgData name="Kaung Nyi Naing" userId="5a99cc02-cb89-4ca5-b1ec-1f82f4f974cc" providerId="ADAL" clId="{38D6FE23-4415-44DB-9B99-5C09F2291F92}" dt="2026-03-06T06:48:35.117" v="1210" actId="26606"/>
+          <ac:spMkLst>
+            <pc:docMk/>
+            <pc:sldMk cId="1739604087" sldId="256"/>
+            <ac:spMk id="2" creationId="{4B8F2D27-97D4-923B-147C-41E7C91E474A}"/>
+          </ac:spMkLst>
+        </pc:spChg>
+        <pc:spChg chg="mod">
+          <ac:chgData name="Kaung Nyi Naing" userId="5a99cc02-cb89-4ca5-b1ec-1f82f4f974cc" providerId="ADAL" clId="{38D6FE23-4415-44DB-9B99-5C09F2291F92}" dt="2026-03-06T06:48:35.117" v="1210" actId="26606"/>
+          <ac:spMkLst>
+            <pc:docMk/>
+            <pc:sldMk cId="1739604087" sldId="256"/>
+            <ac:spMk id="3" creationId="{4A0AFA8C-6000-3388-B08B-572692E856E2}"/>
+          </ac:spMkLst>
+        </pc:spChg>
+        <pc:spChg chg="add">
+          <ac:chgData name="Kaung Nyi Naing" userId="5a99cc02-cb89-4ca5-b1ec-1f82f4f974cc" providerId="ADAL" clId="{38D6FE23-4415-44DB-9B99-5C09F2291F92}" dt="2026-03-06T06:48:35.117" v="1210" actId="26606"/>
+          <ac:spMkLst>
+            <pc:docMk/>
+            <pc:sldMk cId="1739604087" sldId="256"/>
+            <ac:spMk id="9" creationId="{71B2258F-86CA-4D4D-8270-BC05FCDEBFB3}"/>
+          </ac:spMkLst>
+        </pc:spChg>
+        <pc:picChg chg="add">
+          <ac:chgData name="Kaung Nyi Naing" userId="5a99cc02-cb89-4ca5-b1ec-1f82f4f974cc" providerId="ADAL" clId="{38D6FE23-4415-44DB-9B99-5C09F2291F92}" dt="2026-03-06T06:48:35.117" v="1210" actId="26606"/>
+          <ac:picMkLst>
+            <pc:docMk/>
+            <pc:sldMk cId="1739604087" sldId="256"/>
+            <ac:picMk id="5" creationId="{6A5F090A-3B82-A603-6465-6837EFBCD2F6}"/>
+          </ac:picMkLst>
+        </pc:picChg>
+      </pc:sldChg>
+      <pc:sldChg chg="addSp delSp modSp mod setBg">
+        <pc:chgData name="Kaung Nyi Naing" userId="5a99cc02-cb89-4ca5-b1ec-1f82f4f974cc" providerId="ADAL" clId="{38D6FE23-4415-44DB-9B99-5C09F2291F92}" dt="2026-03-06T19:36:57.049" v="1456"/>
+        <pc:sldMkLst>
+          <pc:docMk/>
+          <pc:sldMk cId="3283190877" sldId="257"/>
+        </pc:sldMkLst>
+        <pc:spChg chg="mod">
+          <ac:chgData name="Kaung Nyi Naing" userId="5a99cc02-cb89-4ca5-b1ec-1f82f4f974cc" providerId="ADAL" clId="{38D6FE23-4415-44DB-9B99-5C09F2291F92}" dt="2026-03-06T06:50:17.514" v="1224" actId="26606"/>
+          <ac:spMkLst>
+            <pc:docMk/>
+            <pc:sldMk cId="3283190877" sldId="257"/>
+            <ac:spMk id="2" creationId="{6FF15B66-687C-A79F-8534-2A1C07A2E395}"/>
+          </ac:spMkLst>
+        </pc:spChg>
+        <pc:spChg chg="mod">
+          <ac:chgData name="Kaung Nyi Naing" userId="5a99cc02-cb89-4ca5-b1ec-1f82f4f974cc" providerId="ADAL" clId="{38D6FE23-4415-44DB-9B99-5C09F2291F92}" dt="2026-03-06T19:15:10.480" v="1329" actId="20577"/>
+          <ac:spMkLst>
+            <pc:docMk/>
+            <pc:sldMk cId="3283190877" sldId="257"/>
+            <ac:spMk id="3" creationId="{62D2861A-4FD2-ECDC-97BE-BE73ACDE508E}"/>
+          </ac:spMkLst>
+        </pc:spChg>
+        <pc:spChg chg="add del">
+          <ac:chgData name="Kaung Nyi Naing" userId="5a99cc02-cb89-4ca5-b1ec-1f82f4f974cc" providerId="ADAL" clId="{38D6FE23-4415-44DB-9B99-5C09F2291F92}" dt="2026-03-06T06:49:51.985" v="1222" actId="26606"/>
+          <ac:spMkLst>
+            <pc:docMk/>
+            <pc:sldMk cId="3283190877" sldId="257"/>
+            <ac:spMk id="10" creationId="{149FB5C3-7336-4FE0-A30C-CC0A3646D499}"/>
+          </ac:spMkLst>
+        </pc:spChg>
+        <pc:spChg chg="add del">
+          <ac:chgData name="Kaung Nyi Naing" userId="5a99cc02-cb89-4ca5-b1ec-1f82f4f974cc" providerId="ADAL" clId="{38D6FE23-4415-44DB-9B99-5C09F2291F92}" dt="2026-03-06T06:49:51.985" v="1222" actId="26606"/>
+          <ac:spMkLst>
+            <pc:docMk/>
+            <pc:sldMk cId="3283190877" sldId="257"/>
+            <ac:spMk id="16" creationId="{0DA909B4-15FF-46A6-8A7F-7AEF977FE9ED}"/>
+          </ac:spMkLst>
+        </pc:spChg>
+        <pc:spChg chg="add del">
+          <ac:chgData name="Kaung Nyi Naing" userId="5a99cc02-cb89-4ca5-b1ec-1f82f4f974cc" providerId="ADAL" clId="{38D6FE23-4415-44DB-9B99-5C09F2291F92}" dt="2026-03-06T06:49:51.985" v="1222" actId="26606"/>
+          <ac:spMkLst>
+            <pc:docMk/>
+            <pc:sldMk cId="3283190877" sldId="257"/>
+            <ac:spMk id="18" creationId="{1382A32C-5B0C-4B1C-A074-76C6DBCC9F87}"/>
+          </ac:spMkLst>
+        </pc:spChg>
+        <pc:spChg chg="add del">
+          <ac:chgData name="Kaung Nyi Naing" userId="5a99cc02-cb89-4ca5-b1ec-1f82f4f974cc" providerId="ADAL" clId="{38D6FE23-4415-44DB-9B99-5C09F2291F92}" dt="2026-03-06T06:50:17.514" v="1224" actId="26606"/>
+          <ac:spMkLst>
+            <pc:docMk/>
+            <pc:sldMk cId="3283190877" sldId="257"/>
+            <ac:spMk id="23" creationId="{352BEC0E-22F8-46D0-9632-375DB541B06C}"/>
+          </ac:spMkLst>
+        </pc:spChg>
+        <pc:spChg chg="add del">
+          <ac:chgData name="Kaung Nyi Naing" userId="5a99cc02-cb89-4ca5-b1ec-1f82f4f974cc" providerId="ADAL" clId="{38D6FE23-4415-44DB-9B99-5C09F2291F92}" dt="2026-03-06T06:50:17.514" v="1224" actId="26606"/>
+          <ac:spMkLst>
+            <pc:docMk/>
+            <pc:sldMk cId="3283190877" sldId="257"/>
+            <ac:spMk id="25" creationId="{3FCFB1DE-0B7E-48CC-BA90-B2AB0889F9D6}"/>
+          </ac:spMkLst>
+        </pc:spChg>
+        <pc:spChg chg="add">
+          <ac:chgData name="Kaung Nyi Naing" userId="5a99cc02-cb89-4ca5-b1ec-1f82f4f974cc" providerId="ADAL" clId="{38D6FE23-4415-44DB-9B99-5C09F2291F92}" dt="2026-03-06T06:50:17.514" v="1224" actId="26606"/>
+          <ac:spMkLst>
+            <pc:docMk/>
+            <pc:sldMk cId="3283190877" sldId="257"/>
+            <ac:spMk id="30" creationId="{149FB5C3-7336-4FE0-A30C-CC0A3646D499}"/>
+          </ac:spMkLst>
+        </pc:spChg>
+        <pc:spChg chg="add">
+          <ac:chgData name="Kaung Nyi Naing" userId="5a99cc02-cb89-4ca5-b1ec-1f82f4f974cc" providerId="ADAL" clId="{38D6FE23-4415-44DB-9B99-5C09F2291F92}" dt="2026-03-06T06:50:17.514" v="1224" actId="26606"/>
+          <ac:spMkLst>
+            <pc:docMk/>
+            <pc:sldMk cId="3283190877" sldId="257"/>
+            <ac:spMk id="36" creationId="{0DA909B4-15FF-46A6-8A7F-7AEF977FE9ED}"/>
+          </ac:spMkLst>
+        </pc:spChg>
+        <pc:spChg chg="add">
+          <ac:chgData name="Kaung Nyi Naing" userId="5a99cc02-cb89-4ca5-b1ec-1f82f4f974cc" providerId="ADAL" clId="{38D6FE23-4415-44DB-9B99-5C09F2291F92}" dt="2026-03-06T06:50:17.514" v="1224" actId="26606"/>
+          <ac:spMkLst>
+            <pc:docMk/>
+            <pc:sldMk cId="3283190877" sldId="257"/>
+            <ac:spMk id="38" creationId="{1382A32C-5B0C-4B1C-A074-76C6DBCC9F87}"/>
+          </ac:spMkLst>
+        </pc:spChg>
+        <pc:grpChg chg="add del">
+          <ac:chgData name="Kaung Nyi Naing" userId="5a99cc02-cb89-4ca5-b1ec-1f82f4f974cc" providerId="ADAL" clId="{38D6FE23-4415-44DB-9B99-5C09F2291F92}" dt="2026-03-06T06:49:51.985" v="1222" actId="26606"/>
+          <ac:grpSpMkLst>
+            <pc:docMk/>
+            <pc:sldMk cId="3283190877" sldId="257"/>
+            <ac:grpSpMk id="12" creationId="{19A6B5CE-CB1D-48EE-8B43-E952235C8371}"/>
+          </ac:grpSpMkLst>
+        </pc:grpChg>
+        <pc:grpChg chg="add">
+          <ac:chgData name="Kaung Nyi Naing" userId="5a99cc02-cb89-4ca5-b1ec-1f82f4f974cc" providerId="ADAL" clId="{38D6FE23-4415-44DB-9B99-5C09F2291F92}" dt="2026-03-06T06:50:17.514" v="1224" actId="26606"/>
+          <ac:grpSpMkLst>
+            <pc:docMk/>
+            <pc:sldMk cId="3283190877" sldId="257"/>
+            <ac:grpSpMk id="32" creationId="{19A6B5CE-CB1D-48EE-8B43-E952235C8371}"/>
+          </ac:grpSpMkLst>
+        </pc:grpChg>
+        <pc:picChg chg="mod ord">
+          <ac:chgData name="Kaung Nyi Naing" userId="5a99cc02-cb89-4ca5-b1ec-1f82f4f974cc" providerId="ADAL" clId="{38D6FE23-4415-44DB-9B99-5C09F2291F92}" dt="2026-03-06T06:50:17.514" v="1224" actId="26606"/>
+          <ac:picMkLst>
+            <pc:docMk/>
+            <pc:sldMk cId="3283190877" sldId="257"/>
+            <ac:picMk id="4" creationId="{EE6768F9-5F1E-A1FA-BDBE-B38F93E7B669}"/>
+          </ac:picMkLst>
+        </pc:picChg>
+        <pc:picChg chg="mod">
+          <ac:chgData name="Kaung Nyi Naing" userId="5a99cc02-cb89-4ca5-b1ec-1f82f4f974cc" providerId="ADAL" clId="{38D6FE23-4415-44DB-9B99-5C09F2291F92}" dt="2026-03-06T06:50:17.514" v="1224" actId="26606"/>
+          <ac:picMkLst>
+            <pc:docMk/>
+            <pc:sldMk cId="3283190877" sldId="257"/>
+            <ac:picMk id="5" creationId="{46979884-427F-B8B1-3F8E-97FFD80D3776}"/>
+          </ac:picMkLst>
+        </pc:picChg>
+      </pc:sldChg>
+      <pc:sldChg chg="addSp delSp modSp mod ord setBg">
+        <pc:chgData name="Kaung Nyi Naing" userId="5a99cc02-cb89-4ca5-b1ec-1f82f4f974cc" providerId="ADAL" clId="{38D6FE23-4415-44DB-9B99-5C09F2291F92}" dt="2026-03-06T19:46:20.601" v="1533" actId="14100"/>
+        <pc:sldMkLst>
+          <pc:docMk/>
+          <pc:sldMk cId="783867445" sldId="260"/>
+        </pc:sldMkLst>
+        <pc:spChg chg="mod ord">
+          <ac:chgData name="Kaung Nyi Naing" userId="5a99cc02-cb89-4ca5-b1ec-1f82f4f974cc" providerId="ADAL" clId="{38D6FE23-4415-44DB-9B99-5C09F2291F92}" dt="2026-03-06T19:45:00.153" v="1525" actId="207"/>
+          <ac:spMkLst>
+            <pc:docMk/>
+            <pc:sldMk cId="783867445" sldId="260"/>
+            <ac:spMk id="2" creationId="{36818FCC-53A4-1EFC-18A3-635040B56451}"/>
+          </ac:spMkLst>
+        </pc:spChg>
+        <pc:spChg chg="mod ord">
+          <ac:chgData name="Kaung Nyi Naing" userId="5a99cc02-cb89-4ca5-b1ec-1f82f4f974cc" providerId="ADAL" clId="{38D6FE23-4415-44DB-9B99-5C09F2291F92}" dt="2026-03-06T19:46:20.601" v="1533" actId="14100"/>
+          <ac:spMkLst>
+            <pc:docMk/>
+            <pc:sldMk cId="783867445" sldId="260"/>
+            <ac:spMk id="3" creationId="{3C3157D2-31E4-C17C-F799-F0C5A16C4D35}"/>
+          </ac:spMkLst>
+        </pc:spChg>
+        <pc:spChg chg="add del mod ord">
+          <ac:chgData name="Kaung Nyi Naing" userId="5a99cc02-cb89-4ca5-b1ec-1f82f4f974cc" providerId="ADAL" clId="{38D6FE23-4415-44DB-9B99-5C09F2291F92}" dt="2026-03-06T19:43:51.157" v="1517" actId="478"/>
+          <ac:spMkLst>
+            <pc:docMk/>
+            <pc:sldMk cId="783867445" sldId="260"/>
+            <ac:spMk id="7" creationId="{4D87CC6D-B96B-3B19-5969-1066EA8B2E84}"/>
+          </ac:spMkLst>
+        </pc:spChg>
+        <pc:spChg chg="add del">
+          <ac:chgData name="Kaung Nyi Naing" userId="5a99cc02-cb89-4ca5-b1ec-1f82f4f974cc" providerId="ADAL" clId="{38D6FE23-4415-44DB-9B99-5C09F2291F92}" dt="2026-03-06T19:44:36.631" v="1521" actId="26606"/>
+          <ac:spMkLst>
+            <pc:docMk/>
+            <pc:sldMk cId="783867445" sldId="260"/>
+            <ac:spMk id="11" creationId="{6804CCDD-88C7-4B43-A381-F2D8DAF62BE3}"/>
+          </ac:spMkLst>
+        </pc:spChg>
+        <pc:spChg chg="add del">
+          <ac:chgData name="Kaung Nyi Naing" userId="5a99cc02-cb89-4ca5-b1ec-1f82f4f974cc" providerId="ADAL" clId="{38D6FE23-4415-44DB-9B99-5C09F2291F92}" dt="2026-03-06T19:44:36.631" v="1521" actId="26606"/>
+          <ac:spMkLst>
+            <pc:docMk/>
+            <pc:sldMk cId="783867445" sldId="260"/>
+            <ac:spMk id="13" creationId="{BBECEAC1-4BBC-4815-B44E-D9B231A3FC16}"/>
+          </ac:spMkLst>
+        </pc:spChg>
+        <pc:spChg chg="add del">
+          <ac:chgData name="Kaung Nyi Naing" userId="5a99cc02-cb89-4ca5-b1ec-1f82f4f974cc" providerId="ADAL" clId="{38D6FE23-4415-44DB-9B99-5C09F2291F92}" dt="2026-03-06T19:44:52.653" v="1523" actId="26606"/>
+          <ac:spMkLst>
+            <pc:docMk/>
+            <pc:sldMk cId="783867445" sldId="260"/>
+            <ac:spMk id="18" creationId="{1A042C51-0ACE-419E-A039-04AD72522158}"/>
+          </ac:spMkLst>
+        </pc:spChg>
+        <pc:spChg chg="add del">
+          <ac:chgData name="Kaung Nyi Naing" userId="5a99cc02-cb89-4ca5-b1ec-1f82f4f974cc" providerId="ADAL" clId="{38D6FE23-4415-44DB-9B99-5C09F2291F92}" dt="2026-03-06T19:44:52.653" v="1523" actId="26606"/>
+          <ac:spMkLst>
+            <pc:docMk/>
+            <pc:sldMk cId="783867445" sldId="260"/>
+            <ac:spMk id="25" creationId="{D5B0017B-2ECA-49AF-B397-DC140825DF8D}"/>
+          </ac:spMkLst>
+        </pc:spChg>
+        <pc:spChg chg="add">
+          <ac:chgData name="Kaung Nyi Naing" userId="5a99cc02-cb89-4ca5-b1ec-1f82f4f974cc" providerId="ADAL" clId="{38D6FE23-4415-44DB-9B99-5C09F2291F92}" dt="2026-03-06T19:44:52.653" v="1523" actId="26606"/>
+          <ac:spMkLst>
+            <pc:docMk/>
+            <pc:sldMk cId="783867445" sldId="260"/>
+            <ac:spMk id="32" creationId="{1A042C51-0ACE-419E-A039-04AD72522158}"/>
+          </ac:spMkLst>
+        </pc:spChg>
+        <pc:spChg chg="add">
+          <ac:chgData name="Kaung Nyi Naing" userId="5a99cc02-cb89-4ca5-b1ec-1f82f4f974cc" providerId="ADAL" clId="{38D6FE23-4415-44DB-9B99-5C09F2291F92}" dt="2026-03-06T19:44:52.653" v="1523" actId="26606"/>
+          <ac:spMkLst>
+            <pc:docMk/>
+            <pc:sldMk cId="783867445" sldId="260"/>
+            <ac:spMk id="39" creationId="{D5B0017B-2ECA-49AF-B397-DC140825DF8D}"/>
+          </ac:spMkLst>
+        </pc:spChg>
+        <pc:grpChg chg="add del">
+          <ac:chgData name="Kaung Nyi Naing" userId="5a99cc02-cb89-4ca5-b1ec-1f82f4f974cc" providerId="ADAL" clId="{38D6FE23-4415-44DB-9B99-5C09F2291F92}" dt="2026-03-06T19:44:52.653" v="1523" actId="26606"/>
+          <ac:grpSpMkLst>
+            <pc:docMk/>
+            <pc:sldMk cId="783867445" sldId="260"/>
+            <ac:grpSpMk id="20" creationId="{AE1C45F0-260A-458C-96ED-C1F6D2151219}"/>
+          </ac:grpSpMkLst>
+        </pc:grpChg>
+        <pc:grpChg chg="add">
+          <ac:chgData name="Kaung Nyi Naing" userId="5a99cc02-cb89-4ca5-b1ec-1f82f4f974cc" providerId="ADAL" clId="{38D6FE23-4415-44DB-9B99-5C09F2291F92}" dt="2026-03-06T19:44:52.653" v="1523" actId="26606"/>
+          <ac:grpSpMkLst>
+            <pc:docMk/>
+            <pc:sldMk cId="783867445" sldId="260"/>
+            <ac:grpSpMk id="34" creationId="{AE1C45F0-260A-458C-96ED-C1F6D2151219}"/>
+          </ac:grpSpMkLst>
+        </pc:grpChg>
+        <pc:picChg chg="mod modCrop">
+          <ac:chgData name="Kaung Nyi Naing" userId="5a99cc02-cb89-4ca5-b1ec-1f82f4f974cc" providerId="ADAL" clId="{38D6FE23-4415-44DB-9B99-5C09F2291F92}" dt="2026-03-06T19:44:36.631" v="1521" actId="26606"/>
+          <ac:picMkLst>
+            <pc:docMk/>
+            <pc:sldMk cId="783867445" sldId="260"/>
+            <ac:picMk id="4" creationId="{6DAF3E27-BF4F-D680-0CBB-0087C310032D}"/>
+          </ac:picMkLst>
+        </pc:picChg>
+        <pc:picChg chg="mod">
+          <ac:chgData name="Kaung Nyi Naing" userId="5a99cc02-cb89-4ca5-b1ec-1f82f4f974cc" providerId="ADAL" clId="{38D6FE23-4415-44DB-9B99-5C09F2291F92}" dt="2026-03-06T19:44:36.631" v="1521" actId="26606"/>
+          <ac:picMkLst>
+            <pc:docMk/>
+            <pc:sldMk cId="783867445" sldId="260"/>
+            <ac:picMk id="5" creationId="{BDBFA0B5-E842-DDAA-DBDC-B26D8398417D}"/>
+          </ac:picMkLst>
+        </pc:picChg>
+        <pc:picChg chg="mod ord modCrop">
+          <ac:chgData name="Kaung Nyi Naing" userId="5a99cc02-cb89-4ca5-b1ec-1f82f4f974cc" providerId="ADAL" clId="{38D6FE23-4415-44DB-9B99-5C09F2291F92}" dt="2026-03-06T19:44:36.631" v="1521" actId="26606"/>
+          <ac:picMkLst>
+            <pc:docMk/>
+            <pc:sldMk cId="783867445" sldId="260"/>
+            <ac:picMk id="6" creationId="{F7E822F0-9BC7-3701-EEDF-441DFD6E3E18}"/>
+          </ac:picMkLst>
+        </pc:picChg>
+        <pc:cxnChg chg="del">
+          <ac:chgData name="Kaung Nyi Naing" userId="5a99cc02-cb89-4ca5-b1ec-1f82f4f974cc" providerId="ADAL" clId="{38D6FE23-4415-44DB-9B99-5C09F2291F92}" dt="2026-03-06T19:44:52.653" v="1523" actId="26606"/>
+          <ac:cxnSpMkLst>
+            <pc:docMk/>
+            <pc:sldMk cId="783867445" sldId="260"/>
+            <ac:cxnSpMk id="27" creationId="{6CF1BAF6-AD41-4082-B212-8A1F9A2E8779}"/>
+          </ac:cxnSpMkLst>
+        </pc:cxnChg>
+        <pc:cxnChg chg="add">
+          <ac:chgData name="Kaung Nyi Naing" userId="5a99cc02-cb89-4ca5-b1ec-1f82f4f974cc" providerId="ADAL" clId="{38D6FE23-4415-44DB-9B99-5C09F2291F92}" dt="2026-03-06T19:44:52.653" v="1523" actId="26606"/>
+          <ac:cxnSpMkLst>
+            <pc:docMk/>
+            <pc:sldMk cId="783867445" sldId="260"/>
+            <ac:cxnSpMk id="41" creationId="{6CF1BAF6-AD41-4082-B212-8A1F9A2E8779}"/>
+          </ac:cxnSpMkLst>
+        </pc:cxnChg>
+      </pc:sldChg>
+      <pc:sldChg chg="addSp modSp mod setBg">
+        <pc:chgData name="Kaung Nyi Naing" userId="5a99cc02-cb89-4ca5-b1ec-1f82f4f974cc" providerId="ADAL" clId="{38D6FE23-4415-44DB-9B99-5C09F2291F92}" dt="2026-03-06T19:36:57.049" v="1456"/>
+        <pc:sldMkLst>
+          <pc:docMk/>
+          <pc:sldMk cId="2156346351" sldId="261"/>
+        </pc:sldMkLst>
+        <pc:spChg chg="mod">
+          <ac:chgData name="Kaung Nyi Naing" userId="5a99cc02-cb89-4ca5-b1ec-1f82f4f974cc" providerId="ADAL" clId="{38D6FE23-4415-44DB-9B99-5C09F2291F92}" dt="2026-03-06T06:50:14.138" v="1223" actId="26606"/>
+          <ac:spMkLst>
+            <pc:docMk/>
+            <pc:sldMk cId="2156346351" sldId="261"/>
+            <ac:spMk id="2" creationId="{D4E85203-ADD3-A7A8-825C-25E8E4DFB17A}"/>
+          </ac:spMkLst>
+        </pc:spChg>
+        <pc:spChg chg="mod">
+          <ac:chgData name="Kaung Nyi Naing" userId="5a99cc02-cb89-4ca5-b1ec-1f82f4f974cc" providerId="ADAL" clId="{38D6FE23-4415-44DB-9B99-5C09F2291F92}" dt="2026-03-06T06:50:14.138" v="1223" actId="26606"/>
+          <ac:spMkLst>
+            <pc:docMk/>
+            <pc:sldMk cId="2156346351" sldId="261"/>
+            <ac:spMk id="3" creationId="{AC54BD91-5103-2AA0-9A29-76D692A57709}"/>
+          </ac:spMkLst>
+        </pc:spChg>
+        <pc:spChg chg="add">
+          <ac:chgData name="Kaung Nyi Naing" userId="5a99cc02-cb89-4ca5-b1ec-1f82f4f974cc" providerId="ADAL" clId="{38D6FE23-4415-44DB-9B99-5C09F2291F92}" dt="2026-03-06T06:50:14.138" v="1223" actId="26606"/>
+          <ac:spMkLst>
+            <pc:docMk/>
+            <pc:sldMk cId="2156346351" sldId="261"/>
+            <ac:spMk id="10" creationId="{149FB5C3-7336-4FE0-A30C-CC0A3646D499}"/>
+          </ac:spMkLst>
+        </pc:spChg>
+        <pc:spChg chg="add">
+          <ac:chgData name="Kaung Nyi Naing" userId="5a99cc02-cb89-4ca5-b1ec-1f82f4f974cc" providerId="ADAL" clId="{38D6FE23-4415-44DB-9B99-5C09F2291F92}" dt="2026-03-06T06:50:14.138" v="1223" actId="26606"/>
+          <ac:spMkLst>
+            <pc:docMk/>
+            <pc:sldMk cId="2156346351" sldId="261"/>
+            <ac:spMk id="16" creationId="{0DA909B4-15FF-46A6-8A7F-7AEF977FE9ED}"/>
+          </ac:spMkLst>
+        </pc:spChg>
+        <pc:spChg chg="add">
+          <ac:chgData name="Kaung Nyi Naing" userId="5a99cc02-cb89-4ca5-b1ec-1f82f4f974cc" providerId="ADAL" clId="{38D6FE23-4415-44DB-9B99-5C09F2291F92}" dt="2026-03-06T06:50:14.138" v="1223" actId="26606"/>
+          <ac:spMkLst>
+            <pc:docMk/>
+            <pc:sldMk cId="2156346351" sldId="261"/>
+            <ac:spMk id="18" creationId="{1382A32C-5B0C-4B1C-A074-76C6DBCC9F87}"/>
+          </ac:spMkLst>
+        </pc:spChg>
+        <pc:grpChg chg="add">
+          <ac:chgData name="Kaung Nyi Naing" userId="5a99cc02-cb89-4ca5-b1ec-1f82f4f974cc" providerId="ADAL" clId="{38D6FE23-4415-44DB-9B99-5C09F2291F92}" dt="2026-03-06T06:50:14.138" v="1223" actId="26606"/>
+          <ac:grpSpMkLst>
+            <pc:docMk/>
+            <pc:sldMk cId="2156346351" sldId="261"/>
+            <ac:grpSpMk id="12" creationId="{19A6B5CE-CB1D-48EE-8B43-E952235C8371}"/>
+          </ac:grpSpMkLst>
+        </pc:grpChg>
+        <pc:picChg chg="mod ord">
+          <ac:chgData name="Kaung Nyi Naing" userId="5a99cc02-cb89-4ca5-b1ec-1f82f4f974cc" providerId="ADAL" clId="{38D6FE23-4415-44DB-9B99-5C09F2291F92}" dt="2026-03-06T06:50:14.138" v="1223" actId="26606"/>
+          <ac:picMkLst>
+            <pc:docMk/>
+            <pc:sldMk cId="2156346351" sldId="261"/>
+            <ac:picMk id="4" creationId="{204866C4-0F4E-6B54-8F29-CF591011D2F2}"/>
+          </ac:picMkLst>
+        </pc:picChg>
+        <pc:picChg chg="mod">
+          <ac:chgData name="Kaung Nyi Naing" userId="5a99cc02-cb89-4ca5-b1ec-1f82f4f974cc" providerId="ADAL" clId="{38D6FE23-4415-44DB-9B99-5C09F2291F92}" dt="2026-03-06T06:50:14.138" v="1223" actId="26606"/>
+          <ac:picMkLst>
+            <pc:docMk/>
+            <pc:sldMk cId="2156346351" sldId="261"/>
+            <ac:picMk id="5" creationId="{737D289B-2A55-DCA9-9704-C552DE09E599}"/>
+          </ac:picMkLst>
+        </pc:picChg>
+      </pc:sldChg>
+      <pc:sldChg chg="addSp modSp mod setBg">
+        <pc:chgData name="Kaung Nyi Naing" userId="5a99cc02-cb89-4ca5-b1ec-1f82f4f974cc" providerId="ADAL" clId="{38D6FE23-4415-44DB-9B99-5C09F2291F92}" dt="2026-03-06T19:51:25.771" v="1587" actId="171"/>
+        <pc:sldMkLst>
+          <pc:docMk/>
+          <pc:sldMk cId="464883383" sldId="262"/>
+        </pc:sldMkLst>
+        <pc:spChg chg="mod">
+          <ac:chgData name="Kaung Nyi Naing" userId="5a99cc02-cb89-4ca5-b1ec-1f82f4f974cc" providerId="ADAL" clId="{38D6FE23-4415-44DB-9B99-5C09F2291F92}" dt="2026-03-06T06:53:41.536" v="1305" actId="26606"/>
+          <ac:spMkLst>
+            <pc:docMk/>
+            <pc:sldMk cId="464883383" sldId="262"/>
+            <ac:spMk id="2" creationId="{F47189A5-8DB9-0FAC-AFE9-2AC7861C27BC}"/>
+          </ac:spMkLst>
+        </pc:spChg>
+        <pc:spChg chg="add mod ord">
+          <ac:chgData name="Kaung Nyi Naing" userId="5a99cc02-cb89-4ca5-b1ec-1f82f4f974cc" providerId="ADAL" clId="{38D6FE23-4415-44DB-9B99-5C09F2291F92}" dt="2026-03-06T19:51:25.771" v="1587" actId="171"/>
+          <ac:spMkLst>
+            <pc:docMk/>
+            <pc:sldMk cId="464883383" sldId="262"/>
+            <ac:spMk id="3" creationId="{62A4A455-976B-BBA5-1FCC-7B7D316E7444}"/>
+          </ac:spMkLst>
+        </pc:spChg>
+        <pc:spChg chg="add">
+          <ac:chgData name="Kaung Nyi Naing" userId="5a99cc02-cb89-4ca5-b1ec-1f82f4f974cc" providerId="ADAL" clId="{38D6FE23-4415-44DB-9B99-5C09F2291F92}" dt="2026-03-06T06:53:41.536" v="1305" actId="26606"/>
+          <ac:spMkLst>
+            <pc:docMk/>
+            <pc:sldMk cId="464883383" sldId="262"/>
+            <ac:spMk id="12" creationId="{C4879EFC-8E62-4E00-973C-C45EE9EC676D}"/>
+          </ac:spMkLst>
+        </pc:spChg>
+        <pc:spChg chg="add">
+          <ac:chgData name="Kaung Nyi Naing" userId="5a99cc02-cb89-4ca5-b1ec-1f82f4f974cc" providerId="ADAL" clId="{38D6FE23-4415-44DB-9B99-5C09F2291F92}" dt="2026-03-06T06:53:41.536" v="1305" actId="26606"/>
+          <ac:spMkLst>
+            <pc:docMk/>
+            <pc:sldMk cId="464883383" sldId="262"/>
+            <ac:spMk id="14" creationId="{D6A9C53F-5F90-40A5-8C85-5412D39C8C68}"/>
+          </ac:spMkLst>
+        </pc:spChg>
+        <pc:picChg chg="mod ord">
+          <ac:chgData name="Kaung Nyi Naing" userId="5a99cc02-cb89-4ca5-b1ec-1f82f4f974cc" providerId="ADAL" clId="{38D6FE23-4415-44DB-9B99-5C09F2291F92}" dt="2026-03-06T06:53:41.536" v="1305" actId="26606"/>
+          <ac:picMkLst>
+            <pc:docMk/>
+            <pc:sldMk cId="464883383" sldId="262"/>
+            <ac:picMk id="6" creationId="{C550AD97-3311-9FD8-AE41-C541F41EB31D}"/>
+          </ac:picMkLst>
+        </pc:picChg>
+        <pc:picChg chg="mod">
+          <ac:chgData name="Kaung Nyi Naing" userId="5a99cc02-cb89-4ca5-b1ec-1f82f4f974cc" providerId="ADAL" clId="{38D6FE23-4415-44DB-9B99-5C09F2291F92}" dt="2026-03-06T06:53:41.536" v="1305" actId="26606"/>
+          <ac:picMkLst>
+            <pc:docMk/>
+            <pc:sldMk cId="464883383" sldId="262"/>
+            <ac:picMk id="7" creationId="{0C1ECB9C-2624-71BF-70EA-1F69CE1EB032}"/>
+          </ac:picMkLst>
+        </pc:picChg>
+      </pc:sldChg>
+      <pc:sldChg chg="addSp modSp new mod setBg">
+        <pc:chgData name="Kaung Nyi Naing" userId="5a99cc02-cb89-4ca5-b1ec-1f82f4f974cc" providerId="ADAL" clId="{38D6FE23-4415-44DB-9B99-5C09F2291F92}" dt="2026-03-06T19:36:57.049" v="1456"/>
+        <pc:sldMkLst>
+          <pc:docMk/>
+          <pc:sldMk cId="1307048061" sldId="263"/>
+        </pc:sldMkLst>
+        <pc:spChg chg="mod">
+          <ac:chgData name="Kaung Nyi Naing" userId="5a99cc02-cb89-4ca5-b1ec-1f82f4f974cc" providerId="ADAL" clId="{38D6FE23-4415-44DB-9B99-5C09F2291F92}" dt="2026-03-06T06:53:56.777" v="1307" actId="26606"/>
+          <ac:spMkLst>
+            <pc:docMk/>
+            <pc:sldMk cId="1307048061" sldId="263"/>
+            <ac:spMk id="2" creationId="{25A6BD14-56B1-4493-C293-F5537CDD6D76}"/>
+          </ac:spMkLst>
+        </pc:spChg>
+        <pc:spChg chg="mod">
+          <ac:chgData name="Kaung Nyi Naing" userId="5a99cc02-cb89-4ca5-b1ec-1f82f4f974cc" providerId="ADAL" clId="{38D6FE23-4415-44DB-9B99-5C09F2291F92}" dt="2026-03-06T06:53:56.777" v="1307" actId="26606"/>
+          <ac:spMkLst>
+            <pc:docMk/>
+            <pc:sldMk cId="1307048061" sldId="263"/>
+            <ac:spMk id="3" creationId="{A1E481B9-5F84-CD64-434E-053A74AC77CD}"/>
+          </ac:spMkLst>
+        </pc:spChg>
+        <pc:spChg chg="add">
+          <ac:chgData name="Kaung Nyi Naing" userId="5a99cc02-cb89-4ca5-b1ec-1f82f4f974cc" providerId="ADAL" clId="{38D6FE23-4415-44DB-9B99-5C09F2291F92}" dt="2026-03-06T06:53:56.777" v="1307" actId="26606"/>
+          <ac:spMkLst>
+            <pc:docMk/>
+            <pc:sldMk cId="1307048061" sldId="263"/>
+            <ac:spMk id="8" creationId="{4522B21E-B2B9-4C72-9A71-C87EFD137480}"/>
+          </ac:spMkLst>
+        </pc:spChg>
+        <pc:spChg chg="add">
+          <ac:chgData name="Kaung Nyi Naing" userId="5a99cc02-cb89-4ca5-b1ec-1f82f4f974cc" providerId="ADAL" clId="{38D6FE23-4415-44DB-9B99-5C09F2291F92}" dt="2026-03-06T06:53:56.777" v="1307" actId="26606"/>
+          <ac:spMkLst>
+            <pc:docMk/>
+            <pc:sldMk cId="1307048061" sldId="263"/>
+            <ac:spMk id="10" creationId="{5EB7D2A2-F448-44D4-938C-DC84CBCB3B1E}"/>
+          </ac:spMkLst>
+        </pc:spChg>
+        <pc:spChg chg="add">
+          <ac:chgData name="Kaung Nyi Naing" userId="5a99cc02-cb89-4ca5-b1ec-1f82f4f974cc" providerId="ADAL" clId="{38D6FE23-4415-44DB-9B99-5C09F2291F92}" dt="2026-03-06T06:53:56.777" v="1307" actId="26606"/>
+          <ac:spMkLst>
+            <pc:docMk/>
+            <pc:sldMk cId="1307048061" sldId="263"/>
+            <ac:spMk id="12" creationId="{871AEA07-1E14-44B4-8E55-64EF049CD66F}"/>
+          </ac:spMkLst>
+        </pc:spChg>
+        <pc:cxnChg chg="add">
+          <ac:chgData name="Kaung Nyi Naing" userId="5a99cc02-cb89-4ca5-b1ec-1f82f4f974cc" providerId="ADAL" clId="{38D6FE23-4415-44DB-9B99-5C09F2291F92}" dt="2026-03-06T06:53:56.777" v="1307" actId="26606"/>
+          <ac:cxnSpMkLst>
+            <pc:docMk/>
+            <pc:sldMk cId="1307048061" sldId="263"/>
+            <ac:cxnSpMk id="14" creationId="{F7C8EA93-3210-4C62-99E9-153C275E3A87}"/>
+          </ac:cxnSpMkLst>
+        </pc:cxnChg>
+      </pc:sldChg>
+      <pc:sldChg chg="addSp modSp new mod setBg">
+        <pc:chgData name="Kaung Nyi Naing" userId="5a99cc02-cb89-4ca5-b1ec-1f82f4f974cc" providerId="ADAL" clId="{38D6FE23-4415-44DB-9B99-5C09F2291F92}" dt="2026-03-06T19:51:57.199" v="1594" actId="14100"/>
+        <pc:sldMkLst>
+          <pc:docMk/>
+          <pc:sldMk cId="987459789" sldId="264"/>
+        </pc:sldMkLst>
+        <pc:spChg chg="mod">
+          <ac:chgData name="Kaung Nyi Naing" userId="5a99cc02-cb89-4ca5-b1ec-1f82f4f974cc" providerId="ADAL" clId="{38D6FE23-4415-44DB-9B99-5C09F2291F92}" dt="2026-03-06T06:53:50.746" v="1306" actId="26606"/>
+          <ac:spMkLst>
+            <pc:docMk/>
+            <pc:sldMk cId="987459789" sldId="264"/>
+            <ac:spMk id="2" creationId="{8EBF0BB0-096F-E5B1-09A5-B57C2D99AF69}"/>
+          </ac:spMkLst>
+        </pc:spChg>
+        <pc:spChg chg="mod">
+          <ac:chgData name="Kaung Nyi Naing" userId="5a99cc02-cb89-4ca5-b1ec-1f82f4f974cc" providerId="ADAL" clId="{38D6FE23-4415-44DB-9B99-5C09F2291F92}" dt="2026-03-06T19:51:57.199" v="1594" actId="14100"/>
+          <ac:spMkLst>
+            <pc:docMk/>
+            <pc:sldMk cId="987459789" sldId="264"/>
+            <ac:spMk id="3" creationId="{9460E459-A6E5-A227-7974-F93D7642A902}"/>
+          </ac:spMkLst>
+        </pc:spChg>
+        <pc:spChg chg="add mod ord">
+          <ac:chgData name="Kaung Nyi Naing" userId="5a99cc02-cb89-4ca5-b1ec-1f82f4f974cc" providerId="ADAL" clId="{38D6FE23-4415-44DB-9B99-5C09F2291F92}" dt="2026-03-06T19:51:47.505" v="1592" actId="171"/>
+          <ac:spMkLst>
+            <pc:docMk/>
+            <pc:sldMk cId="987459789" sldId="264"/>
+            <ac:spMk id="4" creationId="{0B9FB95B-49A7-551E-5184-17AD5AD6319A}"/>
+          </ac:spMkLst>
+        </pc:spChg>
+        <pc:spChg chg="add">
+          <ac:chgData name="Kaung Nyi Naing" userId="5a99cc02-cb89-4ca5-b1ec-1f82f4f974cc" providerId="ADAL" clId="{38D6FE23-4415-44DB-9B99-5C09F2291F92}" dt="2026-03-06T06:53:50.746" v="1306" actId="26606"/>
+          <ac:spMkLst>
+            <pc:docMk/>
+            <pc:sldMk cId="987459789" sldId="264"/>
+            <ac:spMk id="8" creationId="{B6CDA21F-E7AF-4C75-8395-33F58D5B0E45}"/>
+          </ac:spMkLst>
+        </pc:spChg>
+        <pc:spChg chg="add">
+          <ac:chgData name="Kaung Nyi Naing" userId="5a99cc02-cb89-4ca5-b1ec-1f82f4f974cc" providerId="ADAL" clId="{38D6FE23-4415-44DB-9B99-5C09F2291F92}" dt="2026-03-06T06:53:50.746" v="1306" actId="26606"/>
+          <ac:spMkLst>
+            <pc:docMk/>
+            <pc:sldMk cId="987459789" sldId="264"/>
+            <ac:spMk id="15" creationId="{D5B0017B-2ECA-49AF-B397-DC140825DF8D}"/>
+          </ac:spMkLst>
+        </pc:spChg>
+        <pc:grpChg chg="add">
+          <ac:chgData name="Kaung Nyi Naing" userId="5a99cc02-cb89-4ca5-b1ec-1f82f4f974cc" providerId="ADAL" clId="{38D6FE23-4415-44DB-9B99-5C09F2291F92}" dt="2026-03-06T06:53:50.746" v="1306" actId="26606"/>
+          <ac:grpSpMkLst>
+            <pc:docMk/>
+            <pc:sldMk cId="987459789" sldId="264"/>
+            <ac:grpSpMk id="10" creationId="{AE1C45F0-260A-458C-96ED-C1F6D2151219}"/>
+          </ac:grpSpMkLst>
+        </pc:grpChg>
+        <pc:cxnChg chg="add">
+          <ac:chgData name="Kaung Nyi Naing" userId="5a99cc02-cb89-4ca5-b1ec-1f82f4f974cc" providerId="ADAL" clId="{38D6FE23-4415-44DB-9B99-5C09F2291F92}" dt="2026-03-06T06:53:50.746" v="1306" actId="26606"/>
+          <ac:cxnSpMkLst>
+            <pc:docMk/>
+            <pc:sldMk cId="987459789" sldId="264"/>
+            <ac:cxnSpMk id="17" creationId="{6CF1BAF6-AD41-4082-B212-8A1F9A2E8779}"/>
+          </ac:cxnSpMkLst>
+        </pc:cxnChg>
+      </pc:sldChg>
+      <pc:sldChg chg="addSp delSp modSp new mod setBg delDesignElem chgLayout">
+        <pc:chgData name="Kaung Nyi Naing" userId="5a99cc02-cb89-4ca5-b1ec-1f82f4f974cc" providerId="ADAL" clId="{38D6FE23-4415-44DB-9B99-5C09F2291F92}" dt="2026-03-06T19:48:07.944" v="1543" actId="6264"/>
+        <pc:sldMkLst>
+          <pc:docMk/>
+          <pc:sldMk cId="3494885687" sldId="265"/>
+        </pc:sldMkLst>
+        <pc:spChg chg="mod ord">
+          <ac:chgData name="Kaung Nyi Naing" userId="5a99cc02-cb89-4ca5-b1ec-1f82f4f974cc" providerId="ADAL" clId="{38D6FE23-4415-44DB-9B99-5C09F2291F92}" dt="2026-03-06T19:48:07.944" v="1543" actId="6264"/>
+          <ac:spMkLst>
+            <pc:docMk/>
+            <pc:sldMk cId="3494885687" sldId="265"/>
+            <ac:spMk id="2" creationId="{524EA346-4BD7-2077-AD36-25A4724A96E2}"/>
+          </ac:spMkLst>
+        </pc:spChg>
+        <pc:spChg chg="mod ord">
+          <ac:chgData name="Kaung Nyi Naing" userId="5a99cc02-cb89-4ca5-b1ec-1f82f4f974cc" providerId="ADAL" clId="{38D6FE23-4415-44DB-9B99-5C09F2291F92}" dt="2026-03-06T19:48:07.944" v="1543" actId="6264"/>
+          <ac:spMkLst>
+            <pc:docMk/>
+            <pc:sldMk cId="3494885687" sldId="265"/>
+            <ac:spMk id="3" creationId="{0BEDA8CB-745B-D923-92EF-65FE8AF01F0C}"/>
+          </ac:spMkLst>
+        </pc:spChg>
+        <pc:spChg chg="add mod ord">
+          <ac:chgData name="Kaung Nyi Naing" userId="5a99cc02-cb89-4ca5-b1ec-1f82f4f974cc" providerId="ADAL" clId="{38D6FE23-4415-44DB-9B99-5C09F2291F92}" dt="2026-03-06T19:47:29.579" v="1541" actId="171"/>
+          <ac:spMkLst>
+            <pc:docMk/>
+            <pc:sldMk cId="3494885687" sldId="265"/>
+            <ac:spMk id="4" creationId="{B7ECEE6E-3904-3BE7-0548-3A958CDD649B}"/>
+          </ac:spMkLst>
+        </pc:spChg>
+        <pc:spChg chg="add del mod">
+          <ac:chgData name="Kaung Nyi Naing" userId="5a99cc02-cb89-4ca5-b1ec-1f82f4f974cc" providerId="ADAL" clId="{38D6FE23-4415-44DB-9B99-5C09F2291F92}" dt="2026-03-06T19:48:07.944" v="1543" actId="6264"/>
+          <ac:spMkLst>
+            <pc:docMk/>
+            <pc:sldMk cId="3494885687" sldId="265"/>
+            <ac:spMk id="5" creationId="{A20BA37A-AD9B-7033-D9C2-8D0776588EBA}"/>
+          </ac:spMkLst>
+        </pc:spChg>
+        <pc:spChg chg="add del mod">
+          <ac:chgData name="Kaung Nyi Naing" userId="5a99cc02-cb89-4ca5-b1ec-1f82f4f974cc" providerId="ADAL" clId="{38D6FE23-4415-44DB-9B99-5C09F2291F92}" dt="2026-03-06T19:48:07.944" v="1543" actId="6264"/>
+          <ac:spMkLst>
+            <pc:docMk/>
+            <pc:sldMk cId="3494885687" sldId="265"/>
+            <ac:spMk id="6" creationId="{88D5846E-E436-38A8-F89B-4AF98CA84426}"/>
+          </ac:spMkLst>
+        </pc:spChg>
+        <pc:spChg chg="add del">
+          <ac:chgData name="Kaung Nyi Naing" userId="5a99cc02-cb89-4ca5-b1ec-1f82f4f974cc" providerId="ADAL" clId="{38D6FE23-4415-44DB-9B99-5C09F2291F92}" dt="2026-03-06T06:49:43.427" v="1221" actId="26606"/>
+          <ac:spMkLst>
+            <pc:docMk/>
+            <pc:sldMk cId="3494885687" sldId="265"/>
+            <ac:spMk id="16" creationId="{66E48AFA-8884-4F68-A44F-D2C1E8609C5A}"/>
+          </ac:spMkLst>
+        </pc:spChg>
+        <pc:spChg chg="add del">
+          <ac:chgData name="Kaung Nyi Naing" userId="5a99cc02-cb89-4ca5-b1ec-1f82f4f974cc" providerId="ADAL" clId="{38D6FE23-4415-44DB-9B99-5C09F2291F92}" dt="2026-03-06T06:49:43.427" v="1221" actId="26606"/>
+          <ac:spMkLst>
+            <pc:docMk/>
+            <pc:sldMk cId="3494885687" sldId="265"/>
+            <ac:spMk id="18" creationId="{969D19A6-08CB-498C-93EC-3FFB021FC68A}"/>
+          </ac:spMkLst>
+        </pc:spChg>
+        <pc:spChg chg="add del">
+          <ac:chgData name="Kaung Nyi Naing" userId="5a99cc02-cb89-4ca5-b1ec-1f82f4f974cc" providerId="ADAL" clId="{38D6FE23-4415-44DB-9B99-5C09F2291F92}" dt="2026-03-06T19:46:49.016" v="1534" actId="26606"/>
+          <ac:spMkLst>
+            <pc:docMk/>
+            <pc:sldMk cId="3494885687" sldId="265"/>
+            <ac:spMk id="23" creationId="{32AEEBC8-9D30-42EF-95F2-386C2653FBF0}"/>
+          </ac:spMkLst>
+        </pc:spChg>
+        <pc:spChg chg="add del">
+          <ac:chgData name="Kaung Nyi Naing" userId="5a99cc02-cb89-4ca5-b1ec-1f82f4f974cc" providerId="ADAL" clId="{38D6FE23-4415-44DB-9B99-5C09F2291F92}" dt="2026-03-06T19:46:49.016" v="1534" actId="26606"/>
+          <ac:spMkLst>
+            <pc:docMk/>
+            <pc:sldMk cId="3494885687" sldId="265"/>
+            <ac:spMk id="25" creationId="{2E92FA66-67D7-4CB4-94D3-E643A9AD4757}"/>
+          </ac:spMkLst>
+        </pc:spChg>
+        <pc:spChg chg="add del">
+          <ac:chgData name="Kaung Nyi Naing" userId="5a99cc02-cb89-4ca5-b1ec-1f82f4f974cc" providerId="ADAL" clId="{38D6FE23-4415-44DB-9B99-5C09F2291F92}" dt="2026-03-06T19:48:07.944" v="1543" actId="6264"/>
+          <ac:spMkLst>
+            <pc:docMk/>
+            <pc:sldMk cId="3494885687" sldId="265"/>
+            <ac:spMk id="30" creationId="{66E48AFA-8884-4F68-A44F-D2C1E8609C5A}"/>
+          </ac:spMkLst>
+        </pc:spChg>
+        <pc:spChg chg="add del">
+          <ac:chgData name="Kaung Nyi Naing" userId="5a99cc02-cb89-4ca5-b1ec-1f82f4f974cc" providerId="ADAL" clId="{38D6FE23-4415-44DB-9B99-5C09F2291F92}" dt="2026-03-06T19:48:07.944" v="1543" actId="6264"/>
+          <ac:spMkLst>
+            <pc:docMk/>
+            <pc:sldMk cId="3494885687" sldId="265"/>
+            <ac:spMk id="32" creationId="{969D19A6-08CB-498C-93EC-3FFB021FC68A}"/>
+          </ac:spMkLst>
+        </pc:spChg>
+        <pc:picChg chg="add del">
+          <ac:chgData name="Kaung Nyi Naing" userId="5a99cc02-cb89-4ca5-b1ec-1f82f4f974cc" providerId="ADAL" clId="{38D6FE23-4415-44DB-9B99-5C09F2291F92}" dt="2026-03-06T06:42:32.474" v="1100" actId="21"/>
+          <ac:picMkLst>
+            <pc:docMk/>
+            <pc:sldMk cId="3494885687" sldId="265"/>
+            <ac:picMk id="5" creationId="{19453361-843A-5FAF-9C2A-90DD90EA050D}"/>
+          </ac:picMkLst>
+        </pc:picChg>
+        <pc:picChg chg="add del mod">
+          <ac:chgData name="Kaung Nyi Naing" userId="5a99cc02-cb89-4ca5-b1ec-1f82f4f974cc" providerId="ADAL" clId="{38D6FE23-4415-44DB-9B99-5C09F2291F92}" dt="2026-03-06T06:43:44.623" v="1107" actId="478"/>
+          <ac:picMkLst>
+            <pc:docMk/>
+            <pc:sldMk cId="3494885687" sldId="265"/>
+            <ac:picMk id="7" creationId="{EB4D0FC8-B839-C867-2137-BBFEC0FDF7D4}"/>
+          </ac:picMkLst>
+        </pc:picChg>
+        <pc:picChg chg="add del mod">
+          <ac:chgData name="Kaung Nyi Naing" userId="5a99cc02-cb89-4ca5-b1ec-1f82f4f974cc" providerId="ADAL" clId="{38D6FE23-4415-44DB-9B99-5C09F2291F92}" dt="2026-03-06T06:44:53.270" v="1114" actId="478"/>
+          <ac:picMkLst>
+            <pc:docMk/>
+            <pc:sldMk cId="3494885687" sldId="265"/>
+            <ac:picMk id="9" creationId="{3CB3F94A-F829-6EB4-24A0-7AB6DB449D5A}"/>
+          </ac:picMkLst>
+        </pc:picChg>
+        <pc:picChg chg="add mod ord">
+          <ac:chgData name="Kaung Nyi Naing" userId="5a99cc02-cb89-4ca5-b1ec-1f82f4f974cc" providerId="ADAL" clId="{38D6FE23-4415-44DB-9B99-5C09F2291F92}" dt="2026-03-06T19:46:49.016" v="1534" actId="26606"/>
+          <ac:picMkLst>
+            <pc:docMk/>
+            <pc:sldMk cId="3494885687" sldId="265"/>
+            <ac:picMk id="11" creationId="{9C06539E-E0BD-AA45-F1B2-24321EE6EC3D}"/>
+          </ac:picMkLst>
+        </pc:picChg>
+      </pc:sldChg>
+      <pc:sldChg chg="addSp delSp modSp new mod setBg">
+        <pc:chgData name="Kaung Nyi Naing" userId="5a99cc02-cb89-4ca5-b1ec-1f82f4f974cc" providerId="ADAL" clId="{38D6FE23-4415-44DB-9B99-5C09F2291F92}" dt="2026-03-06T19:50:47.013" v="1581" actId="1076"/>
+        <pc:sldMkLst>
+          <pc:docMk/>
+          <pc:sldMk cId="35257016" sldId="266"/>
+        </pc:sldMkLst>
+        <pc:spChg chg="mod ord">
+          <ac:chgData name="Kaung Nyi Naing" userId="5a99cc02-cb89-4ca5-b1ec-1f82f4f974cc" providerId="ADAL" clId="{38D6FE23-4415-44DB-9B99-5C09F2291F92}" dt="2026-03-06T19:41:56.118" v="1501" actId="14100"/>
+          <ac:spMkLst>
+            <pc:docMk/>
+            <pc:sldMk cId="35257016" sldId="266"/>
+            <ac:spMk id="2" creationId="{B419A6DD-318D-944E-CF06-D17DB0647DC4}"/>
+          </ac:spMkLst>
+        </pc:spChg>
+        <pc:spChg chg="add mod ord">
+          <ac:chgData name="Kaung Nyi Naing" userId="5a99cc02-cb89-4ca5-b1ec-1f82f4f974cc" providerId="ADAL" clId="{38D6FE23-4415-44DB-9B99-5C09F2291F92}" dt="2026-03-06T19:42:00.950" v="1502" actId="14100"/>
+          <ac:spMkLst>
+            <pc:docMk/>
+            <pc:sldMk cId="35257016" sldId="266"/>
+            <ac:spMk id="3" creationId="{1458899A-06C4-8E90-3527-3EFA988F0BD1}"/>
+          </ac:spMkLst>
+        </pc:spChg>
+        <pc:spChg chg="del">
+          <ac:chgData name="Kaung Nyi Naing" userId="5a99cc02-cb89-4ca5-b1ec-1f82f4f974cc" providerId="ADAL" clId="{38D6FE23-4415-44DB-9B99-5C09F2291F92}" dt="2026-03-06T06:42:57.848" v="1102"/>
+          <ac:spMkLst>
+            <pc:docMk/>
+            <pc:sldMk cId="35257016" sldId="266"/>
+            <ac:spMk id="3" creationId="{BCFF8D9E-60A3-84AC-B259-08D8B39A0C3E}"/>
+          </ac:spMkLst>
+        </pc:spChg>
+        <pc:spChg chg="add mod ord">
+          <ac:chgData name="Kaung Nyi Naing" userId="5a99cc02-cb89-4ca5-b1ec-1f82f4f974cc" providerId="ADAL" clId="{38D6FE23-4415-44DB-9B99-5C09F2291F92}" dt="2026-03-06T19:50:47.013" v="1581" actId="1076"/>
+          <ac:spMkLst>
+            <pc:docMk/>
+            <pc:sldMk cId="35257016" sldId="266"/>
+            <ac:spMk id="4" creationId="{F7E04CD1-2674-2893-B401-9DA8242B52E0}"/>
+          </ac:spMkLst>
+        </pc:spChg>
+        <pc:spChg chg="add del">
+          <ac:chgData name="Kaung Nyi Naing" userId="5a99cc02-cb89-4ca5-b1ec-1f82f4f974cc" providerId="ADAL" clId="{38D6FE23-4415-44DB-9B99-5C09F2291F92}" dt="2026-03-06T06:50:49.915" v="1232" actId="26606"/>
+          <ac:spMkLst>
+            <pc:docMk/>
+            <pc:sldMk cId="35257016" sldId="266"/>
+            <ac:spMk id="7" creationId="{DFCA2118-59A2-4310-A4B2-F2CBA821E842}"/>
+          </ac:spMkLst>
+        </pc:spChg>
+        <pc:spChg chg="add del">
+          <ac:chgData name="Kaung Nyi Naing" userId="5a99cc02-cb89-4ca5-b1ec-1f82f4f974cc" providerId="ADAL" clId="{38D6FE23-4415-44DB-9B99-5C09F2291F92}" dt="2026-03-06T06:47:56.569" v="1208" actId="26606"/>
+          <ac:spMkLst>
+            <pc:docMk/>
+            <pc:sldMk cId="35257016" sldId="266"/>
+            <ac:spMk id="9" creationId="{DF99754E-1E20-D4E9-0F96-4021C6974632}"/>
+          </ac:spMkLst>
+        </pc:spChg>
+        <pc:spChg chg="add del">
+          <ac:chgData name="Kaung Nyi Naing" userId="5a99cc02-cb89-4ca5-b1ec-1f82f4f974cc" providerId="ADAL" clId="{38D6FE23-4415-44DB-9B99-5C09F2291F92}" dt="2026-03-06T06:50:49.915" v="1232" actId="26606"/>
+          <ac:spMkLst>
+            <pc:docMk/>
+            <pc:sldMk cId="35257016" sldId="266"/>
+            <ac:spMk id="10" creationId="{0E91F5CA-B392-444C-88E3-BF5BAAEBDEB0}"/>
+          </ac:spMkLst>
+        </pc:spChg>
+        <pc:spChg chg="add del">
+          <ac:chgData name="Kaung Nyi Naing" userId="5a99cc02-cb89-4ca5-b1ec-1f82f4f974cc" providerId="ADAL" clId="{38D6FE23-4415-44DB-9B99-5C09F2291F92}" dt="2026-03-06T06:47:56.569" v="1208" actId="26606"/>
+          <ac:spMkLst>
+            <pc:docMk/>
+            <pc:sldMk cId="35257016" sldId="266"/>
+            <ac:spMk id="12" creationId="{058A14AF-9FB5-4CC7-BA35-E8E85D3EDF0E}"/>
+          </ac:spMkLst>
+        </pc:spChg>
+        <pc:spChg chg="add del">
+          <ac:chgData name="Kaung Nyi Naing" userId="5a99cc02-cb89-4ca5-b1ec-1f82f4f974cc" providerId="ADAL" clId="{38D6FE23-4415-44DB-9B99-5C09F2291F92}" dt="2026-03-06T06:50:53.701" v="1233" actId="478"/>
+          <ac:spMkLst>
+            <pc:docMk/>
+            <pc:sldMk cId="35257016" sldId="266"/>
+            <ac:spMk id="13" creationId="{16B936A9-A9FE-50A4-8B46-418EB685CA5E}"/>
+          </ac:spMkLst>
+        </pc:spChg>
+        <pc:spChg chg="add del">
+          <ac:chgData name="Kaung Nyi Naing" userId="5a99cc02-cb89-4ca5-b1ec-1f82f4f974cc" providerId="ADAL" clId="{38D6FE23-4415-44DB-9B99-5C09F2291F92}" dt="2026-03-06T06:47:56.569" v="1208" actId="26606"/>
+          <ac:spMkLst>
+            <pc:docMk/>
+            <pc:sldMk cId="35257016" sldId="266"/>
+            <ac:spMk id="14" creationId="{3A9A4357-BD1D-4622-A4FE-766E6AB8DE84}"/>
+          </ac:spMkLst>
+        </pc:spChg>
+        <pc:spChg chg="add del">
+          <ac:chgData name="Kaung Nyi Naing" userId="5a99cc02-cb89-4ca5-b1ec-1f82f4f974cc" providerId="ADAL" clId="{38D6FE23-4415-44DB-9B99-5C09F2291F92}" dt="2026-03-06T06:47:56.569" v="1208" actId="26606"/>
+          <ac:spMkLst>
+            <pc:docMk/>
+            <pc:sldMk cId="35257016" sldId="266"/>
+            <ac:spMk id="16" creationId="{E659831F-0D9A-4C63-9EBB-8435B85A440F}"/>
+          </ac:spMkLst>
+        </pc:spChg>
+        <pc:spChg chg="add del">
+          <ac:chgData name="Kaung Nyi Naing" userId="5a99cc02-cb89-4ca5-b1ec-1f82f4f974cc" providerId="ADAL" clId="{38D6FE23-4415-44DB-9B99-5C09F2291F92}" dt="2026-03-06T19:40:46.434" v="1488" actId="26606"/>
+          <ac:spMkLst>
+            <pc:docMk/>
+            <pc:sldMk cId="35257016" sldId="266"/>
+            <ac:spMk id="17" creationId="{DBC6133C-0615-4CE4-9132-37E609A9BDFA}"/>
+          </ac:spMkLst>
+        </pc:spChg>
+        <pc:spChg chg="add del">
+          <ac:chgData name="Kaung Nyi Naing" userId="5a99cc02-cb89-4ca5-b1ec-1f82f4f974cc" providerId="ADAL" clId="{38D6FE23-4415-44DB-9B99-5C09F2291F92}" dt="2026-03-06T06:47:56.569" v="1208" actId="26606"/>
+          <ac:spMkLst>
+            <pc:docMk/>
+            <pc:sldMk cId="35257016" sldId="266"/>
+            <ac:spMk id="18" creationId="{E6995CE5-F890-4ABA-82A2-26507CE8D2A3}"/>
+          </ac:spMkLst>
+        </pc:spChg>
+        <pc:spChg chg="add del">
+          <ac:chgData name="Kaung Nyi Naing" userId="5a99cc02-cb89-4ca5-b1ec-1f82f4f974cc" providerId="ADAL" clId="{38D6FE23-4415-44DB-9B99-5C09F2291F92}" dt="2026-03-06T19:40:46.434" v="1488" actId="26606"/>
+          <ac:spMkLst>
+            <pc:docMk/>
+            <pc:sldMk cId="35257016" sldId="266"/>
+            <ac:spMk id="19" creationId="{169CC832-2974-4E8D-90ED-3E2941BA7336}"/>
+          </ac:spMkLst>
+        </pc:spChg>
+        <pc:spChg chg="add del">
+          <ac:chgData name="Kaung Nyi Naing" userId="5a99cc02-cb89-4ca5-b1ec-1f82f4f974cc" providerId="ADAL" clId="{38D6FE23-4415-44DB-9B99-5C09F2291F92}" dt="2026-03-06T19:40:46.434" v="1488" actId="26606"/>
+          <ac:spMkLst>
+            <pc:docMk/>
+            <pc:sldMk cId="35257016" sldId="266"/>
+            <ac:spMk id="21" creationId="{55222F96-971A-4F90-B841-6BAB416C7AC1}"/>
+          </ac:spMkLst>
+        </pc:spChg>
+        <pc:spChg chg="add del">
+          <ac:chgData name="Kaung Nyi Naing" userId="5a99cc02-cb89-4ca5-b1ec-1f82f4f974cc" providerId="ADAL" clId="{38D6FE23-4415-44DB-9B99-5C09F2291F92}" dt="2026-03-06T19:40:46.434" v="1488" actId="26606"/>
+          <ac:spMkLst>
+            <pc:docMk/>
+            <pc:sldMk cId="35257016" sldId="266"/>
+            <ac:spMk id="23" creationId="{08980754-6F4B-43C9-B9BE-127B6BED6586}"/>
+          </ac:spMkLst>
+        </pc:spChg>
+        <pc:spChg chg="add del">
+          <ac:chgData name="Kaung Nyi Naing" userId="5a99cc02-cb89-4ca5-b1ec-1f82f4f974cc" providerId="ADAL" clId="{38D6FE23-4415-44DB-9B99-5C09F2291F92}" dt="2026-03-06T19:40:46.434" v="1488" actId="26606"/>
+          <ac:spMkLst>
+            <pc:docMk/>
+            <pc:sldMk cId="35257016" sldId="266"/>
+            <ac:spMk id="25" creationId="{2C1BBA94-3F40-40AA-8BB9-E69E25E537C1}"/>
+          </ac:spMkLst>
+        </pc:spChg>
+        <pc:spChg chg="add del">
+          <ac:chgData name="Kaung Nyi Naing" userId="5a99cc02-cb89-4ca5-b1ec-1f82f4f974cc" providerId="ADAL" clId="{38D6FE23-4415-44DB-9B99-5C09F2291F92}" dt="2026-03-06T19:40:46.434" v="1488" actId="26606"/>
+          <ac:spMkLst>
+            <pc:docMk/>
+            <pc:sldMk cId="35257016" sldId="266"/>
+            <ac:spMk id="30" creationId="{47942995-B07F-4636-9A06-C6A104B260A8}"/>
+          </ac:spMkLst>
+        </pc:spChg>
+        <pc:spChg chg="add del">
+          <ac:chgData name="Kaung Nyi Naing" userId="5a99cc02-cb89-4ca5-b1ec-1f82f4f974cc" providerId="ADAL" clId="{38D6FE23-4415-44DB-9B99-5C09F2291F92}" dt="2026-03-06T19:40:46.434" v="1488" actId="26606"/>
+          <ac:spMkLst>
+            <pc:docMk/>
+            <pc:sldMk cId="35257016" sldId="266"/>
+            <ac:spMk id="37" creationId="{B81933D1-5615-42C7-9C0B-4EB7105CCE2D}"/>
+          </ac:spMkLst>
+        </pc:spChg>
+        <pc:spChg chg="add del">
+          <ac:chgData name="Kaung Nyi Naing" userId="5a99cc02-cb89-4ca5-b1ec-1f82f4f974cc" providerId="ADAL" clId="{38D6FE23-4415-44DB-9B99-5C09F2291F92}" dt="2026-03-06T19:40:46.434" v="1488" actId="26606"/>
+          <ac:spMkLst>
+            <pc:docMk/>
+            <pc:sldMk cId="35257016" sldId="266"/>
+            <ac:spMk id="39" creationId="{19C9EAEA-39D0-4B0E-A0EB-51E7B26740B1}"/>
+          </ac:spMkLst>
+        </pc:spChg>
+        <pc:picChg chg="add mod ord">
+          <ac:chgData name="Kaung Nyi Naing" userId="5a99cc02-cb89-4ca5-b1ec-1f82f4f974cc" providerId="ADAL" clId="{38D6FE23-4415-44DB-9B99-5C09F2291F92}" dt="2026-03-06T19:42:17.206" v="1504" actId="1076"/>
+          <ac:picMkLst>
+            <pc:docMk/>
+            <pc:sldMk cId="35257016" sldId="266"/>
+            <ac:picMk id="5" creationId="{19453361-843A-5FAF-9C2A-90DD90EA050D}"/>
+          </ac:picMkLst>
+        </pc:picChg>
+      </pc:sldChg>
+      <pc:sldChg chg="addSp delSp modSp new mod setBg">
+        <pc:chgData name="Kaung Nyi Naing" userId="5a99cc02-cb89-4ca5-b1ec-1f82f4f974cc" providerId="ADAL" clId="{38D6FE23-4415-44DB-9B99-5C09F2291F92}" dt="2026-03-06T19:50:22.295" v="1577" actId="14100"/>
+        <pc:sldMkLst>
+          <pc:docMk/>
+          <pc:sldMk cId="3340608992" sldId="267"/>
+        </pc:sldMkLst>
+        <pc:spChg chg="mod">
+          <ac:chgData name="Kaung Nyi Naing" userId="5a99cc02-cb89-4ca5-b1ec-1f82f4f974cc" providerId="ADAL" clId="{38D6FE23-4415-44DB-9B99-5C09F2291F92}" dt="2026-03-06T19:22:28.611" v="1361" actId="20577"/>
+          <ac:spMkLst>
+            <pc:docMk/>
+            <pc:sldMk cId="3340608992" sldId="267"/>
+            <ac:spMk id="2" creationId="{08B83C61-D979-D027-309D-CB11B8B04E6B}"/>
+          </ac:spMkLst>
+        </pc:spChg>
+        <pc:spChg chg="del">
+          <ac:chgData name="Kaung Nyi Naing" userId="5a99cc02-cb89-4ca5-b1ec-1f82f4f974cc" providerId="ADAL" clId="{38D6FE23-4415-44DB-9B99-5C09F2291F92}" dt="2026-03-06T19:22:22.583" v="1356" actId="22"/>
+          <ac:spMkLst>
+            <pc:docMk/>
+            <pc:sldMk cId="3340608992" sldId="267"/>
+            <ac:spMk id="3" creationId="{1F009159-E61C-D46C-D66D-784009AB5459}"/>
+          </ac:spMkLst>
+        </pc:spChg>
+        <pc:spChg chg="add mod ord">
+          <ac:chgData name="Kaung Nyi Naing" userId="5a99cc02-cb89-4ca5-b1ec-1f82f4f974cc" providerId="ADAL" clId="{38D6FE23-4415-44DB-9B99-5C09F2291F92}" dt="2026-03-06T19:50:22.295" v="1577" actId="14100"/>
+          <ac:spMkLst>
+            <pc:docMk/>
+            <pc:sldMk cId="3340608992" sldId="267"/>
+            <ac:spMk id="18" creationId="{0389F4DB-F979-7C52-54BD-C79CC18E699D}"/>
+          </ac:spMkLst>
+        </pc:spChg>
+        <pc:picChg chg="add mod ord">
+          <ac:chgData name="Kaung Nyi Naing" userId="5a99cc02-cb89-4ca5-b1ec-1f82f4f974cc" providerId="ADAL" clId="{38D6FE23-4415-44DB-9B99-5C09F2291F92}" dt="2026-03-06T19:49:12.143" v="1559" actId="14100"/>
+          <ac:picMkLst>
+            <pc:docMk/>
+            <pc:sldMk cId="3340608992" sldId="267"/>
+            <ac:picMk id="5" creationId="{00ED9508-07D4-956D-D010-A36E294EF2D0}"/>
+          </ac:picMkLst>
+        </pc:picChg>
+        <pc:picChg chg="add mod">
+          <ac:chgData name="Kaung Nyi Naing" userId="5a99cc02-cb89-4ca5-b1ec-1f82f4f974cc" providerId="ADAL" clId="{38D6FE23-4415-44DB-9B99-5C09F2291F92}" dt="2026-03-06T19:49:24.049" v="1563" actId="14100"/>
+          <ac:picMkLst>
+            <pc:docMk/>
+            <pc:sldMk cId="3340608992" sldId="267"/>
+            <ac:picMk id="7" creationId="{1860F457-C35A-A672-0C2A-AF8681850569}"/>
+          </ac:picMkLst>
+        </pc:picChg>
+        <pc:picChg chg="add mod">
+          <ac:chgData name="Kaung Nyi Naing" userId="5a99cc02-cb89-4ca5-b1ec-1f82f4f974cc" providerId="ADAL" clId="{38D6FE23-4415-44DB-9B99-5C09F2291F92}" dt="2026-03-06T19:49:30.761" v="1566" actId="14100"/>
+          <ac:picMkLst>
+            <pc:docMk/>
+            <pc:sldMk cId="3340608992" sldId="267"/>
+            <ac:picMk id="9" creationId="{31577075-78C9-A0FC-10A6-4452A686150D}"/>
+          </ac:picMkLst>
+        </pc:picChg>
+        <pc:picChg chg="add mod">
+          <ac:chgData name="Kaung Nyi Naing" userId="5a99cc02-cb89-4ca5-b1ec-1f82f4f974cc" providerId="ADAL" clId="{38D6FE23-4415-44DB-9B99-5C09F2291F92}" dt="2026-03-06T19:49:37.051" v="1568" actId="14100"/>
+          <ac:picMkLst>
+            <pc:docMk/>
+            <pc:sldMk cId="3340608992" sldId="267"/>
+            <ac:picMk id="11" creationId="{6620934E-2E5D-81E4-605E-E7766D2F56A6}"/>
+          </ac:picMkLst>
+        </pc:picChg>
+        <pc:picChg chg="add mod">
+          <ac:chgData name="Kaung Nyi Naing" userId="5a99cc02-cb89-4ca5-b1ec-1f82f4f974cc" providerId="ADAL" clId="{38D6FE23-4415-44DB-9B99-5C09F2291F92}" dt="2026-03-06T19:50:12.947" v="1576" actId="14100"/>
+          <ac:picMkLst>
+            <pc:docMk/>
+            <pc:sldMk cId="3340608992" sldId="267"/>
+            <ac:picMk id="13" creationId="{A6041964-42E2-FB6D-6EC3-9EECF4E195C4}"/>
+          </ac:picMkLst>
+        </pc:picChg>
+        <pc:picChg chg="add mod">
+          <ac:chgData name="Kaung Nyi Naing" userId="5a99cc02-cb89-4ca5-b1ec-1f82f4f974cc" providerId="ADAL" clId="{38D6FE23-4415-44DB-9B99-5C09F2291F92}" dt="2026-03-06T19:49:39.483" v="1569" actId="1076"/>
+          <ac:picMkLst>
+            <pc:docMk/>
+            <pc:sldMk cId="3340608992" sldId="267"/>
+            <ac:picMk id="15" creationId="{AA9B5933-357D-CC2A-684B-54C7572E2CA7}"/>
+          </ac:picMkLst>
+        </pc:picChg>
+        <pc:picChg chg="add mod modCrop">
+          <ac:chgData name="Kaung Nyi Naing" userId="5a99cc02-cb89-4ca5-b1ec-1f82f4f974cc" providerId="ADAL" clId="{38D6FE23-4415-44DB-9B99-5C09F2291F92}" dt="2026-03-06T19:50:07.555" v="1575" actId="1076"/>
+          <ac:picMkLst>
+            <pc:docMk/>
+            <pc:sldMk cId="3340608992" sldId="267"/>
+            <ac:picMk id="17" creationId="{A1F4DA1A-50D1-C7FD-3FD4-38DFD8C39817}"/>
+          </ac:picMkLst>
+        </pc:picChg>
+      </pc:sldChg>
+      <pc:sldMasterChg chg="setBg modSldLayout">
+        <pc:chgData name="Kaung Nyi Naing" userId="5a99cc02-cb89-4ca5-b1ec-1f82f4f974cc" providerId="ADAL" clId="{38D6FE23-4415-44DB-9B99-5C09F2291F92}" dt="2026-03-06T19:36:57.049" v="1456"/>
+        <pc:sldMasterMkLst>
+          <pc:docMk/>
+          <pc:sldMasterMk cId="1494155789" sldId="2147483660"/>
+        </pc:sldMasterMkLst>
+        <pc:sldLayoutChg chg="setBg">
+          <pc:chgData name="Kaung Nyi Naing" userId="5a99cc02-cb89-4ca5-b1ec-1f82f4f974cc" providerId="ADAL" clId="{38D6FE23-4415-44DB-9B99-5C09F2291F92}" dt="2026-03-06T19:36:57.049" v="1456"/>
+          <pc:sldLayoutMkLst>
+            <pc:docMk/>
+            <pc:sldMasterMk cId="1494155789" sldId="2147483660"/>
+            <pc:sldLayoutMk cId="470693734" sldId="2147483661"/>
+          </pc:sldLayoutMkLst>
+        </pc:sldLayoutChg>
+        <pc:sldLayoutChg chg="setBg">
+          <pc:chgData name="Kaung Nyi Naing" userId="5a99cc02-cb89-4ca5-b1ec-1f82f4f974cc" providerId="ADAL" clId="{38D6FE23-4415-44DB-9B99-5C09F2291F92}" dt="2026-03-06T19:36:57.049" v="1456"/>
+          <pc:sldLayoutMkLst>
+            <pc:docMk/>
+            <pc:sldMasterMk cId="1494155789" sldId="2147483660"/>
+            <pc:sldLayoutMk cId="4134983273" sldId="2147483662"/>
+          </pc:sldLayoutMkLst>
+        </pc:sldLayoutChg>
+        <pc:sldLayoutChg chg="setBg">
+          <pc:chgData name="Kaung Nyi Naing" userId="5a99cc02-cb89-4ca5-b1ec-1f82f4f974cc" providerId="ADAL" clId="{38D6FE23-4415-44DB-9B99-5C09F2291F92}" dt="2026-03-06T19:36:57.049" v="1456"/>
+          <pc:sldLayoutMkLst>
+            <pc:docMk/>
+            <pc:sldMasterMk cId="1494155789" sldId="2147483660"/>
+            <pc:sldLayoutMk cId="2358272448" sldId="2147483663"/>
+          </pc:sldLayoutMkLst>
+        </pc:sldLayoutChg>
+        <pc:sldLayoutChg chg="setBg">
+          <pc:chgData name="Kaung Nyi Naing" userId="5a99cc02-cb89-4ca5-b1ec-1f82f4f974cc" providerId="ADAL" clId="{38D6FE23-4415-44DB-9B99-5C09F2291F92}" dt="2026-03-06T19:36:57.049" v="1456"/>
+          <pc:sldLayoutMkLst>
+            <pc:docMk/>
+            <pc:sldMasterMk cId="1494155789" sldId="2147483660"/>
+            <pc:sldLayoutMk cId="3752000715" sldId="2147483664"/>
+          </pc:sldLayoutMkLst>
+        </pc:sldLayoutChg>
+        <pc:sldLayoutChg chg="setBg">
+          <pc:chgData name="Kaung Nyi Naing" userId="5a99cc02-cb89-4ca5-b1ec-1f82f4f974cc" providerId="ADAL" clId="{38D6FE23-4415-44DB-9B99-5C09F2291F92}" dt="2026-03-06T19:36:57.049" v="1456"/>
+          <pc:sldLayoutMkLst>
+            <pc:docMk/>
+            <pc:sldMasterMk cId="1494155789" sldId="2147483660"/>
+            <pc:sldLayoutMk cId="3494879926" sldId="2147483665"/>
+          </pc:sldLayoutMkLst>
+        </pc:sldLayoutChg>
+        <pc:sldLayoutChg chg="setBg">
+          <pc:chgData name="Kaung Nyi Naing" userId="5a99cc02-cb89-4ca5-b1ec-1f82f4f974cc" providerId="ADAL" clId="{38D6FE23-4415-44DB-9B99-5C09F2291F92}" dt="2026-03-06T19:36:57.049" v="1456"/>
+          <pc:sldLayoutMkLst>
+            <pc:docMk/>
+            <pc:sldMasterMk cId="1494155789" sldId="2147483660"/>
+            <pc:sldLayoutMk cId="136856431" sldId="2147483666"/>
+          </pc:sldLayoutMkLst>
+        </pc:sldLayoutChg>
+        <pc:sldLayoutChg chg="setBg">
+          <pc:chgData name="Kaung Nyi Naing" userId="5a99cc02-cb89-4ca5-b1ec-1f82f4f974cc" providerId="ADAL" clId="{38D6FE23-4415-44DB-9B99-5C09F2291F92}" dt="2026-03-06T19:36:57.049" v="1456"/>
+          <pc:sldLayoutMkLst>
+            <pc:docMk/>
+            <pc:sldMasterMk cId="1494155789" sldId="2147483660"/>
+            <pc:sldLayoutMk cId="3984032927" sldId="2147483667"/>
+          </pc:sldLayoutMkLst>
+        </pc:sldLayoutChg>
+        <pc:sldLayoutChg chg="setBg">
+          <pc:chgData name="Kaung Nyi Naing" userId="5a99cc02-cb89-4ca5-b1ec-1f82f4f974cc" providerId="ADAL" clId="{38D6FE23-4415-44DB-9B99-5C09F2291F92}" dt="2026-03-06T19:36:57.049" v="1456"/>
+          <pc:sldLayoutMkLst>
+            <pc:docMk/>
+            <pc:sldMasterMk cId="1494155789" sldId="2147483660"/>
+            <pc:sldLayoutMk cId="737101675" sldId="2147483668"/>
+          </pc:sldLayoutMkLst>
+        </pc:sldLayoutChg>
+        <pc:sldLayoutChg chg="setBg">
+          <pc:chgData name="Kaung Nyi Naing" userId="5a99cc02-cb89-4ca5-b1ec-1f82f4f974cc" providerId="ADAL" clId="{38D6FE23-4415-44DB-9B99-5C09F2291F92}" dt="2026-03-06T19:36:57.049" v="1456"/>
+          <pc:sldLayoutMkLst>
+            <pc:docMk/>
+            <pc:sldMasterMk cId="1494155789" sldId="2147483660"/>
+            <pc:sldLayoutMk cId="3703139904" sldId="2147483669"/>
+          </pc:sldLayoutMkLst>
+        </pc:sldLayoutChg>
+        <pc:sldLayoutChg chg="setBg">
+          <pc:chgData name="Kaung Nyi Naing" userId="5a99cc02-cb89-4ca5-b1ec-1f82f4f974cc" providerId="ADAL" clId="{38D6FE23-4415-44DB-9B99-5C09F2291F92}" dt="2026-03-06T19:36:57.049" v="1456"/>
+          <pc:sldLayoutMkLst>
+            <pc:docMk/>
+            <pc:sldMasterMk cId="1494155789" sldId="2147483660"/>
+            <pc:sldLayoutMk cId="257433780" sldId="2147483670"/>
+          </pc:sldLayoutMkLst>
+        </pc:sldLayoutChg>
+        <pc:sldLayoutChg chg="setBg">
+          <pc:chgData name="Kaung Nyi Naing" userId="5a99cc02-cb89-4ca5-b1ec-1f82f4f974cc" providerId="ADAL" clId="{38D6FE23-4415-44DB-9B99-5C09F2291F92}" dt="2026-03-06T19:36:57.049" v="1456"/>
+          <pc:sldLayoutMkLst>
+            <pc:docMk/>
+            <pc:sldMasterMk cId="1494155789" sldId="2147483660"/>
+            <pc:sldLayoutMk cId="3917323200" sldId="2147483671"/>
+          </pc:sldLayoutMkLst>
+        </pc:sldLayoutChg>
+      </pc:sldMasterChg>
+    </pc:docChg>
+  </pc:docChgLst>
+  <pc:docChgLst>
+    <pc:chgData name="Keeyan Canlas" userId="S::kcanlas@cpp.edu::65e9c99f-8a9d-4f4a-ad46-bebdd41008a0" providerId="AD" clId="Web-{D16EFD9D-A208-CD21-9B62-CFB4432E3DF8}"/>
+    <pc:docChg chg="addSld modSld">
+      <pc:chgData name="Keeyan Canlas" userId="S::kcanlas@cpp.edu::65e9c99f-8a9d-4f4a-ad46-bebdd41008a0" providerId="AD" clId="Web-{D16EFD9D-A208-CD21-9B62-CFB4432E3DF8}" dt="2026-03-04T04:13:12.249" v="125" actId="1076"/>
+      <pc:docMkLst>
+        <pc:docMk/>
+      </pc:docMkLst>
+      <pc:sldChg chg="addSp modSp new">
+        <pc:chgData name="Keeyan Canlas" userId="S::kcanlas@cpp.edu::65e9c99f-8a9d-4f4a-ad46-bebdd41008a0" providerId="AD" clId="Web-{D16EFD9D-A208-CD21-9B62-CFB4432E3DF8}" dt="2026-03-04T04:04:35.749" v="112" actId="20577"/>
+        <pc:sldMkLst>
+          <pc:docMk/>
+          <pc:sldMk cId="2156346351" sldId="261"/>
+        </pc:sldMkLst>
+        <pc:spChg chg="mod">
+          <ac:chgData name="Keeyan Canlas" userId="S::kcanlas@cpp.edu::65e9c99f-8a9d-4f4a-ad46-bebdd41008a0" providerId="AD" clId="Web-{D16EFD9D-A208-CD21-9B62-CFB4432E3DF8}" dt="2026-03-04T03:59:31.562" v="10" actId="20577"/>
+          <ac:spMkLst>
+            <pc:docMk/>
+            <pc:sldMk cId="2156346351" sldId="261"/>
+            <ac:spMk id="2" creationId="{D4E85203-ADD3-A7A8-825C-25E8E4DFB17A}"/>
+          </ac:spMkLst>
+        </pc:spChg>
+        <pc:spChg chg="mod">
+          <ac:chgData name="Keeyan Canlas" userId="S::kcanlas@cpp.edu::65e9c99f-8a9d-4f4a-ad46-bebdd41008a0" providerId="AD" clId="Web-{D16EFD9D-A208-CD21-9B62-CFB4432E3DF8}" dt="2026-03-04T04:04:35.749" v="112" actId="20577"/>
+          <ac:spMkLst>
+            <pc:docMk/>
+            <pc:sldMk cId="2156346351" sldId="261"/>
+            <ac:spMk id="3" creationId="{AC54BD91-5103-2AA0-9A29-76D692A57709}"/>
+          </ac:spMkLst>
+        </pc:spChg>
+        <pc:picChg chg="add mod">
+          <ac:chgData name="Keeyan Canlas" userId="S::kcanlas@cpp.edu::65e9c99f-8a9d-4f4a-ad46-bebdd41008a0" providerId="AD" clId="Web-{D16EFD9D-A208-CD21-9B62-CFB4432E3DF8}" dt="2026-03-04T04:02:17.062" v="95" actId="1076"/>
+          <ac:picMkLst>
+            <pc:docMk/>
+            <pc:sldMk cId="2156346351" sldId="261"/>
+            <ac:picMk id="4" creationId="{204866C4-0F4E-6B54-8F29-CF591011D2F2}"/>
+          </ac:picMkLst>
+        </pc:picChg>
+        <pc:picChg chg="add mod">
+          <ac:chgData name="Keeyan Canlas" userId="S::kcanlas@cpp.edu::65e9c99f-8a9d-4f4a-ad46-bebdd41008a0" providerId="AD" clId="Web-{D16EFD9D-A208-CD21-9B62-CFB4432E3DF8}" dt="2026-03-04T04:02:33.421" v="99" actId="14100"/>
+          <ac:picMkLst>
+            <pc:docMk/>
+            <pc:sldMk cId="2156346351" sldId="261"/>
+            <ac:picMk id="5" creationId="{737D289B-2A55-DCA9-9704-C552DE09E599}"/>
+          </ac:picMkLst>
+        </pc:picChg>
+      </pc:sldChg>
+      <pc:sldChg chg="addSp delSp modSp new">
+        <pc:chgData name="Keeyan Canlas" userId="S::kcanlas@cpp.edu::65e9c99f-8a9d-4f4a-ad46-bebdd41008a0" providerId="AD" clId="Web-{D16EFD9D-A208-CD21-9B62-CFB4432E3DF8}" dt="2026-03-04T04:13:12.249" v="125" actId="1076"/>
+        <pc:sldMkLst>
+          <pc:docMk/>
+          <pc:sldMk cId="464883383" sldId="262"/>
+        </pc:sldMkLst>
+        <pc:spChg chg="mod">
+          <ac:chgData name="Keeyan Canlas" userId="S::kcanlas@cpp.edu::65e9c99f-8a9d-4f4a-ad46-bebdd41008a0" providerId="AD" clId="Web-{D16EFD9D-A208-CD21-9B62-CFB4432E3DF8}" dt="2026-03-04T04:10:27.421" v="121" actId="20577"/>
+          <ac:spMkLst>
+            <pc:docMk/>
+            <pc:sldMk cId="464883383" sldId="262"/>
+            <ac:spMk id="2" creationId="{F47189A5-8DB9-0FAC-AFE9-2AC7861C27BC}"/>
+          </ac:spMkLst>
+        </pc:spChg>
+      </pc:sldChg>
+    </pc:docChg>
+  </pc:docChgLst>
+  <pc:docChgLst>
+    <pc:chgData name="Kaung Nyi Naing" userId="5a99cc02-cb89-4ca5-b1ec-1f82f4f974cc" providerId="ADAL" clId="{F4FA9E0C-E952-42BB-9205-BB8C0CFC319E}"/>
+    <pc:docChg chg="custSel modSld">
+      <pc:chgData name="Kaung Nyi Naing" userId="5a99cc02-cb89-4ca5-b1ec-1f82f4f974cc" providerId="ADAL" clId="{F4FA9E0C-E952-42BB-9205-BB8C0CFC319E}" dt="2026-03-05T16:41:42.084" v="291" actId="20577"/>
+      <pc:docMkLst>
+        <pc:docMk/>
+      </pc:docMkLst>
+      <pc:sldChg chg="modSp mod">
+        <pc:chgData name="Kaung Nyi Naing" userId="5a99cc02-cb89-4ca5-b1ec-1f82f4f974cc" providerId="ADAL" clId="{F4FA9E0C-E952-42BB-9205-BB8C0CFC319E}" dt="2026-03-05T16:37:59.201" v="111" actId="14100"/>
+        <pc:sldMkLst>
+          <pc:docMk/>
+          <pc:sldMk cId="3283190877" sldId="257"/>
+        </pc:sldMkLst>
+        <pc:spChg chg="mod">
+          <ac:chgData name="Kaung Nyi Naing" userId="5a99cc02-cb89-4ca5-b1ec-1f82f4f974cc" providerId="ADAL" clId="{F4FA9E0C-E952-42BB-9205-BB8C0CFC319E}" dt="2026-03-05T16:37:59.201" v="111" actId="14100"/>
+          <ac:spMkLst>
+            <pc:docMk/>
+            <pc:sldMk cId="3283190877" sldId="257"/>
+            <ac:spMk id="3" creationId="{62D2861A-4FD2-ECDC-97BE-BE73ACDE508E}"/>
+          </ac:spMkLst>
+        </pc:spChg>
+      </pc:sldChg>
+      <pc:sldChg chg="modSp mod">
+        <pc:chgData name="Kaung Nyi Naing" userId="5a99cc02-cb89-4ca5-b1ec-1f82f4f974cc" providerId="ADAL" clId="{F4FA9E0C-E952-42BB-9205-BB8C0CFC319E}" dt="2026-03-05T16:40:37.510" v="214" actId="1076"/>
+        <pc:sldMkLst>
+          <pc:docMk/>
+          <pc:sldMk cId="783867445" sldId="260"/>
+        </pc:sldMkLst>
+        <pc:spChg chg="mod">
+          <ac:chgData name="Kaung Nyi Naing" userId="5a99cc02-cb89-4ca5-b1ec-1f82f4f974cc" providerId="ADAL" clId="{F4FA9E0C-E952-42BB-9205-BB8C0CFC319E}" dt="2026-03-05T16:40:26.441" v="211" actId="20577"/>
+          <ac:spMkLst>
+            <pc:docMk/>
+            <pc:sldMk cId="783867445" sldId="260"/>
+            <ac:spMk id="3" creationId="{3C3157D2-31E4-C17C-F799-F0C5A16C4D35}"/>
+          </ac:spMkLst>
+        </pc:spChg>
+        <pc:picChg chg="mod">
+          <ac:chgData name="Kaung Nyi Naing" userId="5a99cc02-cb89-4ca5-b1ec-1f82f4f974cc" providerId="ADAL" clId="{F4FA9E0C-E952-42BB-9205-BB8C0CFC319E}" dt="2026-03-05T16:40:31.580" v="212" actId="1076"/>
+          <ac:picMkLst>
+            <pc:docMk/>
+            <pc:sldMk cId="783867445" sldId="260"/>
+            <ac:picMk id="4" creationId="{6DAF3E27-BF4F-D680-0CBB-0087C310032D}"/>
+          </ac:picMkLst>
+        </pc:picChg>
+        <pc:picChg chg="mod">
+          <ac:chgData name="Kaung Nyi Naing" userId="5a99cc02-cb89-4ca5-b1ec-1f82f4f974cc" providerId="ADAL" clId="{F4FA9E0C-E952-42BB-9205-BB8C0CFC319E}" dt="2026-03-05T16:40:37.510" v="214" actId="1076"/>
+          <ac:picMkLst>
+            <pc:docMk/>
+            <pc:sldMk cId="783867445" sldId="260"/>
+            <ac:picMk id="5" creationId="{BDBFA0B5-E842-DDAA-DBDC-B26D8398417D}"/>
+          </ac:picMkLst>
+        </pc:picChg>
+        <pc:picChg chg="mod">
+          <ac:chgData name="Kaung Nyi Naing" userId="5a99cc02-cb89-4ca5-b1ec-1f82f4f974cc" providerId="ADAL" clId="{F4FA9E0C-E952-42BB-9205-BB8C0CFC319E}" dt="2026-03-05T16:40:33.637" v="213" actId="1076"/>
+          <ac:picMkLst>
+            <pc:docMk/>
+            <pc:sldMk cId="783867445" sldId="260"/>
+            <ac:picMk id="6" creationId="{F7E822F0-9BC7-3701-EEDF-441DFD6E3E18}"/>
+          </ac:picMkLst>
+        </pc:picChg>
+      </pc:sldChg>
+      <pc:sldChg chg="modSp mod">
+        <pc:chgData name="Kaung Nyi Naing" userId="5a99cc02-cb89-4ca5-b1ec-1f82f4f974cc" providerId="ADAL" clId="{F4FA9E0C-E952-42BB-9205-BB8C0CFC319E}" dt="2026-03-05T16:41:42.084" v="291" actId="20577"/>
+        <pc:sldMkLst>
+          <pc:docMk/>
+          <pc:sldMk cId="2156346351" sldId="261"/>
+        </pc:sldMkLst>
+        <pc:spChg chg="mod">
+          <ac:chgData name="Kaung Nyi Naing" userId="5a99cc02-cb89-4ca5-b1ec-1f82f4f974cc" providerId="ADAL" clId="{F4FA9E0C-E952-42BB-9205-BB8C0CFC319E}" dt="2026-03-05T16:41:42.084" v="291" actId="20577"/>
+          <ac:spMkLst>
+            <pc:docMk/>
+            <pc:sldMk cId="2156346351" sldId="261"/>
+            <ac:spMk id="3" creationId="{AC54BD91-5103-2AA0-9A29-76D692A57709}"/>
+          </ac:spMkLst>
+        </pc:spChg>
+      </pc:sldChg>
+    </pc:docChg>
+  </pc:docChgLst>
+  <pc:docChgLst>
+    <pc:chgData name="Guest User" userId="S::urn:spo:tenantanon#164ba61e-39ec-4f5d-89ff-aa1f00a521b4::" providerId="AD" clId="Web-{6A29CA66-4119-8A90-1F16-D685471AE5C1}"/>
+    <pc:docChg chg="modSld">
+      <pc:chgData name="Guest User" userId="S::urn:spo:tenantanon#164ba61e-39ec-4f5d-89ff-aa1f00a521b4::" providerId="AD" clId="Web-{6A29CA66-4119-8A90-1F16-D685471AE5C1}" dt="2026-03-05T01:52:06.373" v="7" actId="20577"/>
+      <pc:docMkLst>
+        <pc:docMk/>
+      </pc:docMkLst>
+      <pc:sldChg chg="modSp">
+        <pc:chgData name="Guest User" userId="S::urn:spo:tenantanon#164ba61e-39ec-4f5d-89ff-aa1f00a521b4::" providerId="AD" clId="Web-{6A29CA66-4119-8A90-1F16-D685471AE5C1}" dt="2026-03-05T01:52:06.373" v="7" actId="20577"/>
+        <pc:sldMkLst>
+          <pc:docMk/>
+          <pc:sldMk cId="783867445" sldId="260"/>
+        </pc:sldMkLst>
+        <pc:spChg chg="mod">
+          <ac:chgData name="Guest User" userId="S::urn:spo:tenantanon#164ba61e-39ec-4f5d-89ff-aa1f00a521b4::" providerId="AD" clId="Web-{6A29CA66-4119-8A90-1F16-D685471AE5C1}" dt="2026-03-05T01:52:06.373" v="7" actId="20577"/>
+          <ac:spMkLst>
+            <pc:docMk/>
+            <pc:sldMk cId="783867445" sldId="260"/>
+            <ac:spMk id="3" creationId="{3C3157D2-31E4-C17C-F799-F0C5A16C4D35}"/>
+          </ac:spMkLst>
+        </pc:spChg>
+      </pc:sldChg>
+    </pc:docChg>
+  </pc:docChgLst>
+</pc:chgInfo>
 </file>
 
 <file path=ppt/slideLayouts/slideLayout1.xml><?xml version="1.0" encoding="utf-8"?>
@@ -153,7 +1558,6 @@
               <a:rPr lang="en-US"/>
               <a:t>Click to edit Master title style</a:t>
             </a:r>
-            <a:endParaRPr lang="en-US" dirty="0"/>
           </a:p>
         </p:txBody>
       </p:sp>
@@ -218,7 +1622,6 @@
               <a:rPr lang="en-US"/>
               <a:t>Click to edit Master subtitle style</a:t>
             </a:r>
-            <a:endParaRPr lang="en-US" dirty="0"/>
           </a:p>
         </p:txBody>
       </p:sp>
@@ -239,7 +1642,7 @@
           <a:p>
             <a:fld id="{DC0C7454-8F51-4728-B049-5511246EEC85}" type="datetimeFigureOut">
               <a:rPr lang="en-US" smtClean="0"/>
-              <a:t>3/1/2026</a:t>
+              <a:t>3/6/2026</a:t>
             </a:fld>
             <a:endParaRPr lang="en-US"/>
           </a:p>
@@ -336,7 +1739,6 @@
               <a:rPr lang="en-US"/>
               <a:t>Click to edit Master title style</a:t>
             </a:r>
-            <a:endParaRPr lang="en-US" dirty="0"/>
           </a:p>
         </p:txBody>
       </p:sp>
@@ -388,7 +1790,6 @@
               <a:rPr lang="en-US"/>
               <a:t>Fifth level</a:t>
             </a:r>
-            <a:endParaRPr lang="en-US" dirty="0"/>
           </a:p>
         </p:txBody>
       </p:sp>
@@ -409,7 +1810,7 @@
           <a:p>
             <a:fld id="{DC0C7454-8F51-4728-B049-5511246EEC85}" type="datetimeFigureOut">
               <a:rPr lang="en-US" smtClean="0"/>
-              <a:t>3/1/2026</a:t>
+              <a:t>3/6/2026</a:t>
             </a:fld>
             <a:endParaRPr lang="en-US"/>
           </a:p>
@@ -511,7 +1912,6 @@
               <a:rPr lang="en-US"/>
               <a:t>Click to edit Master title style</a:t>
             </a:r>
-            <a:endParaRPr lang="en-US" dirty="0"/>
           </a:p>
         </p:txBody>
       </p:sp>
@@ -568,7 +1968,6 @@
               <a:rPr lang="en-US"/>
               <a:t>Fifth level</a:t>
             </a:r>
-            <a:endParaRPr lang="en-US" dirty="0"/>
           </a:p>
         </p:txBody>
       </p:sp>
@@ -589,7 +1988,7 @@
           <a:p>
             <a:fld id="{DC0C7454-8F51-4728-B049-5511246EEC85}" type="datetimeFigureOut">
               <a:rPr lang="en-US" smtClean="0"/>
-              <a:t>3/1/2026</a:t>
+              <a:t>3/6/2026</a:t>
             </a:fld>
             <a:endParaRPr lang="en-US"/>
           </a:p>
@@ -686,7 +2085,6 @@
               <a:rPr lang="en-US"/>
               <a:t>Click to edit Master title style</a:t>
             </a:r>
-            <a:endParaRPr lang="en-US" dirty="0"/>
           </a:p>
         </p:txBody>
       </p:sp>
@@ -738,7 +2136,6 @@
               <a:rPr lang="en-US"/>
               <a:t>Fifth level</a:t>
             </a:r>
-            <a:endParaRPr lang="en-US" dirty="0"/>
           </a:p>
         </p:txBody>
       </p:sp>
@@ -759,7 +2156,7 @@
           <a:p>
             <a:fld id="{DC0C7454-8F51-4728-B049-5511246EEC85}" type="datetimeFigureOut">
               <a:rPr lang="en-US" smtClean="0"/>
-              <a:t>3/1/2026</a:t>
+              <a:t>3/6/2026</a:t>
             </a:fld>
             <a:endParaRPr lang="en-US"/>
           </a:p>
@@ -865,7 +2262,6 @@
               <a:rPr lang="en-US"/>
               <a:t>Click to edit Master title style</a:t>
             </a:r>
-            <a:endParaRPr lang="en-US" dirty="0"/>
           </a:p>
         </p:txBody>
       </p:sp>
@@ -1005,7 +2401,7 @@
           <a:p>
             <a:fld id="{DC0C7454-8F51-4728-B049-5511246EEC85}" type="datetimeFigureOut">
               <a:rPr lang="en-US" smtClean="0"/>
-              <a:t>3/1/2026</a:t>
+              <a:t>3/6/2026</a:t>
             </a:fld>
             <a:endParaRPr lang="en-US"/>
           </a:p>
@@ -1102,7 +2498,6 @@
               <a:rPr lang="en-US"/>
               <a:t>Click to edit Master title style</a:t>
             </a:r>
-            <a:endParaRPr lang="en-US" dirty="0"/>
           </a:p>
         </p:txBody>
       </p:sp>
@@ -1159,7 +2554,6 @@
               <a:rPr lang="en-US"/>
               <a:t>Fifth level</a:t>
             </a:r>
-            <a:endParaRPr lang="en-US" dirty="0"/>
           </a:p>
         </p:txBody>
       </p:sp>
@@ -1216,7 +2610,6 @@
               <a:rPr lang="en-US"/>
               <a:t>Fifth level</a:t>
             </a:r>
-            <a:endParaRPr lang="en-US" dirty="0"/>
           </a:p>
         </p:txBody>
       </p:sp>
@@ -1237,7 +2630,7 @@
           <a:p>
             <a:fld id="{DC0C7454-8F51-4728-B049-5511246EEC85}" type="datetimeFigureOut">
               <a:rPr lang="en-US" smtClean="0"/>
-              <a:t>3/1/2026</a:t>
+              <a:t>3/6/2026</a:t>
             </a:fld>
             <a:endParaRPr lang="en-US"/>
           </a:p>
@@ -1339,7 +2732,6 @@
               <a:rPr lang="en-US"/>
               <a:t>Click to edit Master title style</a:t>
             </a:r>
-            <a:endParaRPr lang="en-US" dirty="0"/>
           </a:p>
         </p:txBody>
       </p:sp>
@@ -1461,7 +2853,6 @@
               <a:rPr lang="en-US"/>
               <a:t>Fifth level</a:t>
             </a:r>
-            <a:endParaRPr lang="en-US" dirty="0"/>
           </a:p>
         </p:txBody>
       </p:sp>
@@ -1583,7 +2974,6 @@
               <a:rPr lang="en-US"/>
               <a:t>Fifth level</a:t>
             </a:r>
-            <a:endParaRPr lang="en-US" dirty="0"/>
           </a:p>
         </p:txBody>
       </p:sp>
@@ -1604,7 +2994,7 @@
           <a:p>
             <a:fld id="{DC0C7454-8F51-4728-B049-5511246EEC85}" type="datetimeFigureOut">
               <a:rPr lang="en-US" smtClean="0"/>
-              <a:t>3/1/2026</a:t>
+              <a:t>3/6/2026</a:t>
             </a:fld>
             <a:endParaRPr lang="en-US"/>
           </a:p>
@@ -1701,7 +3091,6 @@
               <a:rPr lang="en-US"/>
               <a:t>Click to edit Master title style</a:t>
             </a:r>
-            <a:endParaRPr lang="en-US" dirty="0"/>
           </a:p>
         </p:txBody>
       </p:sp>
@@ -1722,7 +3111,7 @@
           <a:p>
             <a:fld id="{DC0C7454-8F51-4728-B049-5511246EEC85}" type="datetimeFigureOut">
               <a:rPr lang="en-US" smtClean="0"/>
-              <a:t>3/1/2026</a:t>
+              <a:t>3/6/2026</a:t>
             </a:fld>
             <a:endParaRPr lang="en-US"/>
           </a:p>
@@ -1817,7 +3206,7 @@
           <a:p>
             <a:fld id="{DC0C7454-8F51-4728-B049-5511246EEC85}" type="datetimeFigureOut">
               <a:rPr lang="en-US" smtClean="0"/>
-              <a:t>3/1/2026</a:t>
+              <a:t>3/6/2026</a:t>
             </a:fld>
             <a:endParaRPr lang="en-US"/>
           </a:p>
@@ -1923,7 +3312,6 @@
               <a:rPr lang="en-US"/>
               <a:t>Click to edit Master title style</a:t>
             </a:r>
-            <a:endParaRPr lang="en-US" dirty="0"/>
           </a:p>
         </p:txBody>
       </p:sp>
@@ -2008,7 +3396,6 @@
               <a:rPr lang="en-US"/>
               <a:t>Fifth level</a:t>
             </a:r>
-            <a:endParaRPr lang="en-US" dirty="0"/>
           </a:p>
         </p:txBody>
       </p:sp>
@@ -2094,7 +3481,7 @@
           <a:p>
             <a:fld id="{DC0C7454-8F51-4728-B049-5511246EEC85}" type="datetimeFigureOut">
               <a:rPr lang="en-US" smtClean="0"/>
-              <a:t>3/1/2026</a:t>
+              <a:t>3/6/2026</a:t>
             </a:fld>
             <a:endParaRPr lang="en-US"/>
           </a:p>
@@ -2200,7 +3587,6 @@
               <a:rPr lang="en-US"/>
               <a:t>Click to edit Master title style</a:t>
             </a:r>
-            <a:endParaRPr lang="en-US" dirty="0"/>
           </a:p>
         </p:txBody>
       </p:sp>
@@ -2265,7 +3651,6 @@
               <a:rPr lang="en-US"/>
               <a:t>Click icon to add picture</a:t>
             </a:r>
-            <a:endParaRPr lang="en-US" dirty="0"/>
           </a:p>
         </p:txBody>
       </p:sp>
@@ -2351,7 +3736,7 @@
           <a:p>
             <a:fld id="{DC0C7454-8F51-4728-B049-5511246EEC85}" type="datetimeFigureOut">
               <a:rPr lang="en-US" smtClean="0"/>
-              <a:t>3/1/2026</a:t>
+              <a:t>3/6/2026</a:t>
             </a:fld>
             <a:endParaRPr lang="en-US"/>
           </a:p>
@@ -2417,30 +3802,9 @@
   <p:cSld>
     <p:bg>
       <p:bgPr>
-        <a:gradFill flip="none" rotWithShape="1">
-          <a:gsLst>
-            <a:gs pos="0">
-              <a:srgbClr val="321C4A"/>
-            </a:gs>
-            <a:gs pos="67000">
-              <a:schemeClr val="bg2">
-                <a:lumMod val="90000"/>
-                <a:lumOff val="10000"/>
-              </a:schemeClr>
-            </a:gs>
-            <a:gs pos="79000">
-              <a:schemeClr val="bg2">
-                <a:lumMod val="75000"/>
-                <a:lumOff val="25000"/>
-              </a:schemeClr>
-            </a:gs>
-            <a:gs pos="100000">
-              <a:srgbClr val="87DDD5"/>
-            </a:gs>
-          </a:gsLst>
-          <a:lin ang="5400000" scaled="1"/>
-          <a:tileRect/>
-        </a:gradFill>
+        <a:solidFill>
+          <a:schemeClr val="accent1"/>
+        </a:solidFill>
         <a:effectLst/>
       </p:bgPr>
     </p:bg>
@@ -2487,7 +3851,6 @@
               <a:rPr lang="en-US"/>
               <a:t>Click to edit Master title style</a:t>
             </a:r>
-            <a:endParaRPr lang="en-US" dirty="0"/>
           </a:p>
         </p:txBody>
       </p:sp>
@@ -2549,7 +3912,6 @@
               <a:rPr lang="en-US"/>
               <a:t>Fifth level</a:t>
             </a:r>
-            <a:endParaRPr lang="en-US" dirty="0"/>
           </a:p>
         </p:txBody>
       </p:sp>
@@ -2588,7 +3950,7 @@
           <a:p>
             <a:fld id="{DC0C7454-8F51-4728-B049-5511246EEC85}" type="datetimeFigureOut">
               <a:rPr lang="en-US" smtClean="0"/>
-              <a:t>3/1/2026</a:t>
+              <a:t>3/6/2026</a:t>
             </a:fld>
             <a:endParaRPr lang="en-US"/>
           </a:p>
@@ -2995,6 +4357,102 @@
       </p:grpSpPr>
       <p:sp>
         <p:nvSpPr>
+          <p:cNvPr id="9" name="Rectangle 8">
+            <a:extLst>
+              <a:ext uri="{FF2B5EF4-FFF2-40B4-BE49-F238E27FC236}">
+                <a16:creationId xmlns:a16="http://schemas.microsoft.com/office/drawing/2014/main" id="{71B2258F-86CA-4D4D-8270-BC05FCDEBFB3}"/>
+              </a:ext>
+              <a:ext uri="{C183D7F6-B498-43B3-948B-1728B52AA6E4}">
+                <adec:decorative xmlns:adec="http://schemas.microsoft.com/office/drawing/2017/decorative" val="1"/>
+              </a:ext>
+            </a:extLst>
+          </p:cNvPr>
+          <p:cNvSpPr>
+            <a:spLocks noGrp="1" noRot="1" noChangeAspect="1" noMove="1" noResize="1" noEditPoints="1" noAdjustHandles="1" noChangeArrowheads="1" noChangeShapeType="1" noTextEdit="1"/>
+          </p:cNvSpPr>
+          <p:nvPr>
+            <p:extLst>
+              <p:ext uri="{386F3935-93C4-4BCD-93E2-E3B085C9AB24}">
+                <p16:designElem xmlns:p16="http://schemas.microsoft.com/office/powerpoint/2015/main" val="1"/>
+              </p:ext>
+            </p:extLst>
+          </p:nvPr>
+        </p:nvSpPr>
+        <p:spPr>
+          <a:xfrm>
+            <a:off x="0" y="0"/>
+            <a:ext cx="12192000" cy="6857999"/>
+          </a:xfrm>
+          <a:prstGeom prst="rect">
+            <a:avLst/>
+          </a:prstGeom>
+          <a:solidFill>
+            <a:srgbClr val="000000"/>
+          </a:solidFill>
+          <a:ln>
+            <a:noFill/>
+          </a:ln>
+        </p:spPr>
+        <p:style>
+          <a:lnRef idx="2">
+            <a:schemeClr val="accent1">
+              <a:shade val="50000"/>
+            </a:schemeClr>
+          </a:lnRef>
+          <a:fillRef idx="1">
+            <a:schemeClr val="accent1"/>
+          </a:fillRef>
+          <a:effectRef idx="0">
+            <a:schemeClr val="accent1"/>
+          </a:effectRef>
+          <a:fontRef idx="minor">
+            <a:schemeClr val="lt1"/>
+          </a:fontRef>
+        </p:style>
+        <p:txBody>
+          <a:bodyPr rtlCol="0" anchor="ctr"/>
+          <a:lstStyle/>
+          <a:p>
+            <a:pPr algn="ctr"/>
+            <a:endParaRPr lang="en-US"/>
+          </a:p>
+        </p:txBody>
+      </p:sp>
+      <p:pic>
+        <p:nvPicPr>
+          <p:cNvPr id="5" name="Picture 4">
+            <a:extLst>
+              <a:ext uri="{FF2B5EF4-FFF2-40B4-BE49-F238E27FC236}">
+                <a16:creationId xmlns:a16="http://schemas.microsoft.com/office/drawing/2014/main" id="{6A5F090A-3B82-A603-6465-6837EFBCD2F6}"/>
+              </a:ext>
+            </a:extLst>
+          </p:cNvPr>
+          <p:cNvPicPr>
+            <a:picLocks noChangeAspect="1"/>
+          </p:cNvPicPr>
+          <p:nvPr/>
+        </p:nvPicPr>
+        <p:blipFill>
+          <a:blip r:embed="rId2">
+            <a:alphaModFix amt="50000"/>
+          </a:blip>
+          <a:srcRect/>
+          <a:stretch>
+            <a:fillRect/>
+          </a:stretch>
+        </p:blipFill>
+        <p:spPr>
+          <a:xfrm>
+            <a:off x="20" y="1"/>
+            <a:ext cx="12191980" cy="6857999"/>
+          </a:xfrm>
+          <a:prstGeom prst="rect">
+            <a:avLst/>
+          </a:prstGeom>
+        </p:spPr>
+      </p:pic>
+      <p:sp>
+        <p:nvSpPr>
           <p:cNvPr id="2" name="Title 1">
             <a:extLst>
               <a:ext uri="{FF2B5EF4-FFF2-40B4-BE49-F238E27FC236}">
@@ -3009,13 +4467,24 @@
             <p:ph type="ctrTitle"/>
           </p:nvPr>
         </p:nvSpPr>
-        <p:spPr/>
-        <p:txBody>
-          <a:bodyPr/>
+        <p:spPr>
+          <a:xfrm>
+            <a:off x="1524000" y="1122362"/>
+            <a:ext cx="9144000" cy="2900518"/>
+          </a:xfrm>
+        </p:spPr>
+        <p:txBody>
+          <a:bodyPr>
+            <a:normAutofit/>
+          </a:bodyPr>
           <a:lstStyle/>
           <a:p>
             <a:r>
-              <a:rPr lang="en-US" dirty="0"/>
+              <a:rPr lang="en-US">
+                <a:solidFill>
+                  <a:srgbClr val="FFFFFF"/>
+                </a:solidFill>
+              </a:rPr>
               <a:t>Transformer Drone Simulation</a:t>
             </a:r>
           </a:p>
@@ -3037,13 +4506,24 @@
             <p:ph type="subTitle" idx="1"/>
           </p:nvPr>
         </p:nvSpPr>
-        <p:spPr/>
-        <p:txBody>
-          <a:bodyPr/>
+        <p:spPr>
+          <a:xfrm>
+            <a:off x="1524000" y="4159404"/>
+            <a:ext cx="9144000" cy="1098395"/>
+          </a:xfrm>
+        </p:spPr>
+        <p:txBody>
+          <a:bodyPr>
+            <a:normAutofit/>
+          </a:bodyPr>
           <a:lstStyle/>
           <a:p>
             <a:r>
-              <a:rPr lang="en-US" dirty="0"/>
+              <a:rPr lang="en-US">
+                <a:solidFill>
+                  <a:srgbClr val="FFFFFF"/>
+                </a:solidFill>
+              </a:rPr>
               <a:t>By Kaung Nyi Naing, Keeyan Canlas, and Troy Tadros</a:t>
             </a:r>
           </a:p>
@@ -3053,6 +4533,506 @@
     <p:extLst>
       <p:ext uri="{BB962C8B-B14F-4D97-AF65-F5344CB8AC3E}">
         <p14:creationId xmlns:p14="http://schemas.microsoft.com/office/powerpoint/2010/main" val="1739604087"/>
+      </p:ext>
+    </p:extLst>
+  </p:cSld>
+  <p:clrMapOvr>
+    <a:masterClrMapping/>
+  </p:clrMapOvr>
+  <p:timing>
+    <p:tnLst>
+      <p:par>
+        <p:cTn id="1" dur="indefinite" restart="never" nodeType="tmRoot">
+          <p:childTnLst>
+            <p:seq concurrent="1" nextAc="seek">
+              <p:cTn id="2" dur="indefinite" nodeType="mainSeq">
+                <p:childTnLst>
+                  <p:par>
+                    <p:cTn id="3" fill="hold">
+                      <p:stCondLst>
+                        <p:cond delay="indefinite"/>
+                        <p:cond evt="onBegin" delay="0">
+                          <p:tn val="2"/>
+                        </p:cond>
+                      </p:stCondLst>
+                      <p:childTnLst>
+                        <p:par>
+                          <p:cTn id="4" fill="hold">
+                            <p:stCondLst>
+                              <p:cond delay="0"/>
+                            </p:stCondLst>
+                            <p:childTnLst>
+                              <p:par>
+                                <p:cTn id="5" presetID="10" presetClass="entr" presetSubtype="0" fill="hold" grpId="0" nodeType="withEffect">
+                                  <p:stCondLst>
+                                    <p:cond delay="1000"/>
+                                  </p:stCondLst>
+                                  <p:iterate>
+                                    <p:tmPct val="10000"/>
+                                  </p:iterate>
+                                  <p:childTnLst>
+                                    <p:set>
+                                      <p:cBhvr>
+                                        <p:cTn id="6" dur="1" fill="hold">
+                                          <p:stCondLst>
+                                            <p:cond delay="0"/>
+                                          </p:stCondLst>
+                                        </p:cTn>
+                                        <p:tgtEl>
+                                          <p:spTgt spid="2"/>
+                                        </p:tgtEl>
+                                        <p:attrNameLst>
+                                          <p:attrName>style.visibility</p:attrName>
+                                        </p:attrNameLst>
+                                      </p:cBhvr>
+                                      <p:to>
+                                        <p:strVal val="visible"/>
+                                      </p:to>
+                                    </p:set>
+                                    <p:animEffect transition="in" filter="fade">
+                                      <p:cBhvr>
+                                        <p:cTn id="7" dur="700"/>
+                                        <p:tgtEl>
+                                          <p:spTgt spid="2"/>
+                                        </p:tgtEl>
+                                      </p:cBhvr>
+                                    </p:animEffect>
+                                  </p:childTnLst>
+                                </p:cTn>
+                              </p:par>
+                              <p:par>
+                                <p:cTn id="8" presetID="10" presetClass="entr" presetSubtype="0" fill="hold" grpId="0" nodeType="withEffect">
+                                  <p:stCondLst>
+                                    <p:cond delay="1500"/>
+                                  </p:stCondLst>
+                                  <p:iterate>
+                                    <p:tmPct val="10000"/>
+                                  </p:iterate>
+                                  <p:childTnLst>
+                                    <p:set>
+                                      <p:cBhvr>
+                                        <p:cTn id="9" dur="1" fill="hold">
+                                          <p:stCondLst>
+                                            <p:cond delay="0"/>
+                                          </p:stCondLst>
+                                        </p:cTn>
+                                        <p:tgtEl>
+                                          <p:spTgt spid="3">
+                                            <p:txEl>
+                                              <p:pRg st="0" end="0"/>
+                                            </p:txEl>
+                                          </p:spTgt>
+                                        </p:tgtEl>
+                                        <p:attrNameLst>
+                                          <p:attrName>style.visibility</p:attrName>
+                                        </p:attrNameLst>
+                                      </p:cBhvr>
+                                      <p:to>
+                                        <p:strVal val="visible"/>
+                                      </p:to>
+                                    </p:set>
+                                    <p:animEffect transition="in" filter="fade">
+                                      <p:cBhvr>
+                                        <p:cTn id="10" dur="700"/>
+                                        <p:tgtEl>
+                                          <p:spTgt spid="3">
+                                            <p:txEl>
+                                              <p:pRg st="0" end="0"/>
+                                            </p:txEl>
+                                          </p:spTgt>
+                                        </p:tgtEl>
+                                      </p:cBhvr>
+                                    </p:animEffect>
+                                  </p:childTnLst>
+                                </p:cTn>
+                              </p:par>
+                            </p:childTnLst>
+                          </p:cTn>
+                        </p:par>
+                      </p:childTnLst>
+                    </p:cTn>
+                  </p:par>
+                </p:childTnLst>
+              </p:cTn>
+              <p:prevCondLst>
+                <p:cond evt="onPrev" delay="0">
+                  <p:tgtEl>
+                    <p:sldTgt/>
+                  </p:tgtEl>
+                </p:cond>
+              </p:prevCondLst>
+              <p:nextCondLst>
+                <p:cond evt="onNext" delay="0">
+                  <p:tgtEl>
+                    <p:sldTgt/>
+                  </p:tgtEl>
+                </p:cond>
+              </p:nextCondLst>
+            </p:seq>
+          </p:childTnLst>
+        </p:cTn>
+      </p:par>
+    </p:tnLst>
+    <p:bldLst>
+      <p:bldP spid="2" grpId="0"/>
+      <p:bldP spid="3" grpId="0" build="p"/>
+    </p:bldLst>
+  </p:timing>
+</p:sld>
+</file>
+
+<file path=ppt/slides/slide10.xml><?xml version="1.0" encoding="utf-8"?>
+<p:sld xmlns:a="http://schemas.openxmlformats.org/drawingml/2006/main" xmlns:r="http://schemas.openxmlformats.org/officeDocument/2006/relationships" xmlns:p="http://schemas.openxmlformats.org/presentationml/2006/main">
+  <p:cSld>
+    <p:spTree>
+      <p:nvGrpSpPr>
+        <p:cNvPr id="1" name=""/>
+        <p:cNvGrpSpPr/>
+        <p:nvPr/>
+      </p:nvGrpSpPr>
+      <p:grpSpPr>
+        <a:xfrm>
+          <a:off x="0" y="0"/>
+          <a:ext cx="0" cy="0"/>
+          <a:chOff x="0" y="0"/>
+          <a:chExt cx="0" cy="0"/>
+        </a:xfrm>
+      </p:grpSpPr>
+      <p:sp useBgFill="1">
+        <p:nvSpPr>
+          <p:cNvPr id="8" name="Rectangle 7">
+            <a:extLst>
+              <a:ext uri="{FF2B5EF4-FFF2-40B4-BE49-F238E27FC236}">
+                <a16:creationId xmlns:a16="http://schemas.microsoft.com/office/drawing/2014/main" id="{4522B21E-B2B9-4C72-9A71-C87EFD137480}"/>
+              </a:ext>
+              <a:ext uri="{C183D7F6-B498-43B3-948B-1728B52AA6E4}">
+                <adec:decorative xmlns:adec="http://schemas.microsoft.com/office/drawing/2017/decorative" val="1"/>
+              </a:ext>
+            </a:extLst>
+          </p:cNvPr>
+          <p:cNvSpPr>
+            <a:spLocks noGrp="1" noRot="1" noChangeAspect="1" noMove="1" noResize="1" noEditPoints="1" noAdjustHandles="1" noChangeArrowheads="1" noChangeShapeType="1" noTextEdit="1"/>
+          </p:cNvSpPr>
+          <p:nvPr>
+            <p:extLst>
+              <p:ext uri="{386F3935-93C4-4BCD-93E2-E3B085C9AB24}">
+                <p16:designElem xmlns:p16="http://schemas.microsoft.com/office/powerpoint/2015/main" val="1"/>
+              </p:ext>
+            </p:extLst>
+          </p:nvPr>
+        </p:nvSpPr>
+        <p:spPr>
+          <a:xfrm>
+            <a:off x="0" y="0"/>
+            <a:ext cx="12191999" cy="6857365"/>
+          </a:xfrm>
+          <a:prstGeom prst="rect">
+            <a:avLst/>
+          </a:prstGeom>
+          <a:ln>
+            <a:noFill/>
+          </a:ln>
+        </p:spPr>
+        <p:style>
+          <a:lnRef idx="2">
+            <a:schemeClr val="accent1">
+              <a:shade val="50000"/>
+            </a:schemeClr>
+          </a:lnRef>
+          <a:fillRef idx="1">
+            <a:schemeClr val="accent1"/>
+          </a:fillRef>
+          <a:effectRef idx="0">
+            <a:schemeClr val="accent1"/>
+          </a:effectRef>
+          <a:fontRef idx="minor">
+            <a:schemeClr val="lt1"/>
+          </a:fontRef>
+        </p:style>
+        <p:txBody>
+          <a:bodyPr rtlCol="0" anchor="ctr"/>
+          <a:lstStyle/>
+          <a:p>
+            <a:pPr algn="ctr"/>
+            <a:endParaRPr lang="en-US"/>
+          </a:p>
+        </p:txBody>
+      </p:sp>
+      <p:sp>
+        <p:nvSpPr>
+          <p:cNvPr id="10" name="Rectangle 9">
+            <a:extLst>
+              <a:ext uri="{FF2B5EF4-FFF2-40B4-BE49-F238E27FC236}">
+                <a16:creationId xmlns:a16="http://schemas.microsoft.com/office/drawing/2014/main" id="{5EB7D2A2-F448-44D4-938C-DC84CBCB3B1E}"/>
+              </a:ext>
+              <a:ext uri="{C183D7F6-B498-43B3-948B-1728B52AA6E4}">
+                <adec:decorative xmlns:adec="http://schemas.microsoft.com/office/drawing/2017/decorative" val="1"/>
+              </a:ext>
+            </a:extLst>
+          </p:cNvPr>
+          <p:cNvSpPr>
+            <a:spLocks noGrp="1" noRot="1" noChangeAspect="1" noMove="1" noResize="1" noEditPoints="1" noAdjustHandles="1" noChangeArrowheads="1" noChangeShapeType="1" noTextEdit="1"/>
+          </p:cNvSpPr>
+          <p:nvPr>
+            <p:extLst>
+              <p:ext uri="{386F3935-93C4-4BCD-93E2-E3B085C9AB24}">
+                <p16:designElem xmlns:p16="http://schemas.microsoft.com/office/powerpoint/2015/main" val="1"/>
+              </p:ext>
+            </p:extLst>
+          </p:nvPr>
+        </p:nvSpPr>
+        <p:spPr>
+          <a:xfrm>
+            <a:off x="0" y="2"/>
+            <a:ext cx="12192000" cy="4412583"/>
+          </a:xfrm>
+          <a:prstGeom prst="rect">
+            <a:avLst/>
+          </a:prstGeom>
+          <a:solidFill>
+            <a:schemeClr val="accent4"/>
+          </a:solidFill>
+          <a:ln>
+            <a:noFill/>
+          </a:ln>
+        </p:spPr>
+        <p:style>
+          <a:lnRef idx="2">
+            <a:schemeClr val="accent1">
+              <a:shade val="50000"/>
+            </a:schemeClr>
+          </a:lnRef>
+          <a:fillRef idx="1">
+            <a:schemeClr val="accent1"/>
+          </a:fillRef>
+          <a:effectRef idx="0">
+            <a:schemeClr val="accent1"/>
+          </a:effectRef>
+          <a:fontRef idx="minor">
+            <a:schemeClr val="lt1"/>
+          </a:fontRef>
+        </p:style>
+        <p:txBody>
+          <a:bodyPr rtlCol="0" anchor="ctr"/>
+          <a:lstStyle/>
+          <a:p>
+            <a:pPr algn="ctr"/>
+            <a:endParaRPr lang="en-US" dirty="0"/>
+          </a:p>
+        </p:txBody>
+      </p:sp>
+      <p:sp>
+        <p:nvSpPr>
+          <p:cNvPr id="12" name="Rectangle 11">
+            <a:extLst>
+              <a:ext uri="{FF2B5EF4-FFF2-40B4-BE49-F238E27FC236}">
+                <a16:creationId xmlns:a16="http://schemas.microsoft.com/office/drawing/2014/main" id="{871AEA07-1E14-44B4-8E55-64EF049CD66F}"/>
+              </a:ext>
+              <a:ext uri="{C183D7F6-B498-43B3-948B-1728B52AA6E4}">
+                <adec:decorative xmlns:adec="http://schemas.microsoft.com/office/drawing/2017/decorative" val="1"/>
+              </a:ext>
+            </a:extLst>
+          </p:cNvPr>
+          <p:cNvSpPr>
+            <a:spLocks noGrp="1" noRot="1" noChangeAspect="1" noMove="1" noResize="1" noEditPoints="1" noAdjustHandles="1" noChangeArrowheads="1" noChangeShapeType="1" noTextEdit="1"/>
+          </p:cNvSpPr>
+          <p:nvPr>
+            <p:extLst>
+              <p:ext uri="{386F3935-93C4-4BCD-93E2-E3B085C9AB24}">
+                <p16:designElem xmlns:p16="http://schemas.microsoft.com/office/powerpoint/2015/main" val="1"/>
+              </p:ext>
+            </p:extLst>
+          </p:nvPr>
+        </p:nvSpPr>
+        <p:spPr>
+          <a:xfrm>
+            <a:off x="596464" y="551962"/>
+            <a:ext cx="10999072" cy="4618549"/>
+          </a:xfrm>
+          <a:prstGeom prst="rect">
+            <a:avLst/>
+          </a:prstGeom>
+          <a:solidFill>
+            <a:schemeClr val="bg1"/>
+          </a:solidFill>
+          <a:ln>
+            <a:noFill/>
+          </a:ln>
+          <a:effectLst>
+            <a:outerShdw blurRad="139700" dist="127000" dir="5400000" algn="t" rotWithShape="0">
+              <a:prstClr val="black">
+                <a:alpha val="15000"/>
+              </a:prstClr>
+            </a:outerShdw>
+          </a:effectLst>
+        </p:spPr>
+        <p:style>
+          <a:lnRef idx="2">
+            <a:schemeClr val="accent1">
+              <a:shade val="50000"/>
+            </a:schemeClr>
+          </a:lnRef>
+          <a:fillRef idx="1">
+            <a:schemeClr val="accent1"/>
+          </a:fillRef>
+          <a:effectRef idx="0">
+            <a:schemeClr val="accent1"/>
+          </a:effectRef>
+          <a:fontRef idx="minor">
+            <a:schemeClr val="lt1"/>
+          </a:fontRef>
+        </p:style>
+        <p:txBody>
+          <a:bodyPr rtlCol="0" anchor="ctr"/>
+          <a:lstStyle/>
+          <a:p>
+            <a:pPr algn="ctr"/>
+            <a:endParaRPr lang="en-US"/>
+          </a:p>
+        </p:txBody>
+      </p:sp>
+      <p:sp>
+        <p:nvSpPr>
+          <p:cNvPr id="2" name="Title 1">
+            <a:extLst>
+              <a:ext uri="{FF2B5EF4-FFF2-40B4-BE49-F238E27FC236}">
+                <a16:creationId xmlns:a16="http://schemas.microsoft.com/office/drawing/2014/main" id="{25A6BD14-56B1-4493-C293-F5537CDD6D76}"/>
+              </a:ext>
+            </a:extLst>
+          </p:cNvPr>
+          <p:cNvSpPr>
+            <a:spLocks noGrp="1"/>
+          </p:cNvSpPr>
+          <p:nvPr>
+            <p:ph type="title"/>
+          </p:nvPr>
+        </p:nvSpPr>
+        <p:spPr>
+          <a:xfrm>
+            <a:off x="1524000" y="1293338"/>
+            <a:ext cx="9144000" cy="3274592"/>
+          </a:xfrm>
+        </p:spPr>
+        <p:txBody>
+          <a:bodyPr vert="horz" lIns="91440" tIns="45720" rIns="91440" bIns="45720" rtlCol="0" anchor="ctr">
+            <a:normAutofit/>
+          </a:bodyPr>
+          <a:lstStyle/>
+          <a:p>
+            <a:pPr algn="ctr"/>
+            <a:r>
+              <a:rPr lang="en-US" sz="7200" kern="1200">
+                <a:solidFill>
+                  <a:schemeClr val="tx1"/>
+                </a:solidFill>
+                <a:latin typeface="+mj-lt"/>
+                <a:ea typeface="+mj-ea"/>
+                <a:cs typeface="+mj-cs"/>
+              </a:rPr>
+              <a:t>Live Demo</a:t>
+            </a:r>
+          </a:p>
+        </p:txBody>
+      </p:sp>
+      <p:sp>
+        <p:nvSpPr>
+          <p:cNvPr id="3" name="Text Placeholder 2">
+            <a:extLst>
+              <a:ext uri="{FF2B5EF4-FFF2-40B4-BE49-F238E27FC236}">
+                <a16:creationId xmlns:a16="http://schemas.microsoft.com/office/drawing/2014/main" id="{A1E481B9-5F84-CD64-434E-053A74AC77CD}"/>
+              </a:ext>
+            </a:extLst>
+          </p:cNvPr>
+          <p:cNvSpPr>
+            <a:spLocks noGrp="1"/>
+          </p:cNvSpPr>
+          <p:nvPr>
+            <p:ph type="body" idx="1"/>
+          </p:nvPr>
+        </p:nvSpPr>
+        <p:spPr>
+          <a:xfrm>
+            <a:off x="1524000" y="5514052"/>
+            <a:ext cx="9144000" cy="651910"/>
+          </a:xfrm>
+        </p:spPr>
+        <p:txBody>
+          <a:bodyPr vert="horz" lIns="91440" tIns="45720" rIns="91440" bIns="45720" rtlCol="0" anchor="ctr">
+            <a:normAutofit/>
+          </a:bodyPr>
+          <a:lstStyle/>
+          <a:p>
+            <a:pPr algn="ctr"/>
+            <a:r>
+              <a:rPr lang="en-US" kern="1200">
+                <a:solidFill>
+                  <a:schemeClr val="tx1"/>
+                </a:solidFill>
+                <a:latin typeface="+mn-lt"/>
+                <a:ea typeface="+mn-ea"/>
+                <a:cs typeface="+mn-cs"/>
+              </a:rPr>
+              <a:t>A live demo of the latest simulation build on MATLAB.</a:t>
+            </a:r>
+          </a:p>
+        </p:txBody>
+      </p:sp>
+      <p:cxnSp>
+        <p:nvCxnSpPr>
+          <p:cNvPr id="14" name="Straight Connector 13">
+            <a:extLst>
+              <a:ext uri="{FF2B5EF4-FFF2-40B4-BE49-F238E27FC236}">
+                <a16:creationId xmlns:a16="http://schemas.microsoft.com/office/drawing/2014/main" id="{F7C8EA93-3210-4C62-99E9-153C275E3A87}"/>
+              </a:ext>
+              <a:ext uri="{C183D7F6-B498-43B3-948B-1728B52AA6E4}">
+                <adec:decorative xmlns:adec="http://schemas.microsoft.com/office/drawing/2017/decorative" val="1"/>
+              </a:ext>
+            </a:extLst>
+          </p:cNvPr>
+          <p:cNvCxnSpPr>
+            <a:cxnSpLocks noGrp="1" noRot="1" noChangeAspect="1" noMove="1" noResize="1" noEditPoints="1" noAdjustHandles="1" noChangeArrowheads="1" noChangeShapeType="1"/>
+          </p:cNvCxnSpPr>
+          <p:nvPr>
+            <p:extLst>
+              <p:ext uri="{386F3935-93C4-4BCD-93E2-E3B085C9AB24}">
+                <p16:designElem xmlns:p16="http://schemas.microsoft.com/office/powerpoint/2015/main" val="1"/>
+              </p:ext>
+            </p:extLst>
+          </p:nvPr>
+        </p:nvCxnSpPr>
+        <p:spPr>
+          <a:xfrm flipH="1">
+            <a:off x="596464" y="6354708"/>
+            <a:ext cx="11000232" cy="0"/>
+          </a:xfrm>
+          <a:prstGeom prst="line">
+            <a:avLst/>
+          </a:prstGeom>
+          <a:ln w="101600">
+            <a:solidFill>
+              <a:schemeClr val="accent4"/>
+            </a:solidFill>
+          </a:ln>
+        </p:spPr>
+        <p:style>
+          <a:lnRef idx="1">
+            <a:schemeClr val="accent1"/>
+          </a:lnRef>
+          <a:fillRef idx="0">
+            <a:schemeClr val="accent1"/>
+          </a:fillRef>
+          <a:effectRef idx="0">
+            <a:schemeClr val="accent1"/>
+          </a:effectRef>
+          <a:fontRef idx="minor">
+            <a:schemeClr val="tx1"/>
+          </a:fontRef>
+        </p:style>
+      </p:cxnSp>
+    </p:spTree>
+    <p:extLst>
+      <p:ext uri="{BB962C8B-B14F-4D97-AF65-F5344CB8AC3E}">
+        <p14:creationId xmlns:p14="http://schemas.microsoft.com/office/powerpoint/2010/main" val="1307048061"/>
       </p:ext>
     </p:extLst>
   </p:cSld>
@@ -3079,6 +5059,289 @@
           <a:chExt cx="0" cy="0"/>
         </a:xfrm>
       </p:grpSpPr>
+      <p:sp useBgFill="1">
+        <p:nvSpPr>
+          <p:cNvPr id="30" name="Rectangle 29">
+            <a:extLst>
+              <a:ext uri="{FF2B5EF4-FFF2-40B4-BE49-F238E27FC236}">
+                <a16:creationId xmlns:a16="http://schemas.microsoft.com/office/drawing/2014/main" id="{149FB5C3-7336-4FE0-A30C-CC0A3646D499}"/>
+              </a:ext>
+              <a:ext uri="{C183D7F6-B498-43B3-948B-1728B52AA6E4}">
+                <adec:decorative xmlns:adec="http://schemas.microsoft.com/office/drawing/2017/decorative" val="1"/>
+              </a:ext>
+            </a:extLst>
+          </p:cNvPr>
+          <p:cNvSpPr>
+            <a:spLocks noGrp="1" noRot="1" noChangeAspect="1" noMove="1" noResize="1" noEditPoints="1" noAdjustHandles="1" noChangeArrowheads="1" noChangeShapeType="1" noTextEdit="1"/>
+          </p:cNvSpPr>
+          <p:nvPr>
+            <p:extLst>
+              <p:ext uri="{386F3935-93C4-4BCD-93E2-E3B085C9AB24}">
+                <p16:designElem xmlns:p16="http://schemas.microsoft.com/office/powerpoint/2015/main" val="1"/>
+              </p:ext>
+            </p:extLst>
+          </p:nvPr>
+        </p:nvSpPr>
+        <p:spPr>
+          <a:xfrm>
+            <a:off x="0" y="0"/>
+            <a:ext cx="12191999" cy="6857365"/>
+          </a:xfrm>
+          <a:prstGeom prst="rect">
+            <a:avLst/>
+          </a:prstGeom>
+          <a:ln>
+            <a:noFill/>
+          </a:ln>
+        </p:spPr>
+        <p:style>
+          <a:lnRef idx="2">
+            <a:schemeClr val="accent1">
+              <a:shade val="50000"/>
+            </a:schemeClr>
+          </a:lnRef>
+          <a:fillRef idx="1">
+            <a:schemeClr val="accent1"/>
+          </a:fillRef>
+          <a:effectRef idx="0">
+            <a:schemeClr val="accent1"/>
+          </a:effectRef>
+          <a:fontRef idx="minor">
+            <a:schemeClr val="lt1"/>
+          </a:fontRef>
+        </p:style>
+        <p:txBody>
+          <a:bodyPr rtlCol="0" anchor="ctr"/>
+          <a:lstStyle/>
+          <a:p>
+            <a:pPr algn="ctr"/>
+            <a:endParaRPr lang="en-US"/>
+          </a:p>
+        </p:txBody>
+      </p:sp>
+      <p:grpSp>
+        <p:nvGrpSpPr>
+          <p:cNvPr id="32" name="Group 31">
+            <a:extLst>
+              <a:ext uri="{FF2B5EF4-FFF2-40B4-BE49-F238E27FC236}">
+                <a16:creationId xmlns:a16="http://schemas.microsoft.com/office/drawing/2014/main" id="{19A6B5CE-CB1D-48EE-8B43-E952235C8371}"/>
+              </a:ext>
+              <a:ext uri="{C183D7F6-B498-43B3-948B-1728B52AA6E4}">
+                <adec:decorative xmlns:adec="http://schemas.microsoft.com/office/drawing/2017/decorative" val="1"/>
+              </a:ext>
+            </a:extLst>
+          </p:cNvPr>
+          <p:cNvGrpSpPr>
+            <a:grpSpLocks noGrp="1" noUngrp="1" noRot="1" noChangeAspect="1" noMove="1" noResize="1"/>
+          </p:cNvGrpSpPr>
+          <p:nvPr>
+            <p:extLst>
+              <p:ext uri="{386F3935-93C4-4BCD-93E2-E3B085C9AB24}">
+                <p16:designElem xmlns:p16="http://schemas.microsoft.com/office/powerpoint/2015/main" val="1"/>
+              </p:ext>
+            </p:extLst>
+          </p:nvPr>
+        </p:nvGrpSpPr>
+        <p:grpSpPr>
+          <a:xfrm rot="5400000">
+            <a:off x="-2340441" y="2666183"/>
+            <a:ext cx="5860051" cy="527712"/>
+            <a:chOff x="6081624" y="1998368"/>
+            <a:chExt cx="5613457" cy="782175"/>
+          </a:xfrm>
+          <a:solidFill>
+            <a:schemeClr val="accent4"/>
+          </a:solidFill>
+        </p:grpSpPr>
+        <p:sp>
+          <p:nvSpPr>
+            <p:cNvPr id="33" name="Rectangle 32">
+              <a:extLst>
+                <a:ext uri="{FF2B5EF4-FFF2-40B4-BE49-F238E27FC236}">
+                  <a16:creationId xmlns:a16="http://schemas.microsoft.com/office/drawing/2014/main" id="{E3F3EAA5-4E15-400B-BBA3-82B3F49A2178}"/>
+                </a:ext>
+                <a:ext uri="{C183D7F6-B498-43B3-948B-1728B52AA6E4}">
+                  <adec:decorative xmlns:adec="http://schemas.microsoft.com/office/drawing/2017/decorative" val="1"/>
+                </a:ext>
+              </a:extLst>
+            </p:cNvPr>
+            <p:cNvSpPr/>
+            <p:nvPr>
+              <p:extLst>
+                <p:ext uri="{386F3935-93C4-4BCD-93E2-E3B085C9AB24}">
+                  <p16:designElem xmlns:p16="http://schemas.microsoft.com/office/powerpoint/2015/main" val="1"/>
+                </p:ext>
+              </p:extLst>
+            </p:nvPr>
+          </p:nvSpPr>
+          <p:spPr>
+            <a:xfrm rot="5400000">
+              <a:off x="11228040" y="2313027"/>
+              <a:ext cx="781700" cy="152382"/>
+            </a:xfrm>
+            <a:prstGeom prst="rect">
+              <a:avLst/>
+            </a:prstGeom>
+            <a:grpFill/>
+            <a:ln>
+              <a:noFill/>
+            </a:ln>
+          </p:spPr>
+          <p:style>
+            <a:lnRef idx="2">
+              <a:schemeClr val="accent1">
+                <a:shade val="50000"/>
+              </a:schemeClr>
+            </a:lnRef>
+            <a:fillRef idx="1">
+              <a:schemeClr val="accent1"/>
+            </a:fillRef>
+            <a:effectRef idx="0">
+              <a:schemeClr val="accent1"/>
+            </a:effectRef>
+            <a:fontRef idx="minor">
+              <a:schemeClr val="lt1"/>
+            </a:fontRef>
+          </p:style>
+          <p:txBody>
+            <a:bodyPr rtlCol="0" anchor="ctr"/>
+            <a:lstStyle/>
+            <a:p>
+              <a:pPr algn="ctr"/>
+              <a:endParaRPr lang="en-US"/>
+            </a:p>
+          </p:txBody>
+        </p:sp>
+        <p:sp>
+          <p:nvSpPr>
+            <p:cNvPr id="34" name="Rectangle 33">
+              <a:extLst>
+                <a:ext uri="{FF2B5EF4-FFF2-40B4-BE49-F238E27FC236}">
+                  <a16:creationId xmlns:a16="http://schemas.microsoft.com/office/drawing/2014/main" id="{72BA2E40-BE9B-4C54-9CDD-40EE804CCE64}"/>
+                </a:ext>
+                <a:ext uri="{C183D7F6-B498-43B3-948B-1728B52AA6E4}">
+                  <adec:decorative xmlns:adec="http://schemas.microsoft.com/office/drawing/2017/decorative" val="1"/>
+                </a:ext>
+              </a:extLst>
+            </p:cNvPr>
+            <p:cNvSpPr/>
+            <p:nvPr>
+              <p:extLst>
+                <p:ext uri="{386F3935-93C4-4BCD-93E2-E3B085C9AB24}">
+                  <p16:designElem xmlns:p16="http://schemas.microsoft.com/office/powerpoint/2015/main" val="1"/>
+                </p:ext>
+              </p:extLst>
+            </p:nvPr>
+          </p:nvSpPr>
+          <p:spPr>
+            <a:xfrm flipH="1" flipV="1">
+              <a:off x="6081624" y="1998844"/>
+              <a:ext cx="5372968" cy="781699"/>
+            </a:xfrm>
+            <a:prstGeom prst="rect">
+              <a:avLst/>
+            </a:prstGeom>
+            <a:grpFill/>
+            <a:ln>
+              <a:noFill/>
+            </a:ln>
+          </p:spPr>
+          <p:style>
+            <a:lnRef idx="2">
+              <a:schemeClr val="accent1">
+                <a:shade val="50000"/>
+              </a:schemeClr>
+            </a:lnRef>
+            <a:fillRef idx="1">
+              <a:schemeClr val="accent1"/>
+            </a:fillRef>
+            <a:effectRef idx="0">
+              <a:schemeClr val="accent1"/>
+            </a:effectRef>
+            <a:fontRef idx="minor">
+              <a:schemeClr val="lt1"/>
+            </a:fontRef>
+          </p:style>
+          <p:txBody>
+            <a:bodyPr rtlCol="0" anchor="ctr"/>
+            <a:lstStyle/>
+            <a:p>
+              <a:pPr algn="ctr"/>
+              <a:endParaRPr lang="en-US"/>
+            </a:p>
+          </p:txBody>
+        </p:sp>
+      </p:grpSp>
+      <p:sp>
+        <p:nvSpPr>
+          <p:cNvPr id="36" name="Rectangle 35">
+            <a:extLst>
+              <a:ext uri="{FF2B5EF4-FFF2-40B4-BE49-F238E27FC236}">
+                <a16:creationId xmlns:a16="http://schemas.microsoft.com/office/drawing/2014/main" id="{0DA909B4-15FF-46A6-8A7F-7AEF977FE9ED}"/>
+              </a:ext>
+              <a:ext uri="{C183D7F6-B498-43B3-948B-1728B52AA6E4}">
+                <adec:decorative xmlns:adec="http://schemas.microsoft.com/office/drawing/2017/decorative" val="1"/>
+              </a:ext>
+            </a:extLst>
+          </p:cNvPr>
+          <p:cNvSpPr>
+            <a:spLocks noGrp="1" noRot="1" noChangeAspect="1" noMove="1" noResize="1" noEditPoints="1" noAdjustHandles="1" noChangeArrowheads="1" noChangeShapeType="1" noTextEdit="1"/>
+          </p:cNvSpPr>
+          <p:nvPr>
+            <p:extLst>
+              <p:ext uri="{386F3935-93C4-4BCD-93E2-E3B085C9AB24}">
+                <p16:designElem xmlns:p16="http://schemas.microsoft.com/office/powerpoint/2015/main" val="1"/>
+              </p:ext>
+            </p:extLst>
+          </p:nvPr>
+        </p:nvSpPr>
+        <p:spPr>
+          <a:xfrm>
+            <a:off x="579528" y="517897"/>
+            <a:ext cx="11111729" cy="5857966"/>
+          </a:xfrm>
+          <a:prstGeom prst="rect">
+            <a:avLst/>
+          </a:prstGeom>
+          <a:solidFill>
+            <a:schemeClr val="bg1"/>
+          </a:solidFill>
+          <a:ln>
+            <a:noFill/>
+          </a:ln>
+          <a:effectLst>
+            <a:outerShdw blurRad="139700" dist="127000" dir="5400000" algn="t" rotWithShape="0">
+              <a:prstClr val="black">
+                <a:alpha val="15000"/>
+              </a:prstClr>
+            </a:outerShdw>
+          </a:effectLst>
+        </p:spPr>
+        <p:style>
+          <a:lnRef idx="2">
+            <a:schemeClr val="accent1">
+              <a:shade val="50000"/>
+            </a:schemeClr>
+          </a:lnRef>
+          <a:fillRef idx="1">
+            <a:schemeClr val="accent1"/>
+          </a:fillRef>
+          <a:effectRef idx="0">
+            <a:schemeClr val="accent1"/>
+          </a:effectRef>
+          <a:fontRef idx="minor">
+            <a:schemeClr val="lt1"/>
+          </a:fontRef>
+        </p:style>
+        <p:txBody>
+          <a:bodyPr rtlCol="0" anchor="ctr"/>
+          <a:lstStyle/>
+          <a:p>
+            <a:pPr algn="ctr"/>
+            <a:endParaRPr lang="en-US"/>
+          </a:p>
+        </p:txBody>
+      </p:sp>
       <p:sp>
         <p:nvSpPr>
           <p:cNvPr id="2" name="Title 1">
@@ -3095,11 +5358,84 @@
             <p:ph type="title"/>
           </p:nvPr>
         </p:nvSpPr>
-        <p:spPr/>
-        <p:txBody>
-          <a:bodyPr/>
+        <p:spPr>
+          <a:xfrm>
+            <a:off x="1057025" y="922644"/>
+            <a:ext cx="5040285" cy="1169585"/>
+          </a:xfrm>
+        </p:spPr>
+        <p:txBody>
+          <a:bodyPr anchor="b">
+            <a:normAutofit/>
+          </a:bodyPr>
           <a:lstStyle/>
           <a:p>
+            <a:r>
+              <a:rPr lang="en-US" sz="4000" dirty="0"/>
+              <a:t>Goals &amp; General Info</a:t>
+            </a:r>
+          </a:p>
+        </p:txBody>
+      </p:sp>
+      <p:sp>
+        <p:nvSpPr>
+          <p:cNvPr id="38" name="Rectangle 37">
+            <a:extLst>
+              <a:ext uri="{FF2B5EF4-FFF2-40B4-BE49-F238E27FC236}">
+                <a16:creationId xmlns:a16="http://schemas.microsoft.com/office/drawing/2014/main" id="{1382A32C-5B0C-4B1C-A074-76C6DBCC9F87}"/>
+              </a:ext>
+              <a:ext uri="{C183D7F6-B498-43B3-948B-1728B52AA6E4}">
+                <adec:decorative xmlns:adec="http://schemas.microsoft.com/office/drawing/2017/decorative" val="1"/>
+              </a:ext>
+            </a:extLst>
+          </p:cNvPr>
+          <p:cNvSpPr>
+            <a:spLocks noGrp="1" noRot="1" noChangeAspect="1" noMove="1" noResize="1" noEditPoints="1" noAdjustHandles="1" noChangeArrowheads="1" noChangeShapeType="1" noTextEdit="1"/>
+          </p:cNvSpPr>
+          <p:nvPr>
+            <p:extLst>
+              <p:ext uri="{386F3935-93C4-4BCD-93E2-E3B085C9AB24}">
+                <p16:designElem xmlns:p16="http://schemas.microsoft.com/office/powerpoint/2015/main" val="1"/>
+              </p:ext>
+            </p:extLst>
+          </p:nvPr>
+        </p:nvSpPr>
+        <p:spPr>
+          <a:xfrm flipH="1">
+            <a:off x="1055714" y="2263365"/>
+            <a:ext cx="4937760" cy="27432"/>
+          </a:xfrm>
+          <a:prstGeom prst="rect">
+            <a:avLst/>
+          </a:prstGeom>
+          <a:solidFill>
+            <a:schemeClr val="accent4"/>
+          </a:solidFill>
+          <a:ln>
+            <a:noFill/>
+          </a:ln>
+        </p:spPr>
+        <p:style>
+          <a:lnRef idx="2">
+            <a:schemeClr val="accent1">
+              <a:shade val="50000"/>
+            </a:schemeClr>
+          </a:lnRef>
+          <a:fillRef idx="1">
+            <a:schemeClr val="accent1"/>
+          </a:fillRef>
+          <a:effectRef idx="0">
+            <a:schemeClr val="accent1"/>
+          </a:effectRef>
+          <a:fontRef idx="minor">
+            <a:schemeClr val="lt1"/>
+          </a:fontRef>
+        </p:style>
+        <p:txBody>
+          <a:bodyPr rtlCol="0" anchor="ctr"/>
+          <a:lstStyle/>
+          <a:p>
+            <a:pPr algn="ctr"/>
             <a:endParaRPr lang="en-US"/>
           </a:p>
         </p:txBody>
@@ -3120,19 +5456,3726 @@
             <p:ph idx="1"/>
           </p:nvPr>
         </p:nvSpPr>
-        <p:spPr/>
-        <p:txBody>
-          <a:bodyPr/>
+        <p:spPr>
+          <a:xfrm>
+            <a:off x="1055715" y="2508105"/>
+            <a:ext cx="5040285" cy="3632493"/>
+          </a:xfrm>
+        </p:spPr>
+        <p:txBody>
+          <a:bodyPr vert="horz" lIns="91440" tIns="45720" rIns="91440" bIns="45720" rtlCol="0" anchor="ctr">
+            <a:normAutofit/>
+          </a:bodyPr>
           <a:lstStyle/>
           <a:p>
-            <a:endParaRPr lang="en-US"/>
-          </a:p>
-        </p:txBody>
-      </p:sp>
+            <a:r>
+              <a:rPr lang="en-US" sz="1700" dirty="0"/>
+              <a:t>To simulate drone with accurate dimensions, weight and thrust values</a:t>
+            </a:r>
+          </a:p>
+          <a:p>
+            <a:r>
+              <a:rPr lang="en-US" sz="1700" dirty="0"/>
+              <a:t>To simulate midflight transformation with configurable arm angles</a:t>
+            </a:r>
+          </a:p>
+          <a:p>
+            <a:r>
+              <a:rPr lang="en-US" sz="1700" dirty="0"/>
+              <a:t>To simulate the effects of transformed flight on flight time, stability and power consumption.</a:t>
+            </a:r>
+          </a:p>
+          <a:p>
+            <a:endParaRPr lang="en-US" sz="1700" dirty="0"/>
+          </a:p>
+          <a:p>
+            <a:r>
+              <a:rPr lang="en-US" sz="1700" dirty="0"/>
+              <a:t>Using MATLAB Simulink and </a:t>
+            </a:r>
+            <a:r>
+              <a:rPr lang="en-US" sz="1700" dirty="0" err="1"/>
+              <a:t>Simscape</a:t>
+            </a:r>
+            <a:r>
+              <a:rPr lang="en-US" sz="1700" dirty="0"/>
+              <a:t> Add-Ons</a:t>
+            </a:r>
+          </a:p>
+          <a:p>
+            <a:r>
+              <a:rPr lang="en-US" sz="1700" dirty="0"/>
+              <a:t>Based on Model Quadcopter Drone MATLAB example</a:t>
+            </a:r>
+          </a:p>
+          <a:p>
+            <a:endParaRPr lang="en-US" sz="1700" dirty="0"/>
+          </a:p>
+        </p:txBody>
+      </p:sp>
+      <p:pic>
+        <p:nvPicPr>
+          <p:cNvPr id="5" name="Picture 4" descr="Simscape - MATLAB">
+            <a:extLst>
+              <a:ext uri="{FF2B5EF4-FFF2-40B4-BE49-F238E27FC236}">
+                <a16:creationId xmlns:a16="http://schemas.microsoft.com/office/drawing/2014/main" id="{46979884-427F-B8B1-3F8E-97FFD80D3776}"/>
+              </a:ext>
+            </a:extLst>
+          </p:cNvPr>
+          <p:cNvPicPr>
+            <a:picLocks noChangeAspect="1"/>
+          </p:cNvPicPr>
+          <p:nvPr/>
+        </p:nvPicPr>
+        <p:blipFill>
+          <a:blip r:embed="rId2"/>
+          <a:stretch>
+            <a:fillRect/>
+          </a:stretch>
+        </p:blipFill>
+        <p:spPr>
+          <a:xfrm>
+            <a:off x="6946667" y="1049887"/>
+            <a:ext cx="4389120" cy="2029968"/>
+          </a:xfrm>
+          <a:prstGeom prst="rect">
+            <a:avLst/>
+          </a:prstGeom>
+        </p:spPr>
+      </p:pic>
+      <p:pic>
+        <p:nvPicPr>
+          <p:cNvPr id="4" name="Picture 3" descr="A drone with a basket and a basket&#10;&#10;AI-generated content may be incorrect.">
+            <a:extLst>
+              <a:ext uri="{FF2B5EF4-FFF2-40B4-BE49-F238E27FC236}">
+                <a16:creationId xmlns:a16="http://schemas.microsoft.com/office/drawing/2014/main" id="{EE6768F9-5F1E-A1FA-BDBE-B38F93E7B669}"/>
+              </a:ext>
+            </a:extLst>
+          </p:cNvPr>
+          <p:cNvPicPr>
+            <a:picLocks noChangeAspect="1"/>
+          </p:cNvPicPr>
+          <p:nvPr/>
+        </p:nvPicPr>
+        <p:blipFill>
+          <a:blip r:embed="rId3"/>
+          <a:stretch>
+            <a:fillRect/>
+          </a:stretch>
+        </p:blipFill>
+        <p:spPr>
+          <a:xfrm>
+            <a:off x="6946667" y="4114024"/>
+            <a:ext cx="4389120" cy="1503273"/>
+          </a:xfrm>
+          <a:prstGeom prst="rect">
+            <a:avLst/>
+          </a:prstGeom>
+        </p:spPr>
+      </p:pic>
     </p:spTree>
     <p:extLst>
       <p:ext uri="{BB962C8B-B14F-4D97-AF65-F5344CB8AC3E}">
         <p14:creationId xmlns:p14="http://schemas.microsoft.com/office/powerpoint/2010/main" val="3283190877"/>
+      </p:ext>
+    </p:extLst>
+  </p:cSld>
+  <p:clrMapOvr>
+    <a:masterClrMapping/>
+  </p:clrMapOvr>
+</p:sld>
+</file>
+
+<file path=ppt/slides/slide3.xml><?xml version="1.0" encoding="utf-8"?>
+<p:sld xmlns:a="http://schemas.openxmlformats.org/drawingml/2006/main" xmlns:r="http://schemas.openxmlformats.org/officeDocument/2006/relationships" xmlns:p="http://schemas.openxmlformats.org/presentationml/2006/main">
+  <p:cSld>
+    <p:bg>
+      <p:bgPr>
+        <a:solidFill>
+          <a:schemeClr val="accent1"/>
+        </a:solidFill>
+        <a:effectLst/>
+      </p:bgPr>
+    </p:bg>
+    <p:spTree>
+      <p:nvGrpSpPr>
+        <p:cNvPr id="1" name=""/>
+        <p:cNvGrpSpPr/>
+        <p:nvPr/>
+      </p:nvGrpSpPr>
+      <p:grpSpPr>
+        <a:xfrm>
+          <a:off x="0" y="0"/>
+          <a:ext cx="0" cy="0"/>
+          <a:chOff x="0" y="0"/>
+          <a:chExt cx="0" cy="0"/>
+        </a:xfrm>
+      </p:grpSpPr>
+      <p:sp useBgFill="1">
+        <p:nvSpPr>
+          <p:cNvPr id="32" name="Rectangle 31">
+            <a:extLst>
+              <a:ext uri="{FF2B5EF4-FFF2-40B4-BE49-F238E27FC236}">
+                <a16:creationId xmlns:a16="http://schemas.microsoft.com/office/drawing/2014/main" id="{1A042C51-0ACE-419E-A039-04AD72522158}"/>
+              </a:ext>
+              <a:ext uri="{C183D7F6-B498-43B3-948B-1728B52AA6E4}">
+                <adec:decorative xmlns:adec="http://schemas.microsoft.com/office/drawing/2017/decorative" val="1"/>
+              </a:ext>
+            </a:extLst>
+          </p:cNvPr>
+          <p:cNvSpPr>
+            <a:spLocks noGrp="1" noRot="1" noChangeAspect="1" noMove="1" noResize="1" noEditPoints="1" noAdjustHandles="1" noChangeArrowheads="1" noChangeShapeType="1" noTextEdit="1"/>
+          </p:cNvSpPr>
+          <p:nvPr>
+            <p:extLst>
+              <p:ext uri="{386F3935-93C4-4BCD-93E2-E3B085C9AB24}">
+                <p16:designElem xmlns:p16="http://schemas.microsoft.com/office/powerpoint/2015/main" val="1"/>
+              </p:ext>
+            </p:extLst>
+          </p:nvPr>
+        </p:nvSpPr>
+        <p:spPr>
+          <a:xfrm>
+            <a:off x="0" y="0"/>
+            <a:ext cx="12191999" cy="6857365"/>
+          </a:xfrm>
+          <a:prstGeom prst="rect">
+            <a:avLst/>
+          </a:prstGeom>
+          <a:ln>
+            <a:noFill/>
+          </a:ln>
+        </p:spPr>
+        <p:style>
+          <a:lnRef idx="2">
+            <a:schemeClr val="accent1">
+              <a:shade val="50000"/>
+            </a:schemeClr>
+          </a:lnRef>
+          <a:fillRef idx="1">
+            <a:schemeClr val="accent1"/>
+          </a:fillRef>
+          <a:effectRef idx="0">
+            <a:schemeClr val="accent1"/>
+          </a:effectRef>
+          <a:fontRef idx="minor">
+            <a:schemeClr val="lt1"/>
+          </a:fontRef>
+        </p:style>
+        <p:txBody>
+          <a:bodyPr rtlCol="0" anchor="ctr"/>
+          <a:lstStyle/>
+          <a:p>
+            <a:pPr algn="ctr"/>
+            <a:endParaRPr lang="en-US"/>
+          </a:p>
+        </p:txBody>
+      </p:sp>
+      <p:grpSp>
+        <p:nvGrpSpPr>
+          <p:cNvPr id="34" name="Group 33">
+            <a:extLst>
+              <a:ext uri="{FF2B5EF4-FFF2-40B4-BE49-F238E27FC236}">
+                <a16:creationId xmlns:a16="http://schemas.microsoft.com/office/drawing/2014/main" id="{AE1C45F0-260A-458C-96ED-C1F6D2151219}"/>
+              </a:ext>
+              <a:ext uri="{C183D7F6-B498-43B3-948B-1728B52AA6E4}">
+                <adec:decorative xmlns:adec="http://schemas.microsoft.com/office/drawing/2017/decorative" val="1"/>
+              </a:ext>
+            </a:extLst>
+          </p:cNvPr>
+          <p:cNvGrpSpPr>
+            <a:grpSpLocks noGrp="1" noUngrp="1" noRot="1" noChangeAspect="1" noMove="1" noResize="1"/>
+          </p:cNvGrpSpPr>
+          <p:nvPr>
+            <p:extLst>
+              <p:ext uri="{386F3935-93C4-4BCD-93E2-E3B085C9AB24}">
+                <p16:designElem xmlns:p16="http://schemas.microsoft.com/office/powerpoint/2015/main" val="1"/>
+              </p:ext>
+            </p:extLst>
+          </p:nvPr>
+        </p:nvGrpSpPr>
+        <p:grpSpPr>
+          <a:xfrm>
+            <a:off x="4" y="1062849"/>
+            <a:ext cx="731521" cy="673460"/>
+            <a:chOff x="3940602" y="308034"/>
+            <a:chExt cx="2116791" cy="3428999"/>
+          </a:xfrm>
+          <a:solidFill>
+            <a:schemeClr val="accent4"/>
+          </a:solidFill>
+        </p:grpSpPr>
+        <p:sp>
+          <p:nvSpPr>
+            <p:cNvPr id="35" name="Rectangle 34">
+              <a:extLst>
+                <a:ext uri="{FF2B5EF4-FFF2-40B4-BE49-F238E27FC236}">
+                  <a16:creationId xmlns:a16="http://schemas.microsoft.com/office/drawing/2014/main" id="{A6604B49-AD5C-4590-B051-06C8222ECD99}"/>
+                </a:ext>
+                <a:ext uri="{C183D7F6-B498-43B3-948B-1728B52AA6E4}">
+                  <adec:decorative xmlns:adec="http://schemas.microsoft.com/office/drawing/2017/decorative" val="1"/>
+                </a:ext>
+              </a:extLst>
+            </p:cNvPr>
+            <p:cNvSpPr/>
+            <p:nvPr>
+              <p:extLst>
+                <p:ext uri="{386F3935-93C4-4BCD-93E2-E3B085C9AB24}">
+                  <p16:designElem xmlns:p16="http://schemas.microsoft.com/office/powerpoint/2015/main" val="1"/>
+                </p:ext>
+              </p:extLst>
+            </p:nvPr>
+          </p:nvSpPr>
+          <p:spPr>
+            <a:xfrm>
+              <a:off x="3940602" y="308034"/>
+              <a:ext cx="566743" cy="3428999"/>
+            </a:xfrm>
+            <a:prstGeom prst="rect">
+              <a:avLst/>
+            </a:prstGeom>
+            <a:grpFill/>
+            <a:ln>
+              <a:noFill/>
+            </a:ln>
+          </p:spPr>
+          <p:style>
+            <a:lnRef idx="2">
+              <a:schemeClr val="accent1">
+                <a:shade val="50000"/>
+              </a:schemeClr>
+            </a:lnRef>
+            <a:fillRef idx="1">
+              <a:schemeClr val="accent1"/>
+            </a:fillRef>
+            <a:effectRef idx="0">
+              <a:schemeClr val="accent1"/>
+            </a:effectRef>
+            <a:fontRef idx="minor">
+              <a:schemeClr val="lt1"/>
+            </a:fontRef>
+          </p:style>
+          <p:txBody>
+            <a:bodyPr rtlCol="0" anchor="ctr"/>
+            <a:lstStyle/>
+            <a:p>
+              <a:pPr algn="ctr"/>
+              <a:endParaRPr lang="en-US"/>
+            </a:p>
+          </p:txBody>
+        </p:sp>
+        <p:sp>
+          <p:nvSpPr>
+            <p:cNvPr id="36" name="Rectangle 35">
+              <a:extLst>
+                <a:ext uri="{FF2B5EF4-FFF2-40B4-BE49-F238E27FC236}">
+                  <a16:creationId xmlns:a16="http://schemas.microsoft.com/office/drawing/2014/main" id="{743ECCAF-29C5-4537-947C-7EA1292463DB}"/>
+                </a:ext>
+                <a:ext uri="{C183D7F6-B498-43B3-948B-1728B52AA6E4}">
+                  <adec:decorative xmlns:adec="http://schemas.microsoft.com/office/drawing/2017/decorative" val="1"/>
+                </a:ext>
+              </a:extLst>
+            </p:cNvPr>
+            <p:cNvSpPr/>
+            <p:nvPr>
+              <p:extLst>
+                <p:ext uri="{386F3935-93C4-4BCD-93E2-E3B085C9AB24}">
+                  <p16:designElem xmlns:p16="http://schemas.microsoft.com/office/powerpoint/2015/main" val="1"/>
+                </p:ext>
+              </p:extLst>
+            </p:nvPr>
+          </p:nvSpPr>
+          <p:spPr>
+            <a:xfrm>
+              <a:off x="4715626" y="308034"/>
+              <a:ext cx="566743" cy="3428999"/>
+            </a:xfrm>
+            <a:prstGeom prst="rect">
+              <a:avLst/>
+            </a:prstGeom>
+            <a:grpFill/>
+            <a:ln>
+              <a:noFill/>
+            </a:ln>
+          </p:spPr>
+          <p:style>
+            <a:lnRef idx="2">
+              <a:schemeClr val="accent1">
+                <a:shade val="50000"/>
+              </a:schemeClr>
+            </a:lnRef>
+            <a:fillRef idx="1">
+              <a:schemeClr val="accent1"/>
+            </a:fillRef>
+            <a:effectRef idx="0">
+              <a:schemeClr val="accent1"/>
+            </a:effectRef>
+            <a:fontRef idx="minor">
+              <a:schemeClr val="lt1"/>
+            </a:fontRef>
+          </p:style>
+          <p:txBody>
+            <a:bodyPr rtlCol="0" anchor="ctr"/>
+            <a:lstStyle/>
+            <a:p>
+              <a:pPr algn="ctr"/>
+              <a:endParaRPr lang="en-US"/>
+            </a:p>
+          </p:txBody>
+        </p:sp>
+        <p:sp>
+          <p:nvSpPr>
+            <p:cNvPr id="37" name="Rectangle 36">
+              <a:extLst>
+                <a:ext uri="{FF2B5EF4-FFF2-40B4-BE49-F238E27FC236}">
+                  <a16:creationId xmlns:a16="http://schemas.microsoft.com/office/drawing/2014/main" id="{ED49787B-8DE6-4467-AD0A-8DECC6E0C2D6}"/>
+                </a:ext>
+                <a:ext uri="{C183D7F6-B498-43B3-948B-1728B52AA6E4}">
+                  <adec:decorative xmlns:adec="http://schemas.microsoft.com/office/drawing/2017/decorative" val="1"/>
+                </a:ext>
+              </a:extLst>
+            </p:cNvPr>
+            <p:cNvSpPr/>
+            <p:nvPr>
+              <p:extLst>
+                <p:ext uri="{386F3935-93C4-4BCD-93E2-E3B085C9AB24}">
+                  <p16:designElem xmlns:p16="http://schemas.microsoft.com/office/powerpoint/2015/main" val="1"/>
+                </p:ext>
+              </p:extLst>
+            </p:nvPr>
+          </p:nvSpPr>
+          <p:spPr>
+            <a:xfrm>
+              <a:off x="5490650" y="308034"/>
+              <a:ext cx="566743" cy="3428999"/>
+            </a:xfrm>
+            <a:prstGeom prst="rect">
+              <a:avLst/>
+            </a:prstGeom>
+            <a:grpFill/>
+            <a:ln>
+              <a:noFill/>
+            </a:ln>
+          </p:spPr>
+          <p:style>
+            <a:lnRef idx="2">
+              <a:schemeClr val="accent1">
+                <a:shade val="50000"/>
+              </a:schemeClr>
+            </a:lnRef>
+            <a:fillRef idx="1">
+              <a:schemeClr val="accent1"/>
+            </a:fillRef>
+            <a:effectRef idx="0">
+              <a:schemeClr val="accent1"/>
+            </a:effectRef>
+            <a:fontRef idx="minor">
+              <a:schemeClr val="lt1"/>
+            </a:fontRef>
+          </p:style>
+          <p:txBody>
+            <a:bodyPr rtlCol="0" anchor="ctr"/>
+            <a:lstStyle/>
+            <a:p>
+              <a:pPr algn="ctr"/>
+              <a:endParaRPr lang="en-US"/>
+            </a:p>
+          </p:txBody>
+        </p:sp>
+      </p:grpSp>
+      <p:sp>
+        <p:nvSpPr>
+          <p:cNvPr id="39" name="Rectangle 38">
+            <a:extLst>
+              <a:ext uri="{FF2B5EF4-FFF2-40B4-BE49-F238E27FC236}">
+                <a16:creationId xmlns:a16="http://schemas.microsoft.com/office/drawing/2014/main" id="{D5B0017B-2ECA-49AF-B397-DC140825DF8D}"/>
+              </a:ext>
+              <a:ext uri="{C183D7F6-B498-43B3-948B-1728B52AA6E4}">
+                <adec:decorative xmlns:adec="http://schemas.microsoft.com/office/drawing/2017/decorative" val="1"/>
+              </a:ext>
+            </a:extLst>
+          </p:cNvPr>
+          <p:cNvSpPr>
+            <a:spLocks noGrp="1" noRot="1" noChangeAspect="1" noMove="1" noResize="1" noEditPoints="1" noAdjustHandles="1" noChangeArrowheads="1" noChangeShapeType="1" noTextEdit="1"/>
+          </p:cNvSpPr>
+          <p:nvPr>
+            <p:extLst>
+              <p:ext uri="{386F3935-93C4-4BCD-93E2-E3B085C9AB24}">
+                <p16:designElem xmlns:p16="http://schemas.microsoft.com/office/powerpoint/2015/main" val="1"/>
+              </p:ext>
+            </p:extLst>
+          </p:nvPr>
+        </p:nvSpPr>
+        <p:spPr>
+          <a:xfrm>
+            <a:off x="640080" y="656150"/>
+            <a:ext cx="5590787" cy="1431591"/>
+          </a:xfrm>
+          <a:prstGeom prst="rect">
+            <a:avLst/>
+          </a:prstGeom>
+          <a:solidFill>
+            <a:schemeClr val="bg1"/>
+          </a:solidFill>
+          <a:ln>
+            <a:noFill/>
+          </a:ln>
+          <a:effectLst>
+            <a:outerShdw blurRad="139700" dist="127000" dir="5400000" algn="t" rotWithShape="0">
+              <a:prstClr val="black">
+                <a:alpha val="15000"/>
+              </a:prstClr>
+            </a:outerShdw>
+          </a:effectLst>
+        </p:spPr>
+        <p:style>
+          <a:lnRef idx="2">
+            <a:schemeClr val="accent1">
+              <a:shade val="50000"/>
+            </a:schemeClr>
+          </a:lnRef>
+          <a:fillRef idx="1">
+            <a:schemeClr val="accent1"/>
+          </a:fillRef>
+          <a:effectRef idx="0">
+            <a:schemeClr val="accent1"/>
+          </a:effectRef>
+          <a:fontRef idx="minor">
+            <a:schemeClr val="lt1"/>
+          </a:fontRef>
+        </p:style>
+        <p:txBody>
+          <a:bodyPr rtlCol="0" anchor="ctr"/>
+          <a:lstStyle/>
+          <a:p>
+            <a:pPr algn="ctr"/>
+            <a:endParaRPr lang="en-US"/>
+          </a:p>
+        </p:txBody>
+      </p:sp>
+      <p:sp>
+        <p:nvSpPr>
+          <p:cNvPr id="2" name="Title 1">
+            <a:extLst>
+              <a:ext uri="{FF2B5EF4-FFF2-40B4-BE49-F238E27FC236}">
+                <a16:creationId xmlns:a16="http://schemas.microsoft.com/office/drawing/2014/main" id="{36818FCC-53A4-1EFC-18A3-635040B56451}"/>
+              </a:ext>
+            </a:extLst>
+          </p:cNvPr>
+          <p:cNvSpPr>
+            <a:spLocks noGrp="1"/>
+          </p:cNvSpPr>
+          <p:nvPr>
+            <p:ph type="title"/>
+          </p:nvPr>
+        </p:nvSpPr>
+        <p:spPr>
+          <a:xfrm>
+            <a:off x="1043631" y="873940"/>
+            <a:ext cx="4928291" cy="1035781"/>
+          </a:xfrm>
+        </p:spPr>
+        <p:style>
+          <a:lnRef idx="2">
+            <a:schemeClr val="dk1">
+              <a:shade val="15000"/>
+            </a:schemeClr>
+          </a:lnRef>
+          <a:fillRef idx="1">
+            <a:schemeClr val="dk1"/>
+          </a:fillRef>
+          <a:effectRef idx="0">
+            <a:schemeClr val="dk1"/>
+          </a:effectRef>
+          <a:fontRef idx="minor">
+            <a:schemeClr val="lt1"/>
+          </a:fontRef>
+        </p:style>
+        <p:txBody>
+          <a:bodyPr anchor="ctr">
+            <a:normAutofit/>
+          </a:bodyPr>
+          <a:lstStyle/>
+          <a:p>
+            <a:r>
+              <a:rPr lang="en-US" sz="3600" dirty="0"/>
+              <a:t>Swapping CAD Models</a:t>
+            </a:r>
+          </a:p>
+        </p:txBody>
+      </p:sp>
+      <p:sp>
+        <p:nvSpPr>
+          <p:cNvPr id="3" name="Content Placeholder 2">
+            <a:extLst>
+              <a:ext uri="{FF2B5EF4-FFF2-40B4-BE49-F238E27FC236}">
+                <a16:creationId xmlns:a16="http://schemas.microsoft.com/office/drawing/2014/main" id="{3C3157D2-31E4-C17C-F799-F0C5A16C4D35}"/>
+              </a:ext>
+            </a:extLst>
+          </p:cNvPr>
+          <p:cNvSpPr>
+            <a:spLocks noGrp="1"/>
+          </p:cNvSpPr>
+          <p:nvPr>
+            <p:ph idx="1"/>
+          </p:nvPr>
+        </p:nvSpPr>
+        <p:spPr>
+          <a:xfrm>
+            <a:off x="640080" y="2087741"/>
+            <a:ext cx="5590787" cy="4114104"/>
+          </a:xfrm>
+        </p:spPr>
+        <p:style>
+          <a:lnRef idx="2">
+            <a:schemeClr val="dk1">
+              <a:shade val="15000"/>
+            </a:schemeClr>
+          </a:lnRef>
+          <a:fillRef idx="1">
+            <a:schemeClr val="dk1"/>
+          </a:fillRef>
+          <a:effectRef idx="0">
+            <a:schemeClr val="dk1"/>
+          </a:effectRef>
+          <a:fontRef idx="minor">
+            <a:schemeClr val="lt1"/>
+          </a:fontRef>
+        </p:style>
+        <p:txBody>
+          <a:bodyPr vert="horz" lIns="91440" tIns="45720" rIns="91440" bIns="45720" rtlCol="0" anchor="t">
+            <a:normAutofit/>
+          </a:bodyPr>
+          <a:lstStyle/>
+          <a:p>
+            <a:r>
+              <a:rPr lang="en-US" sz="1800" dirty="0"/>
+              <a:t>Replaced placeholder drone components with our real drone parts using SolidWorks assemblies.</a:t>
+            </a:r>
+          </a:p>
+          <a:p>
+            <a:r>
+              <a:rPr lang="en-US" sz="1800" dirty="0"/>
+              <a:t>Changed mass, </a:t>
+            </a:r>
+            <a:r>
+              <a:rPr lang="en-US" sz="1800" dirty="0" err="1"/>
+              <a:t>intertia</a:t>
+            </a:r>
+            <a:r>
+              <a:rPr lang="en-US" sz="1800" dirty="0"/>
+              <a:t>, and geometry in </a:t>
+            </a:r>
+            <a:r>
+              <a:rPr lang="en-US" sz="1800" dirty="0" err="1"/>
+              <a:t>SimScape</a:t>
+            </a:r>
+            <a:r>
+              <a:rPr lang="en-US" sz="1800" dirty="0"/>
+              <a:t> to create a realistic simulation.</a:t>
+            </a:r>
+          </a:p>
+          <a:p>
+            <a:r>
+              <a:rPr lang="en-US" sz="1800" dirty="0"/>
+              <a:t>Adjust connection frames and rigid offsets to attach parts in the same orientation.</a:t>
+            </a:r>
+          </a:p>
+          <a:p>
+            <a:endParaRPr lang="en-US" sz="1800" dirty="0"/>
+          </a:p>
+        </p:txBody>
+      </p:sp>
+      <p:pic>
+        <p:nvPicPr>
+          <p:cNvPr id="6" name="Picture 5" descr="A blueprint of a jet engine&#10;&#10;AI-generated content may be incorrect.">
+            <a:extLst>
+              <a:ext uri="{FF2B5EF4-FFF2-40B4-BE49-F238E27FC236}">
+                <a16:creationId xmlns:a16="http://schemas.microsoft.com/office/drawing/2014/main" id="{F7E822F0-9BC7-3701-EEDF-441DFD6E3E18}"/>
+              </a:ext>
+            </a:extLst>
+          </p:cNvPr>
+          <p:cNvPicPr>
+            <a:picLocks noChangeAspect="1"/>
+          </p:cNvPicPr>
+          <p:nvPr/>
+        </p:nvPicPr>
+        <p:blipFill>
+          <a:blip r:embed="rId2"/>
+          <a:srcRect l="841" r="5915" b="-5"/>
+          <a:stretch>
+            <a:fillRect/>
+          </a:stretch>
+        </p:blipFill>
+        <p:spPr>
+          <a:xfrm>
+            <a:off x="6788384" y="613148"/>
+            <a:ext cx="2212848" cy="2130052"/>
+          </a:xfrm>
+          <a:prstGeom prst="rect">
+            <a:avLst/>
+          </a:prstGeom>
+        </p:spPr>
+      </p:pic>
+      <p:pic>
+        <p:nvPicPr>
+          <p:cNvPr id="4" name="Picture 3" descr="A 3d model of a drone&#10;&#10;AI-generated content may be incorrect.">
+            <a:extLst>
+              <a:ext uri="{FF2B5EF4-FFF2-40B4-BE49-F238E27FC236}">
+                <a16:creationId xmlns:a16="http://schemas.microsoft.com/office/drawing/2014/main" id="{6DAF3E27-BF4F-D680-0CBB-0087C310032D}"/>
+              </a:ext>
+            </a:extLst>
+          </p:cNvPr>
+          <p:cNvPicPr>
+            <a:picLocks noChangeAspect="1"/>
+          </p:cNvPicPr>
+          <p:nvPr/>
+        </p:nvPicPr>
+        <p:blipFill>
+          <a:blip r:embed="rId3"/>
+          <a:srcRect l="12940" r="19014"/>
+          <a:stretch>
+            <a:fillRect/>
+          </a:stretch>
+        </p:blipFill>
+        <p:spPr>
+          <a:xfrm>
+            <a:off x="9140952" y="613147"/>
+            <a:ext cx="2212848" cy="2130052"/>
+          </a:xfrm>
+          <a:prstGeom prst="rect">
+            <a:avLst/>
+          </a:prstGeom>
+        </p:spPr>
+      </p:pic>
+      <p:pic>
+        <p:nvPicPr>
+          <p:cNvPr id="5" name="Picture 4" descr="A screenshot of a math equation&#10;&#10;AI-generated content may be incorrect.">
+            <a:extLst>
+              <a:ext uri="{FF2B5EF4-FFF2-40B4-BE49-F238E27FC236}">
+                <a16:creationId xmlns:a16="http://schemas.microsoft.com/office/drawing/2014/main" id="{BDBFA0B5-E842-DDAA-DBDC-B26D8398417D}"/>
+              </a:ext>
+            </a:extLst>
+          </p:cNvPr>
+          <p:cNvPicPr>
+            <a:picLocks noChangeAspect="1"/>
+          </p:cNvPicPr>
+          <p:nvPr/>
+        </p:nvPicPr>
+        <p:blipFill>
+          <a:blip r:embed="rId4"/>
+          <a:srcRect r="3659" b="3"/>
+          <a:stretch>
+            <a:fillRect/>
+          </a:stretch>
+        </p:blipFill>
+        <p:spPr>
+          <a:xfrm>
+            <a:off x="6788383" y="2884516"/>
+            <a:ext cx="4565417" cy="3323430"/>
+          </a:xfrm>
+          <a:prstGeom prst="rect">
+            <a:avLst/>
+          </a:prstGeom>
+        </p:spPr>
+      </p:pic>
+      <p:cxnSp>
+        <p:nvCxnSpPr>
+          <p:cNvPr id="41" name="Straight Connector 40">
+            <a:extLst>
+              <a:ext uri="{FF2B5EF4-FFF2-40B4-BE49-F238E27FC236}">
+                <a16:creationId xmlns:a16="http://schemas.microsoft.com/office/drawing/2014/main" id="{6CF1BAF6-AD41-4082-B212-8A1F9A2E8779}"/>
+              </a:ext>
+              <a:ext uri="{C183D7F6-B498-43B3-948B-1728B52AA6E4}">
+                <adec:decorative xmlns:adec="http://schemas.microsoft.com/office/drawing/2017/decorative" val="1"/>
+              </a:ext>
+            </a:extLst>
+          </p:cNvPr>
+          <p:cNvCxnSpPr>
+            <a:cxnSpLocks noGrp="1" noRot="1" noChangeAspect="1" noMove="1" noResize="1" noEditPoints="1" noAdjustHandles="1" noChangeArrowheads="1" noChangeShapeType="1"/>
+          </p:cNvCxnSpPr>
+          <p:nvPr>
+            <p:extLst>
+              <p:ext uri="{386F3935-93C4-4BCD-93E2-E3B085C9AB24}">
+                <p16:designElem xmlns:p16="http://schemas.microsoft.com/office/powerpoint/2015/main" val="1"/>
+              </p:ext>
+            </p:extLst>
+          </p:nvPr>
+        </p:nvCxnSpPr>
+        <p:spPr>
+          <a:xfrm flipH="1">
+            <a:off x="838200" y="6492240"/>
+            <a:ext cx="10515600" cy="0"/>
+          </a:xfrm>
+          <a:prstGeom prst="line">
+            <a:avLst/>
+          </a:prstGeom>
+          <a:ln w="57150">
+            <a:solidFill>
+              <a:schemeClr val="accent4"/>
+            </a:solidFill>
+          </a:ln>
+        </p:spPr>
+        <p:style>
+          <a:lnRef idx="1">
+            <a:schemeClr val="accent1"/>
+          </a:lnRef>
+          <a:fillRef idx="0">
+            <a:schemeClr val="accent1"/>
+          </a:fillRef>
+          <a:effectRef idx="0">
+            <a:schemeClr val="accent1"/>
+          </a:effectRef>
+          <a:fontRef idx="minor">
+            <a:schemeClr val="tx1"/>
+          </a:fontRef>
+        </p:style>
+      </p:cxnSp>
+    </p:spTree>
+    <p:extLst>
+      <p:ext uri="{BB962C8B-B14F-4D97-AF65-F5344CB8AC3E}">
+        <p14:creationId xmlns:p14="http://schemas.microsoft.com/office/powerpoint/2010/main" val="783867445"/>
+      </p:ext>
+    </p:extLst>
+  </p:cSld>
+  <p:clrMapOvr>
+    <a:masterClrMapping/>
+  </p:clrMapOvr>
+</p:sld>
+</file>
+
+<file path=ppt/slides/slide4.xml><?xml version="1.0" encoding="utf-8"?>
+<p:sld xmlns:a="http://schemas.openxmlformats.org/drawingml/2006/main" xmlns:r="http://schemas.openxmlformats.org/officeDocument/2006/relationships" xmlns:p="http://schemas.openxmlformats.org/presentationml/2006/main">
+  <p:cSld>
+    <p:spTree>
+      <p:nvGrpSpPr>
+        <p:cNvPr id="1" name=""/>
+        <p:cNvGrpSpPr/>
+        <p:nvPr/>
+      </p:nvGrpSpPr>
+      <p:grpSpPr>
+        <a:xfrm>
+          <a:off x="0" y="0"/>
+          <a:ext cx="0" cy="0"/>
+          <a:chOff x="0" y="0"/>
+          <a:chExt cx="0" cy="0"/>
+        </a:xfrm>
+      </p:grpSpPr>
+      <p:sp>
+        <p:nvSpPr>
+          <p:cNvPr id="18" name="Rectangle 17">
+            <a:extLst>
+              <a:ext uri="{FF2B5EF4-FFF2-40B4-BE49-F238E27FC236}">
+                <a16:creationId xmlns:a16="http://schemas.microsoft.com/office/drawing/2014/main" id="{0389F4DB-F979-7C52-54BD-C79CC18E699D}"/>
+              </a:ext>
+            </a:extLst>
+          </p:cNvPr>
+          <p:cNvSpPr/>
+          <p:nvPr/>
+        </p:nvSpPr>
+        <p:spPr>
+          <a:xfrm>
+            <a:off x="589936" y="399012"/>
+            <a:ext cx="10884309" cy="5991956"/>
+          </a:xfrm>
+          <a:prstGeom prst="rect">
+            <a:avLst/>
+          </a:prstGeom>
+        </p:spPr>
+        <p:style>
+          <a:lnRef idx="2">
+            <a:schemeClr val="dk1">
+              <a:shade val="15000"/>
+            </a:schemeClr>
+          </a:lnRef>
+          <a:fillRef idx="1">
+            <a:schemeClr val="dk1"/>
+          </a:fillRef>
+          <a:effectRef idx="0">
+            <a:schemeClr val="dk1"/>
+          </a:effectRef>
+          <a:fontRef idx="minor">
+            <a:schemeClr val="lt1"/>
+          </a:fontRef>
+        </p:style>
+        <p:txBody>
+          <a:bodyPr rtlCol="0" anchor="ctr"/>
+          <a:lstStyle/>
+          <a:p>
+            <a:pPr algn="ctr"/>
+            <a:endParaRPr lang="en-US"/>
+          </a:p>
+        </p:txBody>
+      </p:sp>
+      <p:sp>
+        <p:nvSpPr>
+          <p:cNvPr id="2" name="Title 1">
+            <a:extLst>
+              <a:ext uri="{FF2B5EF4-FFF2-40B4-BE49-F238E27FC236}">
+                <a16:creationId xmlns:a16="http://schemas.microsoft.com/office/drawing/2014/main" id="{08B83C61-D979-D027-309D-CB11B8B04E6B}"/>
+              </a:ext>
+            </a:extLst>
+          </p:cNvPr>
+          <p:cNvSpPr>
+            <a:spLocks noGrp="1"/>
+          </p:cNvSpPr>
+          <p:nvPr>
+            <p:ph type="title"/>
+          </p:nvPr>
+        </p:nvSpPr>
+        <p:spPr/>
+        <p:txBody>
+          <a:bodyPr/>
+          <a:lstStyle/>
+          <a:p>
+            <a:r>
+              <a:rPr lang="en-US" dirty="0"/>
+              <a:t>Current Simulated CAD Model</a:t>
+            </a:r>
+          </a:p>
+        </p:txBody>
+      </p:sp>
+      <p:pic>
+        <p:nvPicPr>
+          <p:cNvPr id="5" name="Content Placeholder 4">
+            <a:extLst>
+              <a:ext uri="{FF2B5EF4-FFF2-40B4-BE49-F238E27FC236}">
+                <a16:creationId xmlns:a16="http://schemas.microsoft.com/office/drawing/2014/main" id="{00ED9508-07D4-956D-D010-A36E294EF2D0}"/>
+              </a:ext>
+            </a:extLst>
+          </p:cNvPr>
+          <p:cNvPicPr>
+            <a:picLocks noGrp="1" noChangeAspect="1"/>
+          </p:cNvPicPr>
+          <p:nvPr>
+            <p:ph idx="1"/>
+          </p:nvPr>
+        </p:nvPicPr>
+        <p:blipFill>
+          <a:blip r:embed="rId2"/>
+          <a:stretch>
+            <a:fillRect/>
+          </a:stretch>
+        </p:blipFill>
+        <p:spPr>
+          <a:xfrm>
+            <a:off x="925939" y="1690687"/>
+            <a:ext cx="5170061" cy="4405313"/>
+          </a:xfrm>
+          <a:prstGeom prst="rect">
+            <a:avLst/>
+          </a:prstGeom>
+        </p:spPr>
+      </p:pic>
+      <p:pic>
+        <p:nvPicPr>
+          <p:cNvPr id="7" name="Picture 6">
+            <a:extLst>
+              <a:ext uri="{FF2B5EF4-FFF2-40B4-BE49-F238E27FC236}">
+                <a16:creationId xmlns:a16="http://schemas.microsoft.com/office/drawing/2014/main" id="{1860F457-C35A-A672-0C2A-AF8681850569}"/>
+              </a:ext>
+            </a:extLst>
+          </p:cNvPr>
+          <p:cNvPicPr>
+            <a:picLocks noChangeAspect="1"/>
+          </p:cNvPicPr>
+          <p:nvPr/>
+        </p:nvPicPr>
+        <p:blipFill>
+          <a:blip r:embed="rId3"/>
+          <a:stretch>
+            <a:fillRect/>
+          </a:stretch>
+        </p:blipFill>
+        <p:spPr>
+          <a:xfrm>
+            <a:off x="6416381" y="1700373"/>
+            <a:ext cx="662845" cy="1156181"/>
+          </a:xfrm>
+          <a:prstGeom prst="rect">
+            <a:avLst/>
+          </a:prstGeom>
+        </p:spPr>
+      </p:pic>
+      <p:pic>
+        <p:nvPicPr>
+          <p:cNvPr id="9" name="Picture 8">
+            <a:extLst>
+              <a:ext uri="{FF2B5EF4-FFF2-40B4-BE49-F238E27FC236}">
+                <a16:creationId xmlns:a16="http://schemas.microsoft.com/office/drawing/2014/main" id="{31577075-78C9-A0FC-10A6-4452A686150D}"/>
+              </a:ext>
+            </a:extLst>
+          </p:cNvPr>
+          <p:cNvPicPr>
+            <a:picLocks noChangeAspect="1"/>
+          </p:cNvPicPr>
+          <p:nvPr/>
+        </p:nvPicPr>
+        <p:blipFill>
+          <a:blip r:embed="rId4"/>
+          <a:stretch>
+            <a:fillRect/>
+          </a:stretch>
+        </p:blipFill>
+        <p:spPr>
+          <a:xfrm>
+            <a:off x="7382086" y="1690687"/>
+            <a:ext cx="739812" cy="1156181"/>
+          </a:xfrm>
+          <a:prstGeom prst="rect">
+            <a:avLst/>
+          </a:prstGeom>
+        </p:spPr>
+      </p:pic>
+      <p:pic>
+        <p:nvPicPr>
+          <p:cNvPr id="11" name="Picture 10">
+            <a:extLst>
+              <a:ext uri="{FF2B5EF4-FFF2-40B4-BE49-F238E27FC236}">
+                <a16:creationId xmlns:a16="http://schemas.microsoft.com/office/drawing/2014/main" id="{6620934E-2E5D-81E4-605E-E7766D2F56A6}"/>
+              </a:ext>
+            </a:extLst>
+          </p:cNvPr>
+          <p:cNvPicPr>
+            <a:picLocks noChangeAspect="1"/>
+          </p:cNvPicPr>
+          <p:nvPr/>
+        </p:nvPicPr>
+        <p:blipFill>
+          <a:blip r:embed="rId5"/>
+          <a:stretch>
+            <a:fillRect/>
+          </a:stretch>
+        </p:blipFill>
+        <p:spPr>
+          <a:xfrm>
+            <a:off x="6416381" y="3059184"/>
+            <a:ext cx="1574930" cy="3036816"/>
+          </a:xfrm>
+          <a:prstGeom prst="rect">
+            <a:avLst/>
+          </a:prstGeom>
+        </p:spPr>
+      </p:pic>
+      <p:pic>
+        <p:nvPicPr>
+          <p:cNvPr id="13" name="Picture 12">
+            <a:extLst>
+              <a:ext uri="{FF2B5EF4-FFF2-40B4-BE49-F238E27FC236}">
+                <a16:creationId xmlns:a16="http://schemas.microsoft.com/office/drawing/2014/main" id="{A6041964-42E2-FB6D-6EC3-9EECF4E195C4}"/>
+              </a:ext>
+            </a:extLst>
+          </p:cNvPr>
+          <p:cNvPicPr>
+            <a:picLocks noChangeAspect="1"/>
+          </p:cNvPicPr>
+          <p:nvPr/>
+        </p:nvPicPr>
+        <p:blipFill>
+          <a:blip r:embed="rId6"/>
+          <a:stretch>
+            <a:fillRect/>
+          </a:stretch>
+        </p:blipFill>
+        <p:spPr>
+          <a:xfrm>
+            <a:off x="8365312" y="3189169"/>
+            <a:ext cx="2198327" cy="1481154"/>
+          </a:xfrm>
+          <a:prstGeom prst="rect">
+            <a:avLst/>
+          </a:prstGeom>
+        </p:spPr>
+      </p:pic>
+      <p:pic>
+        <p:nvPicPr>
+          <p:cNvPr id="15" name="Picture 14">
+            <a:extLst>
+              <a:ext uri="{FF2B5EF4-FFF2-40B4-BE49-F238E27FC236}">
+                <a16:creationId xmlns:a16="http://schemas.microsoft.com/office/drawing/2014/main" id="{AA9B5933-357D-CC2A-684B-54C7572E2CA7}"/>
+              </a:ext>
+            </a:extLst>
+          </p:cNvPr>
+          <p:cNvPicPr>
+            <a:picLocks noChangeAspect="1"/>
+          </p:cNvPicPr>
+          <p:nvPr/>
+        </p:nvPicPr>
+        <p:blipFill>
+          <a:blip r:embed="rId7"/>
+          <a:stretch>
+            <a:fillRect/>
+          </a:stretch>
+        </p:blipFill>
+        <p:spPr>
+          <a:xfrm>
+            <a:off x="8365312" y="1700373"/>
+            <a:ext cx="2198327" cy="1378182"/>
+          </a:xfrm>
+          <a:prstGeom prst="rect">
+            <a:avLst/>
+          </a:prstGeom>
+        </p:spPr>
+      </p:pic>
+      <p:pic>
+        <p:nvPicPr>
+          <p:cNvPr id="17" name="Picture 16">
+            <a:extLst>
+              <a:ext uri="{FF2B5EF4-FFF2-40B4-BE49-F238E27FC236}">
+                <a16:creationId xmlns:a16="http://schemas.microsoft.com/office/drawing/2014/main" id="{A1F4DA1A-50D1-C7FD-3FD4-38DFD8C39817}"/>
+              </a:ext>
+            </a:extLst>
+          </p:cNvPr>
+          <p:cNvPicPr>
+            <a:picLocks noChangeAspect="1"/>
+          </p:cNvPicPr>
+          <p:nvPr/>
+        </p:nvPicPr>
+        <p:blipFill>
+          <a:blip r:embed="rId8"/>
+          <a:srcRect l="12602" r="15224"/>
+          <a:stretch>
+            <a:fillRect/>
+          </a:stretch>
+        </p:blipFill>
+        <p:spPr>
+          <a:xfrm rot="16200000">
+            <a:off x="8515604" y="4626127"/>
+            <a:ext cx="1319581" cy="1620165"/>
+          </a:xfrm>
+          <a:prstGeom prst="rect">
+            <a:avLst/>
+          </a:prstGeom>
+        </p:spPr>
+      </p:pic>
+    </p:spTree>
+    <p:extLst>
+      <p:ext uri="{BB962C8B-B14F-4D97-AF65-F5344CB8AC3E}">
+        <p14:creationId xmlns:p14="http://schemas.microsoft.com/office/powerpoint/2010/main" val="3340608992"/>
+      </p:ext>
+    </p:extLst>
+  </p:cSld>
+  <p:clrMapOvr>
+    <a:masterClrMapping/>
+  </p:clrMapOvr>
+</p:sld>
+</file>
+
+<file path=ppt/slides/slide5.xml><?xml version="1.0" encoding="utf-8"?>
+<p:sld xmlns:a="http://schemas.openxmlformats.org/drawingml/2006/main" xmlns:r="http://schemas.openxmlformats.org/officeDocument/2006/relationships" xmlns:p="http://schemas.openxmlformats.org/presentationml/2006/main">
+  <p:cSld>
+    <p:bg>
+      <p:bgPr>
+        <a:solidFill>
+          <a:schemeClr val="accent1"/>
+        </a:solidFill>
+        <a:effectLst/>
+      </p:bgPr>
+    </p:bg>
+    <p:spTree>
+      <p:nvGrpSpPr>
+        <p:cNvPr id="1" name=""/>
+        <p:cNvGrpSpPr/>
+        <p:nvPr/>
+      </p:nvGrpSpPr>
+      <p:grpSpPr>
+        <a:xfrm>
+          <a:off x="0" y="0"/>
+          <a:ext cx="0" cy="0"/>
+          <a:chOff x="0" y="0"/>
+          <a:chExt cx="0" cy="0"/>
+        </a:xfrm>
+      </p:grpSpPr>
+      <p:sp useBgFill="1">
+        <p:nvSpPr>
+          <p:cNvPr id="30" name="Rectangle 29">
+            <a:extLst>
+              <a:ext uri="{FF2B5EF4-FFF2-40B4-BE49-F238E27FC236}">
+                <a16:creationId xmlns:a16="http://schemas.microsoft.com/office/drawing/2014/main" id="{66E48AFA-8884-4F68-A44F-D2C1E8609C5A}"/>
+              </a:ext>
+              <a:ext uri="{C183D7F6-B498-43B3-948B-1728B52AA6E4}">
+                <adec:decorative xmlns:adec="http://schemas.microsoft.com/office/drawing/2017/decorative" val="1"/>
+              </a:ext>
+            </a:extLst>
+          </p:cNvPr>
+          <p:cNvSpPr>
+            <a:spLocks noGrp="1" noRot="1" noChangeAspect="1" noMove="1" noResize="1" noEditPoints="1" noAdjustHandles="1" noChangeArrowheads="1" noChangeShapeType="1" noTextEdit="1"/>
+          </p:cNvSpPr>
+          <p:nvPr>
+            <p:extLst>
+              <p:ext uri="{386F3935-93C4-4BCD-93E2-E3B085C9AB24}">
+                <p16:designElem xmlns:p16="http://schemas.microsoft.com/office/powerpoint/2015/main" val="1"/>
+              </p:ext>
+            </p:extLst>
+          </p:nvPr>
+        </p:nvSpPr>
+        <p:spPr bwMode="white">
+          <a:xfrm>
+            <a:off x="0" y="0"/>
+            <a:ext cx="12192000" cy="6858000"/>
+          </a:xfrm>
+          <a:prstGeom prst="rect">
+            <a:avLst/>
+          </a:prstGeom>
+          <a:ln>
+            <a:noFill/>
+          </a:ln>
+        </p:spPr>
+        <p:style>
+          <a:lnRef idx="2">
+            <a:schemeClr val="accent1">
+              <a:shade val="50000"/>
+            </a:schemeClr>
+          </a:lnRef>
+          <a:fillRef idx="1">
+            <a:schemeClr val="accent1"/>
+          </a:fillRef>
+          <a:effectRef idx="0">
+            <a:schemeClr val="accent1"/>
+          </a:effectRef>
+          <a:fontRef idx="minor">
+            <a:schemeClr val="lt1"/>
+          </a:fontRef>
+        </p:style>
+        <p:txBody>
+          <a:bodyPr rtlCol="0" anchor="ctr"/>
+          <a:lstStyle>
+            <a:defPPr>
+              <a:defRPr lang="en-US"/>
+            </a:defPPr>
+            <a:lvl1pPr marL="0" algn="l" defTabSz="914400" rtl="0" eaLnBrk="1" latinLnBrk="0" hangingPunct="1">
+              <a:defRPr sz="1800" kern="1200">
+                <a:solidFill>
+                  <a:schemeClr val="lt1"/>
+                </a:solidFill>
+                <a:latin typeface="+mn-lt"/>
+                <a:ea typeface="+mn-ea"/>
+                <a:cs typeface="+mn-cs"/>
+              </a:defRPr>
+            </a:lvl1pPr>
+            <a:lvl2pPr marL="457200" algn="l" defTabSz="914400" rtl="0" eaLnBrk="1" latinLnBrk="0" hangingPunct="1">
+              <a:defRPr sz="1800" kern="1200">
+                <a:solidFill>
+                  <a:schemeClr val="lt1"/>
+                </a:solidFill>
+                <a:latin typeface="+mn-lt"/>
+                <a:ea typeface="+mn-ea"/>
+                <a:cs typeface="+mn-cs"/>
+              </a:defRPr>
+            </a:lvl2pPr>
+            <a:lvl3pPr marL="914400" algn="l" defTabSz="914400" rtl="0" eaLnBrk="1" latinLnBrk="0" hangingPunct="1">
+              <a:defRPr sz="1800" kern="1200">
+                <a:solidFill>
+                  <a:schemeClr val="lt1"/>
+                </a:solidFill>
+                <a:latin typeface="+mn-lt"/>
+                <a:ea typeface="+mn-ea"/>
+                <a:cs typeface="+mn-cs"/>
+              </a:defRPr>
+            </a:lvl3pPr>
+            <a:lvl4pPr marL="1371600" algn="l" defTabSz="914400" rtl="0" eaLnBrk="1" latinLnBrk="0" hangingPunct="1">
+              <a:defRPr sz="1800" kern="1200">
+                <a:solidFill>
+                  <a:schemeClr val="lt1"/>
+                </a:solidFill>
+                <a:latin typeface="+mn-lt"/>
+                <a:ea typeface="+mn-ea"/>
+                <a:cs typeface="+mn-cs"/>
+              </a:defRPr>
+            </a:lvl4pPr>
+            <a:lvl5pPr marL="1828800" algn="l" defTabSz="914400" rtl="0" eaLnBrk="1" latinLnBrk="0" hangingPunct="1">
+              <a:defRPr sz="1800" kern="1200">
+                <a:solidFill>
+                  <a:schemeClr val="lt1"/>
+                </a:solidFill>
+                <a:latin typeface="+mn-lt"/>
+                <a:ea typeface="+mn-ea"/>
+                <a:cs typeface="+mn-cs"/>
+              </a:defRPr>
+            </a:lvl5pPr>
+            <a:lvl6pPr marL="2286000" algn="l" defTabSz="914400" rtl="0" eaLnBrk="1" latinLnBrk="0" hangingPunct="1">
+              <a:defRPr sz="1800" kern="1200">
+                <a:solidFill>
+                  <a:schemeClr val="lt1"/>
+                </a:solidFill>
+                <a:latin typeface="+mn-lt"/>
+                <a:ea typeface="+mn-ea"/>
+                <a:cs typeface="+mn-cs"/>
+              </a:defRPr>
+            </a:lvl6pPr>
+            <a:lvl7pPr marL="2743200" algn="l" defTabSz="914400" rtl="0" eaLnBrk="1" latinLnBrk="0" hangingPunct="1">
+              <a:defRPr sz="1800" kern="1200">
+                <a:solidFill>
+                  <a:schemeClr val="lt1"/>
+                </a:solidFill>
+                <a:latin typeface="+mn-lt"/>
+                <a:ea typeface="+mn-ea"/>
+                <a:cs typeface="+mn-cs"/>
+              </a:defRPr>
+            </a:lvl7pPr>
+            <a:lvl8pPr marL="3200400" algn="l" defTabSz="914400" rtl="0" eaLnBrk="1" latinLnBrk="0" hangingPunct="1">
+              <a:defRPr sz="1800" kern="1200">
+                <a:solidFill>
+                  <a:schemeClr val="lt1"/>
+                </a:solidFill>
+                <a:latin typeface="+mn-lt"/>
+                <a:ea typeface="+mn-ea"/>
+                <a:cs typeface="+mn-cs"/>
+              </a:defRPr>
+            </a:lvl8pPr>
+            <a:lvl9pPr marL="3657600" algn="l" defTabSz="914400" rtl="0" eaLnBrk="1" latinLnBrk="0" hangingPunct="1">
+              <a:defRPr sz="1800" kern="1200">
+                <a:solidFill>
+                  <a:schemeClr val="lt1"/>
+                </a:solidFill>
+                <a:latin typeface="+mn-lt"/>
+                <a:ea typeface="+mn-ea"/>
+                <a:cs typeface="+mn-cs"/>
+              </a:defRPr>
+            </a:lvl9pPr>
+          </a:lstStyle>
+          <a:p>
+            <a:pPr algn="ctr"/>
+            <a:endParaRPr lang="en-US"/>
+          </a:p>
+        </p:txBody>
+      </p:sp>
+      <p:sp>
+        <p:nvSpPr>
+          <p:cNvPr id="4" name="Rectangle 3">
+            <a:extLst>
+              <a:ext uri="{FF2B5EF4-FFF2-40B4-BE49-F238E27FC236}">
+                <a16:creationId xmlns:a16="http://schemas.microsoft.com/office/drawing/2014/main" id="{B7ECEE6E-3904-3BE7-0548-3A958CDD649B}"/>
+              </a:ext>
+            </a:extLst>
+          </p:cNvPr>
+          <p:cNvSpPr/>
+          <p:nvPr/>
+        </p:nvSpPr>
+        <p:spPr>
+          <a:xfrm>
+            <a:off x="659914" y="3888828"/>
+            <a:ext cx="10872172" cy="2216512"/>
+          </a:xfrm>
+          <a:prstGeom prst="rect">
+            <a:avLst/>
+          </a:prstGeom>
+        </p:spPr>
+        <p:style>
+          <a:lnRef idx="2">
+            <a:schemeClr val="dk1">
+              <a:shade val="15000"/>
+            </a:schemeClr>
+          </a:lnRef>
+          <a:fillRef idx="1">
+            <a:schemeClr val="dk1"/>
+          </a:fillRef>
+          <a:effectRef idx="0">
+            <a:schemeClr val="dk1"/>
+          </a:effectRef>
+          <a:fontRef idx="minor">
+            <a:schemeClr val="lt1"/>
+          </a:fontRef>
+        </p:style>
+        <p:txBody>
+          <a:bodyPr rtlCol="0" anchor="ctr"/>
+          <a:lstStyle/>
+          <a:p>
+            <a:pPr algn="ctr"/>
+            <a:endParaRPr lang="en-US"/>
+          </a:p>
+        </p:txBody>
+      </p:sp>
+      <p:sp>
+        <p:nvSpPr>
+          <p:cNvPr id="2" name="Title 1">
+            <a:extLst>
+              <a:ext uri="{FF2B5EF4-FFF2-40B4-BE49-F238E27FC236}">
+                <a16:creationId xmlns:a16="http://schemas.microsoft.com/office/drawing/2014/main" id="{524EA346-4BD7-2077-AD36-25A4724A96E2}"/>
+              </a:ext>
+            </a:extLst>
+          </p:cNvPr>
+          <p:cNvSpPr>
+            <a:spLocks noGrp="1"/>
+          </p:cNvSpPr>
+          <p:nvPr>
+            <p:ph type="title"/>
+          </p:nvPr>
+        </p:nvSpPr>
+        <p:spPr>
+          <a:xfrm>
+            <a:off x="838201" y="3998018"/>
+            <a:ext cx="3981854" cy="2216513"/>
+          </a:xfrm>
+        </p:spPr>
+        <p:txBody>
+          <a:bodyPr>
+            <a:normAutofit/>
+          </a:bodyPr>
+          <a:lstStyle/>
+          <a:p>
+            <a:r>
+              <a:rPr lang="en-US"/>
+              <a:t>Transformation Control</a:t>
+            </a:r>
+          </a:p>
+        </p:txBody>
+      </p:sp>
+      <p:sp>
+        <p:nvSpPr>
+          <p:cNvPr id="32" name="Arc 31">
+            <a:extLst>
+              <a:ext uri="{FF2B5EF4-FFF2-40B4-BE49-F238E27FC236}">
+                <a16:creationId xmlns:a16="http://schemas.microsoft.com/office/drawing/2014/main" id="{969D19A6-08CB-498C-93EC-3FFB021FC68A}"/>
+              </a:ext>
+              <a:ext uri="{C183D7F6-B498-43B3-948B-1728B52AA6E4}">
+                <adec:decorative xmlns:adec="http://schemas.microsoft.com/office/drawing/2017/decorative" val="1"/>
+              </a:ext>
+            </a:extLst>
+          </p:cNvPr>
+          <p:cNvSpPr>
+            <a:spLocks noGrp="1" noRot="1" noChangeAspect="1" noMove="1" noResize="1" noEditPoints="1" noAdjustHandles="1" noChangeArrowheads="1" noChangeShapeType="1" noTextEdit="1"/>
+          </p:cNvSpPr>
+          <p:nvPr>
+            <p:extLst>
+              <p:ext uri="{386F3935-93C4-4BCD-93E2-E3B085C9AB24}">
+                <p16:designElem xmlns:p16="http://schemas.microsoft.com/office/powerpoint/2015/main" val="1"/>
+              </p:ext>
+            </p:extLst>
+          </p:nvPr>
+        </p:nvSpPr>
+        <p:spPr>
+          <a:xfrm rot="6269068">
+            <a:off x="8717845" y="3339275"/>
+            <a:ext cx="2987899" cy="2987899"/>
+          </a:xfrm>
+          <a:prstGeom prst="arc">
+            <a:avLst>
+              <a:gd name="adj1" fmla="val 14441841"/>
+              <a:gd name="adj2" fmla="val 0"/>
+            </a:avLst>
+          </a:prstGeom>
+          <a:ln w="127000" cap="rnd">
+            <a:solidFill>
+              <a:schemeClr val="accent4"/>
+            </a:solidFill>
+            <a:prstDash val="dash"/>
+            <a:miter lim="800000"/>
+          </a:ln>
+        </p:spPr>
+        <p:style>
+          <a:lnRef idx="1">
+            <a:schemeClr val="accent1"/>
+          </a:lnRef>
+          <a:fillRef idx="0">
+            <a:schemeClr val="accent1"/>
+          </a:fillRef>
+          <a:effectRef idx="0">
+            <a:schemeClr val="accent1"/>
+          </a:effectRef>
+          <a:fontRef idx="minor">
+            <a:schemeClr val="tx1"/>
+          </a:fontRef>
+        </p:style>
+        <p:txBody>
+          <a:bodyPr rtlCol="0" anchor="ctr"/>
+          <a:lstStyle/>
+          <a:p>
+            <a:pPr marL="0" marR="0" lvl="0" indent="0" algn="ctr" defTabSz="914400" rtl="0" eaLnBrk="1" fontAlgn="auto" latinLnBrk="0" hangingPunct="1">
+              <a:lnSpc>
+                <a:spcPct val="100000"/>
+              </a:lnSpc>
+              <a:spcBef>
+                <a:spcPts val="0"/>
+              </a:spcBef>
+              <a:spcAft>
+                <a:spcPts val="0"/>
+              </a:spcAft>
+              <a:buClrTx/>
+              <a:buSzTx/>
+              <a:buFontTx/>
+              <a:buNone/>
+              <a:tabLst/>
+              <a:defRPr/>
+            </a:pPr>
+            <a:endParaRPr kumimoji="0" lang="en-US" sz="1800" b="0" i="0" u="none" strike="noStrike" kern="1200" cap="none" spc="0" normalizeH="0" baseline="0" noProof="0">
+              <a:ln>
+                <a:noFill/>
+              </a:ln>
+              <a:solidFill>
+                <a:srgbClr val="000000"/>
+              </a:solidFill>
+              <a:effectLst/>
+              <a:uLnTx/>
+              <a:uFillTx/>
+              <a:latin typeface="Calibri" panose="020F0502020204030204"/>
+              <a:ea typeface="+mn-ea"/>
+              <a:cs typeface="+mn-cs"/>
+            </a:endParaRPr>
+          </a:p>
+        </p:txBody>
+      </p:sp>
+      <p:pic>
+        <p:nvPicPr>
+          <p:cNvPr id="11" name="Picture 10">
+            <a:extLst>
+              <a:ext uri="{FF2B5EF4-FFF2-40B4-BE49-F238E27FC236}">
+                <a16:creationId xmlns:a16="http://schemas.microsoft.com/office/drawing/2014/main" id="{9C06539E-E0BD-AA45-F1B2-24321EE6EC3D}"/>
+              </a:ext>
+            </a:extLst>
+          </p:cNvPr>
+          <p:cNvPicPr>
+            <a:picLocks noChangeAspect="1"/>
+          </p:cNvPicPr>
+          <p:nvPr/>
+        </p:nvPicPr>
+        <p:blipFill>
+          <a:blip r:embed="rId2"/>
+          <a:stretch>
+            <a:fillRect/>
+          </a:stretch>
+        </p:blipFill>
+        <p:spPr>
+          <a:xfrm>
+            <a:off x="659914" y="715496"/>
+            <a:ext cx="10872172" cy="2935487"/>
+          </a:xfrm>
+          <a:custGeom>
+            <a:avLst/>
+            <a:gdLst/>
+            <a:ahLst/>
+            <a:cxnLst/>
+            <a:rect l="l" t="t" r="r" b="b"/>
+            <a:pathLst>
+              <a:path w="10580201" h="2957472">
+                <a:moveTo>
+                  <a:pt x="88961" y="0"/>
+                </a:moveTo>
+                <a:lnTo>
+                  <a:pt x="10491240" y="0"/>
+                </a:lnTo>
+                <a:cubicBezTo>
+                  <a:pt x="10540372" y="0"/>
+                  <a:pt x="10580201" y="39829"/>
+                  <a:pt x="10580201" y="88961"/>
+                </a:cubicBezTo>
+                <a:lnTo>
+                  <a:pt x="10580201" y="2868511"/>
+                </a:lnTo>
+                <a:cubicBezTo>
+                  <a:pt x="10580201" y="2917643"/>
+                  <a:pt x="10540372" y="2957472"/>
+                  <a:pt x="10491240" y="2957472"/>
+                </a:cubicBezTo>
+                <a:lnTo>
+                  <a:pt x="88961" y="2957472"/>
+                </a:lnTo>
+                <a:cubicBezTo>
+                  <a:pt x="39829" y="2957472"/>
+                  <a:pt x="0" y="2917643"/>
+                  <a:pt x="0" y="2868511"/>
+                </a:cubicBezTo>
+                <a:lnTo>
+                  <a:pt x="0" y="88961"/>
+                </a:lnTo>
+                <a:cubicBezTo>
+                  <a:pt x="0" y="39829"/>
+                  <a:pt x="39829" y="0"/>
+                  <a:pt x="88961" y="0"/>
+                </a:cubicBezTo>
+                <a:close/>
+              </a:path>
+            </a:pathLst>
+          </a:custGeom>
+        </p:spPr>
+      </p:pic>
+      <p:sp>
+        <p:nvSpPr>
+          <p:cNvPr id="3" name="Content Placeholder 2">
+            <a:extLst>
+              <a:ext uri="{FF2B5EF4-FFF2-40B4-BE49-F238E27FC236}">
+                <a16:creationId xmlns:a16="http://schemas.microsoft.com/office/drawing/2014/main" id="{0BEDA8CB-745B-D923-92EF-65FE8AF01F0C}"/>
+              </a:ext>
+            </a:extLst>
+          </p:cNvPr>
+          <p:cNvSpPr>
+            <a:spLocks noGrp="1"/>
+          </p:cNvSpPr>
+          <p:nvPr>
+            <p:ph idx="1"/>
+          </p:nvPr>
+        </p:nvSpPr>
+        <p:spPr>
+          <a:xfrm>
+            <a:off x="4970835" y="3998019"/>
+            <a:ext cx="6382966" cy="2216512"/>
+          </a:xfrm>
+        </p:spPr>
+        <p:txBody>
+          <a:bodyPr>
+            <a:normAutofit/>
+          </a:bodyPr>
+          <a:lstStyle/>
+          <a:p>
+            <a:r>
+              <a:rPr lang="en-US" sz="1800"/>
+              <a:t>Modeled a control block and bus for easy adjustability</a:t>
+            </a:r>
+          </a:p>
+          <a:p>
+            <a:r>
+              <a:rPr lang="en-US" sz="1800"/>
+              <a:t>Created angle preset table so we can change the drone’s shape with a single preset</a:t>
+            </a:r>
+          </a:p>
+          <a:p>
+            <a:r>
+              <a:rPr lang="en-US" sz="1800"/>
+              <a:t>Included start time to simulate midflight transformation</a:t>
+            </a:r>
+          </a:p>
+          <a:p>
+            <a:r>
+              <a:rPr lang="en-US" sz="1800"/>
+              <a:t>Included transform duration to simulate servo movement delay</a:t>
+            </a:r>
+            <a:endParaRPr lang="en-US" sz="1800" dirty="0"/>
+          </a:p>
+        </p:txBody>
+      </p:sp>
+    </p:spTree>
+    <p:extLst>
+      <p:ext uri="{BB962C8B-B14F-4D97-AF65-F5344CB8AC3E}">
+        <p14:creationId xmlns:p14="http://schemas.microsoft.com/office/powerpoint/2010/main" val="3494885687"/>
+      </p:ext>
+    </p:extLst>
+  </p:cSld>
+  <p:clrMapOvr>
+    <a:masterClrMapping/>
+  </p:clrMapOvr>
+</p:sld>
+</file>
+
+<file path=ppt/slides/slide6.xml><?xml version="1.0" encoding="utf-8"?>
+<p:sld xmlns:a="http://schemas.openxmlformats.org/drawingml/2006/main" xmlns:r="http://schemas.openxmlformats.org/officeDocument/2006/relationships" xmlns:p="http://schemas.openxmlformats.org/presentationml/2006/main">
+  <p:cSld>
+    <p:bg>
+      <p:bgPr>
+        <a:solidFill>
+          <a:schemeClr val="accent1"/>
+        </a:solidFill>
+        <a:effectLst/>
+      </p:bgPr>
+    </p:bg>
+    <p:spTree>
+      <p:nvGrpSpPr>
+        <p:cNvPr id="1" name=""/>
+        <p:cNvGrpSpPr/>
+        <p:nvPr/>
+      </p:nvGrpSpPr>
+      <p:grpSpPr>
+        <a:xfrm>
+          <a:off x="0" y="0"/>
+          <a:ext cx="0" cy="0"/>
+          <a:chOff x="0" y="0"/>
+          <a:chExt cx="0" cy="0"/>
+        </a:xfrm>
+      </p:grpSpPr>
+      <p:sp useBgFill="1">
+        <p:nvSpPr>
+          <p:cNvPr id="17" name="Rectangle 16">
+            <a:extLst>
+              <a:ext uri="{FF2B5EF4-FFF2-40B4-BE49-F238E27FC236}">
+                <a16:creationId xmlns:a16="http://schemas.microsoft.com/office/drawing/2014/main" id="{DBC6133C-0615-4CE4-9132-37E609A9BDFA}"/>
+              </a:ext>
+              <a:ext uri="{C183D7F6-B498-43B3-948B-1728B52AA6E4}">
+                <adec:decorative xmlns:adec="http://schemas.microsoft.com/office/drawing/2017/decorative" val="1"/>
+              </a:ext>
+            </a:extLst>
+          </p:cNvPr>
+          <p:cNvSpPr>
+            <a:spLocks noGrp="1" noRot="1" noChangeAspect="1" noMove="1" noResize="1" noEditPoints="1" noAdjustHandles="1" noChangeArrowheads="1" noChangeShapeType="1" noTextEdit="1"/>
+          </p:cNvSpPr>
+          <p:nvPr>
+            <p:extLst>
+              <p:ext uri="{386F3935-93C4-4BCD-93E2-E3B085C9AB24}">
+                <p16:designElem xmlns:p16="http://schemas.microsoft.com/office/powerpoint/2015/main" val="1"/>
+              </p:ext>
+            </p:extLst>
+          </p:nvPr>
+        </p:nvSpPr>
+        <p:spPr>
+          <a:xfrm>
+            <a:off x="0" y="0"/>
+            <a:ext cx="12191999" cy="6857365"/>
+          </a:xfrm>
+          <a:prstGeom prst="rect">
+            <a:avLst/>
+          </a:prstGeom>
+          <a:ln>
+            <a:noFill/>
+          </a:ln>
+        </p:spPr>
+        <p:style>
+          <a:lnRef idx="2">
+            <a:schemeClr val="accent1">
+              <a:shade val="50000"/>
+            </a:schemeClr>
+          </a:lnRef>
+          <a:fillRef idx="1">
+            <a:schemeClr val="accent1"/>
+          </a:fillRef>
+          <a:effectRef idx="0">
+            <a:schemeClr val="accent1"/>
+          </a:effectRef>
+          <a:fontRef idx="minor">
+            <a:schemeClr val="lt1"/>
+          </a:fontRef>
+        </p:style>
+        <p:txBody>
+          <a:bodyPr rtlCol="0" anchor="ctr"/>
+          <a:lstStyle/>
+          <a:p>
+            <a:pPr algn="ctr"/>
+            <a:endParaRPr lang="en-US"/>
+          </a:p>
+        </p:txBody>
+      </p:sp>
+      <p:sp>
+        <p:nvSpPr>
+          <p:cNvPr id="19" name="Rectangle 18">
+            <a:extLst>
+              <a:ext uri="{FF2B5EF4-FFF2-40B4-BE49-F238E27FC236}">
+                <a16:creationId xmlns:a16="http://schemas.microsoft.com/office/drawing/2014/main" id="{169CC832-2974-4E8D-90ED-3E2941BA7336}"/>
+              </a:ext>
+              <a:ext uri="{C183D7F6-B498-43B3-948B-1728B52AA6E4}">
+                <adec:decorative xmlns:adec="http://schemas.microsoft.com/office/drawing/2017/decorative" val="1"/>
+              </a:ext>
+            </a:extLst>
+          </p:cNvPr>
+          <p:cNvSpPr>
+            <a:spLocks noGrp="1" noRot="1" noChangeAspect="1" noMove="1" noResize="1" noEditPoints="1" noAdjustHandles="1" noChangeArrowheads="1" noChangeShapeType="1" noTextEdit="1"/>
+          </p:cNvSpPr>
+          <p:nvPr>
+            <p:extLst>
+              <p:ext uri="{386F3935-93C4-4BCD-93E2-E3B085C9AB24}">
+                <p16:designElem xmlns:p16="http://schemas.microsoft.com/office/powerpoint/2015/main" val="1"/>
+              </p:ext>
+            </p:extLst>
+          </p:nvPr>
+        </p:nvSpPr>
+        <p:spPr>
+          <a:xfrm flipH="1">
+            <a:off x="616533" y="1944913"/>
+            <a:ext cx="4023360" cy="27432"/>
+          </a:xfrm>
+          <a:prstGeom prst="rect">
+            <a:avLst/>
+          </a:prstGeom>
+          <a:solidFill>
+            <a:schemeClr val="accent4"/>
+          </a:solidFill>
+          <a:ln>
+            <a:noFill/>
+          </a:ln>
+        </p:spPr>
+        <p:style>
+          <a:lnRef idx="2">
+            <a:schemeClr val="accent1">
+              <a:shade val="50000"/>
+            </a:schemeClr>
+          </a:lnRef>
+          <a:fillRef idx="1">
+            <a:schemeClr val="accent1"/>
+          </a:fillRef>
+          <a:effectRef idx="0">
+            <a:schemeClr val="accent1"/>
+          </a:effectRef>
+          <a:fontRef idx="minor">
+            <a:schemeClr val="lt1"/>
+          </a:fontRef>
+        </p:style>
+        <p:txBody>
+          <a:bodyPr rtlCol="0" anchor="ctr"/>
+          <a:lstStyle/>
+          <a:p>
+            <a:pPr algn="ctr"/>
+            <a:endParaRPr lang="en-US"/>
+          </a:p>
+        </p:txBody>
+      </p:sp>
+      <p:sp>
+        <p:nvSpPr>
+          <p:cNvPr id="21" name="Rectangle 20">
+            <a:extLst>
+              <a:ext uri="{FF2B5EF4-FFF2-40B4-BE49-F238E27FC236}">
+                <a16:creationId xmlns:a16="http://schemas.microsoft.com/office/drawing/2014/main" id="{55222F96-971A-4F90-B841-6BAB416C7AC1}"/>
+              </a:ext>
+              <a:ext uri="{C183D7F6-B498-43B3-948B-1728B52AA6E4}">
+                <adec:decorative xmlns:adec="http://schemas.microsoft.com/office/drawing/2017/decorative" val="1"/>
+              </a:ext>
+            </a:extLst>
+          </p:cNvPr>
+          <p:cNvSpPr>
+            <a:spLocks noGrp="1" noRot="1" noChangeAspect="1" noMove="1" noResize="1" noEditPoints="1" noAdjustHandles="1" noChangeArrowheads="1" noChangeShapeType="1" noTextEdit="1"/>
+          </p:cNvSpPr>
+          <p:nvPr>
+            <p:extLst>
+              <p:ext uri="{386F3935-93C4-4BCD-93E2-E3B085C9AB24}">
+                <p16:designElem xmlns:p16="http://schemas.microsoft.com/office/powerpoint/2015/main" val="1"/>
+              </p:ext>
+            </p:extLst>
+          </p:nvPr>
+        </p:nvSpPr>
+        <p:spPr>
+          <a:xfrm rot="5400000">
+            <a:off x="-225843" y="6053360"/>
+            <a:ext cx="740664" cy="154124"/>
+          </a:xfrm>
+          <a:prstGeom prst="rect">
+            <a:avLst/>
+          </a:prstGeom>
+          <a:solidFill>
+            <a:schemeClr val="accent4"/>
+          </a:solidFill>
+          <a:ln>
+            <a:noFill/>
+          </a:ln>
+        </p:spPr>
+        <p:style>
+          <a:lnRef idx="2">
+            <a:schemeClr val="accent1">
+              <a:shade val="50000"/>
+            </a:schemeClr>
+          </a:lnRef>
+          <a:fillRef idx="1">
+            <a:schemeClr val="accent1"/>
+          </a:fillRef>
+          <a:effectRef idx="0">
+            <a:schemeClr val="accent1"/>
+          </a:effectRef>
+          <a:fontRef idx="minor">
+            <a:schemeClr val="lt1"/>
+          </a:fontRef>
+        </p:style>
+        <p:txBody>
+          <a:bodyPr rtlCol="0" anchor="ctr"/>
+          <a:lstStyle/>
+          <a:p>
+            <a:pPr algn="ctr"/>
+            <a:endParaRPr lang="en-US"/>
+          </a:p>
+        </p:txBody>
+      </p:sp>
+      <p:sp>
+        <p:nvSpPr>
+          <p:cNvPr id="23" name="Rectangle 22">
+            <a:extLst>
+              <a:ext uri="{FF2B5EF4-FFF2-40B4-BE49-F238E27FC236}">
+                <a16:creationId xmlns:a16="http://schemas.microsoft.com/office/drawing/2014/main" id="{08980754-6F4B-43C9-B9BE-127B6BED6586}"/>
+              </a:ext>
+              <a:ext uri="{C183D7F6-B498-43B3-948B-1728B52AA6E4}">
+                <adec:decorative xmlns:adec="http://schemas.microsoft.com/office/drawing/2017/decorative" val="1"/>
+              </a:ext>
+            </a:extLst>
+          </p:cNvPr>
+          <p:cNvSpPr>
+            <a:spLocks noGrp="1" noRot="1" noChangeAspect="1" noMove="1" noResize="1" noEditPoints="1" noAdjustHandles="1" noChangeArrowheads="1" noChangeShapeType="1" noTextEdit="1"/>
+          </p:cNvSpPr>
+          <p:nvPr>
+            <p:extLst>
+              <p:ext uri="{386F3935-93C4-4BCD-93E2-E3B085C9AB24}">
+                <p16:designElem xmlns:p16="http://schemas.microsoft.com/office/powerpoint/2015/main" val="1"/>
+              </p:ext>
+            </p:extLst>
+          </p:nvPr>
+        </p:nvSpPr>
+        <p:spPr>
+          <a:xfrm rot="5400000">
+            <a:off x="5904923" y="215201"/>
+            <a:ext cx="740664" cy="11833491"/>
+          </a:xfrm>
+          <a:prstGeom prst="rect">
+            <a:avLst/>
+          </a:prstGeom>
+          <a:solidFill>
+            <a:schemeClr val="accent4"/>
+          </a:solidFill>
+          <a:ln>
+            <a:noFill/>
+          </a:ln>
+        </p:spPr>
+        <p:style>
+          <a:lnRef idx="2">
+            <a:schemeClr val="accent1">
+              <a:shade val="50000"/>
+            </a:schemeClr>
+          </a:lnRef>
+          <a:fillRef idx="1">
+            <a:schemeClr val="accent1"/>
+          </a:fillRef>
+          <a:effectRef idx="0">
+            <a:schemeClr val="accent1"/>
+          </a:effectRef>
+          <a:fontRef idx="minor">
+            <a:schemeClr val="lt1"/>
+          </a:fontRef>
+        </p:style>
+        <p:txBody>
+          <a:bodyPr rtlCol="0" anchor="ctr"/>
+          <a:lstStyle/>
+          <a:p>
+            <a:pPr algn="ctr"/>
+            <a:endParaRPr lang="en-US"/>
+          </a:p>
+        </p:txBody>
+      </p:sp>
+      <p:sp>
+        <p:nvSpPr>
+          <p:cNvPr id="25" name="Rectangle 24">
+            <a:extLst>
+              <a:ext uri="{FF2B5EF4-FFF2-40B4-BE49-F238E27FC236}">
+                <a16:creationId xmlns:a16="http://schemas.microsoft.com/office/drawing/2014/main" id="{2C1BBA94-3F40-40AA-8BB9-E69E25E537C1}"/>
+              </a:ext>
+              <a:ext uri="{C183D7F6-B498-43B3-948B-1728B52AA6E4}">
+                <adec:decorative xmlns:adec="http://schemas.microsoft.com/office/drawing/2017/decorative" val="1"/>
+              </a:ext>
+            </a:extLst>
+          </p:cNvPr>
+          <p:cNvSpPr>
+            <a:spLocks noGrp="1" noRot="1" noChangeAspect="1" noMove="1" noResize="1" noEditPoints="1" noAdjustHandles="1" noChangeArrowheads="1" noChangeShapeType="1" noTextEdit="1"/>
+          </p:cNvSpPr>
+          <p:nvPr>
+            <p:extLst>
+              <p:ext uri="{386F3935-93C4-4BCD-93E2-E3B085C9AB24}">
+                <p16:designElem xmlns:p16="http://schemas.microsoft.com/office/powerpoint/2015/main" val="1"/>
+              </p:ext>
+            </p:extLst>
+          </p:nvPr>
+        </p:nvSpPr>
+        <p:spPr>
+          <a:xfrm>
+            <a:off x="5696793" y="354959"/>
+            <a:ext cx="6184973" cy="5915212"/>
+          </a:xfrm>
+          <a:prstGeom prst="rect">
+            <a:avLst/>
+          </a:prstGeom>
+          <a:solidFill>
+            <a:schemeClr val="bg1"/>
+          </a:solidFill>
+          <a:ln>
+            <a:noFill/>
+          </a:ln>
+          <a:effectLst>
+            <a:outerShdw blurRad="139700" dist="127000" dir="5400000" algn="t" rotWithShape="0">
+              <a:prstClr val="black">
+                <a:alpha val="15000"/>
+              </a:prstClr>
+            </a:outerShdw>
+          </a:effectLst>
+        </p:spPr>
+        <p:style>
+          <a:lnRef idx="2">
+            <a:schemeClr val="accent1">
+              <a:shade val="50000"/>
+            </a:schemeClr>
+          </a:lnRef>
+          <a:fillRef idx="1">
+            <a:schemeClr val="accent1"/>
+          </a:fillRef>
+          <a:effectRef idx="0">
+            <a:schemeClr val="accent1"/>
+          </a:effectRef>
+          <a:fontRef idx="minor">
+            <a:schemeClr val="lt1"/>
+          </a:fontRef>
+        </p:style>
+        <p:txBody>
+          <a:bodyPr rtlCol="0" anchor="ctr"/>
+          <a:lstStyle/>
+          <a:p>
+            <a:pPr algn="ctr"/>
+            <a:endParaRPr lang="en-US"/>
+          </a:p>
+        </p:txBody>
+      </p:sp>
+      <p:sp>
+        <p:nvSpPr>
+          <p:cNvPr id="3" name="Rectangle 2">
+            <a:extLst>
+              <a:ext uri="{FF2B5EF4-FFF2-40B4-BE49-F238E27FC236}">
+                <a16:creationId xmlns:a16="http://schemas.microsoft.com/office/drawing/2014/main" id="{1458899A-06C4-8E90-3527-3EFA988F0BD1}"/>
+              </a:ext>
+            </a:extLst>
+          </p:cNvPr>
+          <p:cNvSpPr/>
+          <p:nvPr/>
+        </p:nvSpPr>
+        <p:spPr>
+          <a:xfrm>
+            <a:off x="5535561" y="265472"/>
+            <a:ext cx="6508955" cy="6004700"/>
+          </a:xfrm>
+          <a:prstGeom prst="rect">
+            <a:avLst/>
+          </a:prstGeom>
+          <a:ln>
+            <a:noFill/>
+          </a:ln>
+        </p:spPr>
+        <p:style>
+          <a:lnRef idx="2">
+            <a:schemeClr val="accent1">
+              <a:shade val="15000"/>
+            </a:schemeClr>
+          </a:lnRef>
+          <a:fillRef idx="1">
+            <a:schemeClr val="accent1"/>
+          </a:fillRef>
+          <a:effectRef idx="0">
+            <a:schemeClr val="accent1"/>
+          </a:effectRef>
+          <a:fontRef idx="minor">
+            <a:schemeClr val="lt1"/>
+          </a:fontRef>
+        </p:style>
+        <p:txBody>
+          <a:bodyPr rtlCol="0" anchor="ctr"/>
+          <a:lstStyle/>
+          <a:p>
+            <a:pPr algn="ctr"/>
+            <a:endParaRPr lang="en-US"/>
+          </a:p>
+        </p:txBody>
+      </p:sp>
+      <p:pic>
+        <p:nvPicPr>
+          <p:cNvPr id="5" name="Content Placeholder 4">
+            <a:extLst>
+              <a:ext uri="{FF2B5EF4-FFF2-40B4-BE49-F238E27FC236}">
+                <a16:creationId xmlns:a16="http://schemas.microsoft.com/office/drawing/2014/main" id="{19453361-843A-5FAF-9C2A-90DD90EA050D}"/>
+              </a:ext>
+            </a:extLst>
+          </p:cNvPr>
+          <p:cNvPicPr>
+            <a:picLocks noChangeAspect="1"/>
+          </p:cNvPicPr>
+          <p:nvPr/>
+        </p:nvPicPr>
+        <p:blipFill>
+          <a:blip r:embed="rId2"/>
+          <a:stretch>
+            <a:fillRect/>
+          </a:stretch>
+        </p:blipFill>
+        <p:spPr>
+          <a:xfrm>
+            <a:off x="599725" y="1466102"/>
+            <a:ext cx="10975472" cy="4893556"/>
+          </a:xfrm>
+          <a:prstGeom prst="rect">
+            <a:avLst/>
+          </a:prstGeom>
+        </p:spPr>
+      </p:pic>
+      <p:sp>
+        <p:nvSpPr>
+          <p:cNvPr id="4" name="Rectangle 3">
+            <a:extLst>
+              <a:ext uri="{FF2B5EF4-FFF2-40B4-BE49-F238E27FC236}">
+                <a16:creationId xmlns:a16="http://schemas.microsoft.com/office/drawing/2014/main" id="{F7E04CD1-2674-2893-B401-9DA8242B52E0}"/>
+              </a:ext>
+            </a:extLst>
+          </p:cNvPr>
+          <p:cNvSpPr/>
+          <p:nvPr/>
+        </p:nvSpPr>
+        <p:spPr>
+          <a:xfrm>
+            <a:off x="519741" y="382392"/>
+            <a:ext cx="10348820" cy="851603"/>
+          </a:xfrm>
+          <a:prstGeom prst="rect">
+            <a:avLst/>
+          </a:prstGeom>
+        </p:spPr>
+        <p:style>
+          <a:lnRef idx="2">
+            <a:schemeClr val="dk1">
+              <a:shade val="15000"/>
+            </a:schemeClr>
+          </a:lnRef>
+          <a:fillRef idx="1">
+            <a:schemeClr val="dk1"/>
+          </a:fillRef>
+          <a:effectRef idx="0">
+            <a:schemeClr val="dk1"/>
+          </a:effectRef>
+          <a:fontRef idx="minor">
+            <a:schemeClr val="lt1"/>
+          </a:fontRef>
+        </p:style>
+        <p:txBody>
+          <a:bodyPr rtlCol="0" anchor="ctr"/>
+          <a:lstStyle/>
+          <a:p>
+            <a:pPr algn="ctr"/>
+            <a:endParaRPr lang="en-US"/>
+          </a:p>
+        </p:txBody>
+      </p:sp>
+      <p:sp>
+        <p:nvSpPr>
+          <p:cNvPr id="2" name="Title 1">
+            <a:extLst>
+              <a:ext uri="{FF2B5EF4-FFF2-40B4-BE49-F238E27FC236}">
+                <a16:creationId xmlns:a16="http://schemas.microsoft.com/office/drawing/2014/main" id="{B419A6DD-318D-944E-CF06-D17DB0647DC4}"/>
+              </a:ext>
+            </a:extLst>
+          </p:cNvPr>
+          <p:cNvSpPr>
+            <a:spLocks noGrp="1"/>
+          </p:cNvSpPr>
+          <p:nvPr>
+            <p:ph type="title"/>
+          </p:nvPr>
+        </p:nvSpPr>
+        <p:spPr>
+          <a:xfrm>
+            <a:off x="616533" y="382392"/>
+            <a:ext cx="9166564" cy="756058"/>
+          </a:xfrm>
+        </p:spPr>
+        <p:txBody>
+          <a:bodyPr vert="horz" lIns="91440" tIns="45720" rIns="91440" bIns="45720" rtlCol="0" anchor="b">
+            <a:normAutofit fontScale="90000"/>
+          </a:bodyPr>
+          <a:lstStyle/>
+          <a:p>
+            <a:r>
+              <a:rPr lang="en-US" sz="3200" kern="1200" dirty="0">
+                <a:latin typeface="+mj-lt"/>
+                <a:ea typeface="+mj-ea"/>
+                <a:cs typeface="+mj-cs"/>
+              </a:rPr>
+              <a:t>Transformation Model Showing Body </a:t>
+            </a:r>
+            <a:r>
+              <a:rPr lang="en-US" sz="3200" dirty="0"/>
+              <a:t>to Arm Connection</a:t>
+            </a:r>
+            <a:endParaRPr lang="en-US" sz="3200" kern="1200" dirty="0">
+              <a:latin typeface="+mj-lt"/>
+              <a:ea typeface="+mj-ea"/>
+              <a:cs typeface="+mj-cs"/>
+            </a:endParaRPr>
+          </a:p>
+        </p:txBody>
+      </p:sp>
+    </p:spTree>
+    <p:extLst>
+      <p:ext uri="{BB962C8B-B14F-4D97-AF65-F5344CB8AC3E}">
+        <p14:creationId xmlns:p14="http://schemas.microsoft.com/office/powerpoint/2010/main" val="35257016"/>
+      </p:ext>
+    </p:extLst>
+  </p:cSld>
+  <p:clrMapOvr>
+    <a:masterClrMapping/>
+  </p:clrMapOvr>
+</p:sld>
+</file>
+
+<file path=ppt/slides/slide7.xml><?xml version="1.0" encoding="utf-8"?>
+<p:sld xmlns:a="http://schemas.openxmlformats.org/drawingml/2006/main" xmlns:r="http://schemas.openxmlformats.org/officeDocument/2006/relationships" xmlns:p="http://schemas.openxmlformats.org/presentationml/2006/main">
+  <p:cSld>
+    <p:spTree>
+      <p:nvGrpSpPr>
+        <p:cNvPr id="1" name=""/>
+        <p:cNvGrpSpPr/>
+        <p:nvPr/>
+      </p:nvGrpSpPr>
+      <p:grpSpPr>
+        <a:xfrm>
+          <a:off x="0" y="0"/>
+          <a:ext cx="0" cy="0"/>
+          <a:chOff x="0" y="0"/>
+          <a:chExt cx="0" cy="0"/>
+        </a:xfrm>
+      </p:grpSpPr>
+      <p:sp useBgFill="1">
+        <p:nvSpPr>
+          <p:cNvPr id="10" name="Rectangle 9">
+            <a:extLst>
+              <a:ext uri="{FF2B5EF4-FFF2-40B4-BE49-F238E27FC236}">
+                <a16:creationId xmlns:a16="http://schemas.microsoft.com/office/drawing/2014/main" id="{149FB5C3-7336-4FE0-A30C-CC0A3646D499}"/>
+              </a:ext>
+              <a:ext uri="{C183D7F6-B498-43B3-948B-1728B52AA6E4}">
+                <adec:decorative xmlns:adec="http://schemas.microsoft.com/office/drawing/2017/decorative" val="1"/>
+              </a:ext>
+            </a:extLst>
+          </p:cNvPr>
+          <p:cNvSpPr>
+            <a:spLocks noGrp="1" noRot="1" noChangeAspect="1" noMove="1" noResize="1" noEditPoints="1" noAdjustHandles="1" noChangeArrowheads="1" noChangeShapeType="1" noTextEdit="1"/>
+          </p:cNvSpPr>
+          <p:nvPr>
+            <p:extLst>
+              <p:ext uri="{386F3935-93C4-4BCD-93E2-E3B085C9AB24}">
+                <p16:designElem xmlns:p16="http://schemas.microsoft.com/office/powerpoint/2015/main" val="1"/>
+              </p:ext>
+            </p:extLst>
+          </p:nvPr>
+        </p:nvSpPr>
+        <p:spPr>
+          <a:xfrm>
+            <a:off x="0" y="0"/>
+            <a:ext cx="12191999" cy="6857365"/>
+          </a:xfrm>
+          <a:prstGeom prst="rect">
+            <a:avLst/>
+          </a:prstGeom>
+          <a:ln>
+            <a:noFill/>
+          </a:ln>
+        </p:spPr>
+        <p:style>
+          <a:lnRef idx="2">
+            <a:schemeClr val="accent1">
+              <a:shade val="50000"/>
+            </a:schemeClr>
+          </a:lnRef>
+          <a:fillRef idx="1">
+            <a:schemeClr val="accent1"/>
+          </a:fillRef>
+          <a:effectRef idx="0">
+            <a:schemeClr val="accent1"/>
+          </a:effectRef>
+          <a:fontRef idx="minor">
+            <a:schemeClr val="lt1"/>
+          </a:fontRef>
+        </p:style>
+        <p:txBody>
+          <a:bodyPr rtlCol="0" anchor="ctr"/>
+          <a:lstStyle/>
+          <a:p>
+            <a:pPr algn="ctr"/>
+            <a:endParaRPr lang="en-US"/>
+          </a:p>
+        </p:txBody>
+      </p:sp>
+      <p:grpSp>
+        <p:nvGrpSpPr>
+          <p:cNvPr id="12" name="Group 11">
+            <a:extLst>
+              <a:ext uri="{FF2B5EF4-FFF2-40B4-BE49-F238E27FC236}">
+                <a16:creationId xmlns:a16="http://schemas.microsoft.com/office/drawing/2014/main" id="{19A6B5CE-CB1D-48EE-8B43-E952235C8371}"/>
+              </a:ext>
+              <a:ext uri="{C183D7F6-B498-43B3-948B-1728B52AA6E4}">
+                <adec:decorative xmlns:adec="http://schemas.microsoft.com/office/drawing/2017/decorative" val="1"/>
+              </a:ext>
+            </a:extLst>
+          </p:cNvPr>
+          <p:cNvGrpSpPr>
+            <a:grpSpLocks noGrp="1" noUngrp="1" noRot="1" noChangeAspect="1" noMove="1" noResize="1"/>
+          </p:cNvGrpSpPr>
+          <p:nvPr>
+            <p:extLst>
+              <p:ext uri="{386F3935-93C4-4BCD-93E2-E3B085C9AB24}">
+                <p16:designElem xmlns:p16="http://schemas.microsoft.com/office/powerpoint/2015/main" val="1"/>
+              </p:ext>
+            </p:extLst>
+          </p:nvPr>
+        </p:nvGrpSpPr>
+        <p:grpSpPr>
+          <a:xfrm rot="5400000">
+            <a:off x="-2340441" y="2666183"/>
+            <a:ext cx="5860051" cy="527712"/>
+            <a:chOff x="6081624" y="1998368"/>
+            <a:chExt cx="5613457" cy="782175"/>
+          </a:xfrm>
+          <a:solidFill>
+            <a:schemeClr val="accent4"/>
+          </a:solidFill>
+        </p:grpSpPr>
+        <p:sp>
+          <p:nvSpPr>
+            <p:cNvPr id="13" name="Rectangle 12">
+              <a:extLst>
+                <a:ext uri="{FF2B5EF4-FFF2-40B4-BE49-F238E27FC236}">
+                  <a16:creationId xmlns:a16="http://schemas.microsoft.com/office/drawing/2014/main" id="{E3F3EAA5-4E15-400B-BBA3-82B3F49A2178}"/>
+                </a:ext>
+                <a:ext uri="{C183D7F6-B498-43B3-948B-1728B52AA6E4}">
+                  <adec:decorative xmlns:adec="http://schemas.microsoft.com/office/drawing/2017/decorative" val="1"/>
+                </a:ext>
+              </a:extLst>
+            </p:cNvPr>
+            <p:cNvSpPr/>
+            <p:nvPr>
+              <p:extLst>
+                <p:ext uri="{386F3935-93C4-4BCD-93E2-E3B085C9AB24}">
+                  <p16:designElem xmlns:p16="http://schemas.microsoft.com/office/powerpoint/2015/main" val="1"/>
+                </p:ext>
+              </p:extLst>
+            </p:nvPr>
+          </p:nvSpPr>
+          <p:spPr>
+            <a:xfrm rot="5400000">
+              <a:off x="11228040" y="2313027"/>
+              <a:ext cx="781700" cy="152382"/>
+            </a:xfrm>
+            <a:prstGeom prst="rect">
+              <a:avLst/>
+            </a:prstGeom>
+            <a:grpFill/>
+            <a:ln>
+              <a:noFill/>
+            </a:ln>
+          </p:spPr>
+          <p:style>
+            <a:lnRef idx="2">
+              <a:schemeClr val="accent1">
+                <a:shade val="50000"/>
+              </a:schemeClr>
+            </a:lnRef>
+            <a:fillRef idx="1">
+              <a:schemeClr val="accent1"/>
+            </a:fillRef>
+            <a:effectRef idx="0">
+              <a:schemeClr val="accent1"/>
+            </a:effectRef>
+            <a:fontRef idx="minor">
+              <a:schemeClr val="lt1"/>
+            </a:fontRef>
+          </p:style>
+          <p:txBody>
+            <a:bodyPr rtlCol="0" anchor="ctr"/>
+            <a:lstStyle/>
+            <a:p>
+              <a:pPr algn="ctr"/>
+              <a:endParaRPr lang="en-US"/>
+            </a:p>
+          </p:txBody>
+        </p:sp>
+        <p:sp>
+          <p:nvSpPr>
+            <p:cNvPr id="14" name="Rectangle 13">
+              <a:extLst>
+                <a:ext uri="{FF2B5EF4-FFF2-40B4-BE49-F238E27FC236}">
+                  <a16:creationId xmlns:a16="http://schemas.microsoft.com/office/drawing/2014/main" id="{72BA2E40-BE9B-4C54-9CDD-40EE804CCE64}"/>
+                </a:ext>
+                <a:ext uri="{C183D7F6-B498-43B3-948B-1728B52AA6E4}">
+                  <adec:decorative xmlns:adec="http://schemas.microsoft.com/office/drawing/2017/decorative" val="1"/>
+                </a:ext>
+              </a:extLst>
+            </p:cNvPr>
+            <p:cNvSpPr/>
+            <p:nvPr>
+              <p:extLst>
+                <p:ext uri="{386F3935-93C4-4BCD-93E2-E3B085C9AB24}">
+                  <p16:designElem xmlns:p16="http://schemas.microsoft.com/office/powerpoint/2015/main" val="1"/>
+                </p:ext>
+              </p:extLst>
+            </p:nvPr>
+          </p:nvSpPr>
+          <p:spPr>
+            <a:xfrm flipH="1" flipV="1">
+              <a:off x="6081624" y="1998844"/>
+              <a:ext cx="5372968" cy="781699"/>
+            </a:xfrm>
+            <a:prstGeom prst="rect">
+              <a:avLst/>
+            </a:prstGeom>
+            <a:grpFill/>
+            <a:ln>
+              <a:noFill/>
+            </a:ln>
+          </p:spPr>
+          <p:style>
+            <a:lnRef idx="2">
+              <a:schemeClr val="accent1">
+                <a:shade val="50000"/>
+              </a:schemeClr>
+            </a:lnRef>
+            <a:fillRef idx="1">
+              <a:schemeClr val="accent1"/>
+            </a:fillRef>
+            <a:effectRef idx="0">
+              <a:schemeClr val="accent1"/>
+            </a:effectRef>
+            <a:fontRef idx="minor">
+              <a:schemeClr val="lt1"/>
+            </a:fontRef>
+          </p:style>
+          <p:txBody>
+            <a:bodyPr rtlCol="0" anchor="ctr"/>
+            <a:lstStyle/>
+            <a:p>
+              <a:pPr algn="ctr"/>
+              <a:endParaRPr lang="en-US"/>
+            </a:p>
+          </p:txBody>
+        </p:sp>
+      </p:grpSp>
+      <p:sp>
+        <p:nvSpPr>
+          <p:cNvPr id="16" name="Rectangle 15">
+            <a:extLst>
+              <a:ext uri="{FF2B5EF4-FFF2-40B4-BE49-F238E27FC236}">
+                <a16:creationId xmlns:a16="http://schemas.microsoft.com/office/drawing/2014/main" id="{0DA909B4-15FF-46A6-8A7F-7AEF977FE9ED}"/>
+              </a:ext>
+              <a:ext uri="{C183D7F6-B498-43B3-948B-1728B52AA6E4}">
+                <adec:decorative xmlns:adec="http://schemas.microsoft.com/office/drawing/2017/decorative" val="1"/>
+              </a:ext>
+            </a:extLst>
+          </p:cNvPr>
+          <p:cNvSpPr>
+            <a:spLocks noGrp="1" noRot="1" noChangeAspect="1" noMove="1" noResize="1" noEditPoints="1" noAdjustHandles="1" noChangeArrowheads="1" noChangeShapeType="1" noTextEdit="1"/>
+          </p:cNvSpPr>
+          <p:nvPr>
+            <p:extLst>
+              <p:ext uri="{386F3935-93C4-4BCD-93E2-E3B085C9AB24}">
+                <p16:designElem xmlns:p16="http://schemas.microsoft.com/office/powerpoint/2015/main" val="1"/>
+              </p:ext>
+            </p:extLst>
+          </p:nvPr>
+        </p:nvSpPr>
+        <p:spPr>
+          <a:xfrm>
+            <a:off x="579528" y="517897"/>
+            <a:ext cx="11111729" cy="5857966"/>
+          </a:xfrm>
+          <a:prstGeom prst="rect">
+            <a:avLst/>
+          </a:prstGeom>
+          <a:solidFill>
+            <a:schemeClr val="bg1"/>
+          </a:solidFill>
+          <a:ln>
+            <a:noFill/>
+          </a:ln>
+          <a:effectLst>
+            <a:outerShdw blurRad="139700" dist="127000" dir="5400000" algn="t" rotWithShape="0">
+              <a:prstClr val="black">
+                <a:alpha val="15000"/>
+              </a:prstClr>
+            </a:outerShdw>
+          </a:effectLst>
+        </p:spPr>
+        <p:style>
+          <a:lnRef idx="2">
+            <a:schemeClr val="accent1">
+              <a:shade val="50000"/>
+            </a:schemeClr>
+          </a:lnRef>
+          <a:fillRef idx="1">
+            <a:schemeClr val="accent1"/>
+          </a:fillRef>
+          <a:effectRef idx="0">
+            <a:schemeClr val="accent1"/>
+          </a:effectRef>
+          <a:fontRef idx="minor">
+            <a:schemeClr val="lt1"/>
+          </a:fontRef>
+        </p:style>
+        <p:txBody>
+          <a:bodyPr rtlCol="0" anchor="ctr"/>
+          <a:lstStyle/>
+          <a:p>
+            <a:pPr algn="ctr"/>
+            <a:endParaRPr lang="en-US"/>
+          </a:p>
+        </p:txBody>
+      </p:sp>
+      <p:sp>
+        <p:nvSpPr>
+          <p:cNvPr id="2" name="Title 1">
+            <a:extLst>
+              <a:ext uri="{FF2B5EF4-FFF2-40B4-BE49-F238E27FC236}">
+                <a16:creationId xmlns:a16="http://schemas.microsoft.com/office/drawing/2014/main" id="{D4E85203-ADD3-A7A8-825C-25E8E4DFB17A}"/>
+              </a:ext>
+            </a:extLst>
+          </p:cNvPr>
+          <p:cNvSpPr>
+            <a:spLocks noGrp="1"/>
+          </p:cNvSpPr>
+          <p:nvPr>
+            <p:ph type="title"/>
+          </p:nvPr>
+        </p:nvSpPr>
+        <p:spPr>
+          <a:xfrm>
+            <a:off x="1057025" y="922644"/>
+            <a:ext cx="5040285" cy="1169585"/>
+          </a:xfrm>
+        </p:spPr>
+        <p:txBody>
+          <a:bodyPr anchor="b">
+            <a:normAutofit/>
+          </a:bodyPr>
+          <a:lstStyle/>
+          <a:p>
+            <a:r>
+              <a:rPr lang="en-US" sz="4000"/>
+              <a:t>Custom Pathing</a:t>
+            </a:r>
+          </a:p>
+        </p:txBody>
+      </p:sp>
+      <p:sp>
+        <p:nvSpPr>
+          <p:cNvPr id="18" name="Rectangle 17">
+            <a:extLst>
+              <a:ext uri="{FF2B5EF4-FFF2-40B4-BE49-F238E27FC236}">
+                <a16:creationId xmlns:a16="http://schemas.microsoft.com/office/drawing/2014/main" id="{1382A32C-5B0C-4B1C-A074-76C6DBCC9F87}"/>
+              </a:ext>
+              <a:ext uri="{C183D7F6-B498-43B3-948B-1728B52AA6E4}">
+                <adec:decorative xmlns:adec="http://schemas.microsoft.com/office/drawing/2017/decorative" val="1"/>
+              </a:ext>
+            </a:extLst>
+          </p:cNvPr>
+          <p:cNvSpPr>
+            <a:spLocks noGrp="1" noRot="1" noChangeAspect="1" noMove="1" noResize="1" noEditPoints="1" noAdjustHandles="1" noChangeArrowheads="1" noChangeShapeType="1" noTextEdit="1"/>
+          </p:cNvSpPr>
+          <p:nvPr>
+            <p:extLst>
+              <p:ext uri="{386F3935-93C4-4BCD-93E2-E3B085C9AB24}">
+                <p16:designElem xmlns:p16="http://schemas.microsoft.com/office/powerpoint/2015/main" val="1"/>
+              </p:ext>
+            </p:extLst>
+          </p:nvPr>
+        </p:nvSpPr>
+        <p:spPr>
+          <a:xfrm flipH="1">
+            <a:off x="1055714" y="2263365"/>
+            <a:ext cx="4937760" cy="27432"/>
+          </a:xfrm>
+          <a:prstGeom prst="rect">
+            <a:avLst/>
+          </a:prstGeom>
+          <a:solidFill>
+            <a:schemeClr val="accent4"/>
+          </a:solidFill>
+          <a:ln>
+            <a:noFill/>
+          </a:ln>
+        </p:spPr>
+        <p:style>
+          <a:lnRef idx="2">
+            <a:schemeClr val="accent1">
+              <a:shade val="50000"/>
+            </a:schemeClr>
+          </a:lnRef>
+          <a:fillRef idx="1">
+            <a:schemeClr val="accent1"/>
+          </a:fillRef>
+          <a:effectRef idx="0">
+            <a:schemeClr val="accent1"/>
+          </a:effectRef>
+          <a:fontRef idx="minor">
+            <a:schemeClr val="lt1"/>
+          </a:fontRef>
+        </p:style>
+        <p:txBody>
+          <a:bodyPr rtlCol="0" anchor="ctr"/>
+          <a:lstStyle/>
+          <a:p>
+            <a:pPr algn="ctr"/>
+            <a:endParaRPr lang="en-US"/>
+          </a:p>
+        </p:txBody>
+      </p:sp>
+      <p:sp>
+        <p:nvSpPr>
+          <p:cNvPr id="3" name="Content Placeholder 2">
+            <a:extLst>
+              <a:ext uri="{FF2B5EF4-FFF2-40B4-BE49-F238E27FC236}">
+                <a16:creationId xmlns:a16="http://schemas.microsoft.com/office/drawing/2014/main" id="{AC54BD91-5103-2AA0-9A29-76D692A57709}"/>
+              </a:ext>
+            </a:extLst>
+          </p:cNvPr>
+          <p:cNvSpPr>
+            <a:spLocks noGrp="1"/>
+          </p:cNvSpPr>
+          <p:nvPr>
+            <p:ph idx="1"/>
+          </p:nvPr>
+        </p:nvSpPr>
+        <p:spPr>
+          <a:xfrm>
+            <a:off x="1055715" y="2508105"/>
+            <a:ext cx="5040285" cy="3632493"/>
+          </a:xfrm>
+        </p:spPr>
+        <p:txBody>
+          <a:bodyPr vert="horz" lIns="91440" tIns="45720" rIns="91440" bIns="45720" rtlCol="0" anchor="ctr">
+            <a:normAutofit/>
+          </a:bodyPr>
+          <a:lstStyle/>
+          <a:p>
+            <a:r>
+              <a:rPr lang="en-US" sz="2000"/>
+              <a:t>Test the drone for stability in simple linear and rotational paths</a:t>
+            </a:r>
+          </a:p>
+          <a:p>
+            <a:r>
+              <a:rPr lang="en-US" sz="2000"/>
+              <a:t>Includes 7 custom pathing options with return to home feature.</a:t>
+            </a:r>
+          </a:p>
+          <a:p>
+            <a:r>
+              <a:rPr lang="en-US" sz="2000"/>
+              <a:t>Coded a way to adjust rotational path smoothness</a:t>
+            </a:r>
+          </a:p>
+        </p:txBody>
+      </p:sp>
+      <p:pic>
+        <p:nvPicPr>
+          <p:cNvPr id="5" name="Picture 4" descr="A drawing of a circle with arrows&#10;&#10;AI-generated content may be incorrect.">
+            <a:extLst>
+              <a:ext uri="{FF2B5EF4-FFF2-40B4-BE49-F238E27FC236}">
+                <a16:creationId xmlns:a16="http://schemas.microsoft.com/office/drawing/2014/main" id="{737D289B-2A55-DCA9-9704-C552DE09E599}"/>
+              </a:ext>
+            </a:extLst>
+          </p:cNvPr>
+          <p:cNvPicPr>
+            <a:picLocks noChangeAspect="1"/>
+          </p:cNvPicPr>
+          <p:nvPr/>
+        </p:nvPicPr>
+        <p:blipFill>
+          <a:blip r:embed="rId2"/>
+          <a:stretch>
+            <a:fillRect/>
+          </a:stretch>
+        </p:blipFill>
+        <p:spPr>
+          <a:xfrm>
+            <a:off x="7067996" y="774285"/>
+            <a:ext cx="4146462" cy="2581173"/>
+          </a:xfrm>
+          <a:prstGeom prst="rect">
+            <a:avLst/>
+          </a:prstGeom>
+        </p:spPr>
+      </p:pic>
+      <p:pic>
+        <p:nvPicPr>
+          <p:cNvPr id="4" name="Picture 3" descr="A drawing of a line on a black background&#10;&#10;AI-generated content may be incorrect.">
+            <a:extLst>
+              <a:ext uri="{FF2B5EF4-FFF2-40B4-BE49-F238E27FC236}">
+                <a16:creationId xmlns:a16="http://schemas.microsoft.com/office/drawing/2014/main" id="{204866C4-0F4E-6B54-8F29-CF591011D2F2}"/>
+              </a:ext>
+            </a:extLst>
+          </p:cNvPr>
+          <p:cNvPicPr>
+            <a:picLocks noChangeAspect="1"/>
+          </p:cNvPicPr>
+          <p:nvPr/>
+        </p:nvPicPr>
+        <p:blipFill>
+          <a:blip r:embed="rId3"/>
+          <a:stretch>
+            <a:fillRect/>
+          </a:stretch>
+        </p:blipFill>
+        <p:spPr>
+          <a:xfrm>
+            <a:off x="6946667" y="3762894"/>
+            <a:ext cx="4389120" cy="2205532"/>
+          </a:xfrm>
+          <a:prstGeom prst="rect">
+            <a:avLst/>
+          </a:prstGeom>
+        </p:spPr>
+      </p:pic>
+    </p:spTree>
+    <p:extLst>
+      <p:ext uri="{BB962C8B-B14F-4D97-AF65-F5344CB8AC3E}">
+        <p14:creationId xmlns:p14="http://schemas.microsoft.com/office/powerpoint/2010/main" val="2156346351"/>
+      </p:ext>
+    </p:extLst>
+  </p:cSld>
+  <p:clrMapOvr>
+    <a:masterClrMapping/>
+  </p:clrMapOvr>
+</p:sld>
+</file>
+
+<file path=ppt/slides/slide8.xml><?xml version="1.0" encoding="utf-8"?>
+<p:sld xmlns:a="http://schemas.openxmlformats.org/drawingml/2006/main" xmlns:r="http://schemas.openxmlformats.org/officeDocument/2006/relationships" xmlns:p="http://schemas.openxmlformats.org/presentationml/2006/main">
+  <p:cSld>
+    <p:spTree>
+      <p:nvGrpSpPr>
+        <p:cNvPr id="1" name=""/>
+        <p:cNvGrpSpPr/>
+        <p:nvPr/>
+      </p:nvGrpSpPr>
+      <p:grpSpPr>
+        <a:xfrm>
+          <a:off x="0" y="0"/>
+          <a:ext cx="0" cy="0"/>
+          <a:chOff x="0" y="0"/>
+          <a:chExt cx="0" cy="0"/>
+        </a:xfrm>
+      </p:grpSpPr>
+      <p:sp useBgFill="1">
+        <p:nvSpPr>
+          <p:cNvPr id="12" name="Rectangle 11">
+            <a:extLst>
+              <a:ext uri="{FF2B5EF4-FFF2-40B4-BE49-F238E27FC236}">
+                <a16:creationId xmlns:a16="http://schemas.microsoft.com/office/drawing/2014/main" id="{C4879EFC-8E62-4E00-973C-C45EE9EC676D}"/>
+              </a:ext>
+              <a:ext uri="{C183D7F6-B498-43B3-948B-1728B52AA6E4}">
+                <adec:decorative xmlns:adec="http://schemas.microsoft.com/office/drawing/2017/decorative" val="1"/>
+              </a:ext>
+            </a:extLst>
+          </p:cNvPr>
+          <p:cNvSpPr>
+            <a:spLocks noGrp="1" noRot="1" noChangeAspect="1" noMove="1" noResize="1" noEditPoints="1" noAdjustHandles="1" noChangeArrowheads="1" noChangeShapeType="1" noTextEdit="1"/>
+          </p:cNvSpPr>
+          <p:nvPr>
+            <p:extLst>
+              <p:ext uri="{386F3935-93C4-4BCD-93E2-E3B085C9AB24}">
+                <p16:designElem xmlns:p16="http://schemas.microsoft.com/office/powerpoint/2015/main" val="1"/>
+              </p:ext>
+            </p:extLst>
+          </p:nvPr>
+        </p:nvSpPr>
+        <p:spPr>
+          <a:xfrm>
+            <a:off x="0" y="0"/>
+            <a:ext cx="12188952" cy="6858000"/>
+          </a:xfrm>
+          <a:prstGeom prst="rect">
+            <a:avLst/>
+          </a:prstGeom>
+          <a:ln>
+            <a:noFill/>
+          </a:ln>
+        </p:spPr>
+        <p:style>
+          <a:lnRef idx="2">
+            <a:schemeClr val="accent1">
+              <a:shade val="50000"/>
+            </a:schemeClr>
+          </a:lnRef>
+          <a:fillRef idx="1">
+            <a:schemeClr val="accent1"/>
+          </a:fillRef>
+          <a:effectRef idx="0">
+            <a:schemeClr val="accent1"/>
+          </a:effectRef>
+          <a:fontRef idx="minor">
+            <a:schemeClr val="lt1"/>
+          </a:fontRef>
+        </p:style>
+        <p:txBody>
+          <a:bodyPr rtlCol="0" anchor="ctr"/>
+          <a:lstStyle/>
+          <a:p>
+            <a:pPr algn="ctr"/>
+            <a:endParaRPr lang="en-US"/>
+          </a:p>
+        </p:txBody>
+      </p:sp>
+      <p:sp>
+        <p:nvSpPr>
+          <p:cNvPr id="3" name="Rectangle 2">
+            <a:extLst>
+              <a:ext uri="{FF2B5EF4-FFF2-40B4-BE49-F238E27FC236}">
+                <a16:creationId xmlns:a16="http://schemas.microsoft.com/office/drawing/2014/main" id="{62A4A455-976B-BBA5-1FCC-7B7D316E7444}"/>
+              </a:ext>
+            </a:extLst>
+          </p:cNvPr>
+          <p:cNvSpPr/>
+          <p:nvPr/>
+        </p:nvSpPr>
+        <p:spPr>
+          <a:xfrm>
+            <a:off x="1030014" y="546538"/>
+            <a:ext cx="10121462" cy="1736476"/>
+          </a:xfrm>
+          <a:prstGeom prst="rect">
+            <a:avLst/>
+          </a:prstGeom>
+        </p:spPr>
+        <p:style>
+          <a:lnRef idx="2">
+            <a:schemeClr val="dk1">
+              <a:shade val="15000"/>
+            </a:schemeClr>
+          </a:lnRef>
+          <a:fillRef idx="1">
+            <a:schemeClr val="dk1"/>
+          </a:fillRef>
+          <a:effectRef idx="0">
+            <a:schemeClr val="dk1"/>
+          </a:effectRef>
+          <a:fontRef idx="minor">
+            <a:schemeClr val="lt1"/>
+          </a:fontRef>
+        </p:style>
+        <p:txBody>
+          <a:bodyPr rtlCol="0" anchor="ctr"/>
+          <a:lstStyle/>
+          <a:p>
+            <a:pPr algn="ctr"/>
+            <a:endParaRPr lang="en-US"/>
+          </a:p>
+        </p:txBody>
+      </p:sp>
+      <p:sp>
+        <p:nvSpPr>
+          <p:cNvPr id="2" name="Title 1">
+            <a:extLst>
+              <a:ext uri="{FF2B5EF4-FFF2-40B4-BE49-F238E27FC236}">
+                <a16:creationId xmlns:a16="http://schemas.microsoft.com/office/drawing/2014/main" id="{F47189A5-8DB9-0FAC-AFE9-2AC7861C27BC}"/>
+              </a:ext>
+            </a:extLst>
+          </p:cNvPr>
+          <p:cNvSpPr>
+            <a:spLocks noGrp="1"/>
+          </p:cNvSpPr>
+          <p:nvPr>
+            <p:ph type="title"/>
+          </p:nvPr>
+        </p:nvSpPr>
+        <p:spPr>
+          <a:xfrm>
+            <a:off x="638881" y="457200"/>
+            <a:ext cx="10909640" cy="1368614"/>
+          </a:xfrm>
+        </p:spPr>
+        <p:txBody>
+          <a:bodyPr vert="horz" lIns="91440" tIns="45720" rIns="91440" bIns="45720" rtlCol="0" anchor="ctr">
+            <a:normAutofit/>
+          </a:bodyPr>
+          <a:lstStyle/>
+          <a:p>
+            <a:pPr algn="ctr"/>
+            <a:r>
+              <a:rPr lang="en-US" sz="6600"/>
+              <a:t>Simulation with Custom Path</a:t>
+            </a:r>
+          </a:p>
+        </p:txBody>
+      </p:sp>
+      <p:sp>
+        <p:nvSpPr>
+          <p:cNvPr id="14" name="sketch line">
+            <a:extLst>
+              <a:ext uri="{FF2B5EF4-FFF2-40B4-BE49-F238E27FC236}">
+                <a16:creationId xmlns:a16="http://schemas.microsoft.com/office/drawing/2014/main" id="{D6A9C53F-5F90-40A5-8C85-5412D39C8C68}"/>
+              </a:ext>
+              <a:ext uri="{C183D7F6-B498-43B3-948B-1728B52AA6E4}">
+                <adec:decorative xmlns:adec="http://schemas.microsoft.com/office/drawing/2017/decorative" val="1"/>
+              </a:ext>
+            </a:extLst>
+          </p:cNvPr>
+          <p:cNvSpPr>
+            <a:spLocks noGrp="1" noRot="1" noChangeAspect="1" noMove="1" noResize="1" noEditPoints="1" noAdjustHandles="1" noChangeArrowheads="1" noChangeShapeType="1" noTextEdit="1"/>
+          </p:cNvSpPr>
+          <p:nvPr>
+            <p:extLst>
+              <p:ext uri="{386F3935-93C4-4BCD-93E2-E3B085C9AB24}">
+                <p16:designElem xmlns:p16="http://schemas.microsoft.com/office/powerpoint/2015/main" val="1"/>
+              </p:ext>
+            </p:extLst>
+          </p:nvPr>
+        </p:nvSpPr>
+        <p:spPr>
+          <a:xfrm>
+            <a:off x="4450080" y="1850683"/>
+            <a:ext cx="3291840" cy="18288"/>
+          </a:xfrm>
+          <a:custGeom>
+            <a:avLst/>
+            <a:gdLst>
+              <a:gd name="csX0" fmla="*/ 0 w 3291840"/>
+              <a:gd name="csY0" fmla="*/ 0 h 18288"/>
+              <a:gd name="csX1" fmla="*/ 658368 w 3291840"/>
+              <a:gd name="csY1" fmla="*/ 0 h 18288"/>
+              <a:gd name="csX2" fmla="*/ 1283818 w 3291840"/>
+              <a:gd name="csY2" fmla="*/ 0 h 18288"/>
+              <a:gd name="csX3" fmla="*/ 1909267 w 3291840"/>
+              <a:gd name="csY3" fmla="*/ 0 h 18288"/>
+              <a:gd name="csX4" fmla="*/ 2633472 w 3291840"/>
+              <a:gd name="csY4" fmla="*/ 0 h 18288"/>
+              <a:gd name="csX5" fmla="*/ 3291840 w 3291840"/>
+              <a:gd name="csY5" fmla="*/ 0 h 18288"/>
+              <a:gd name="csX6" fmla="*/ 3291840 w 3291840"/>
+              <a:gd name="csY6" fmla="*/ 18288 h 18288"/>
+              <a:gd name="csX7" fmla="*/ 2633472 w 3291840"/>
+              <a:gd name="csY7" fmla="*/ 18288 h 18288"/>
+              <a:gd name="csX8" fmla="*/ 2073859 w 3291840"/>
+              <a:gd name="csY8" fmla="*/ 18288 h 18288"/>
+              <a:gd name="csX9" fmla="*/ 1448410 w 3291840"/>
+              <a:gd name="csY9" fmla="*/ 18288 h 18288"/>
+              <a:gd name="csX10" fmla="*/ 822960 w 3291840"/>
+              <a:gd name="csY10" fmla="*/ 18288 h 18288"/>
+              <a:gd name="csX11" fmla="*/ 0 w 3291840"/>
+              <a:gd name="csY11" fmla="*/ 18288 h 18288"/>
+              <a:gd name="csX12" fmla="*/ 0 w 3291840"/>
+              <a:gd name="csY12" fmla="*/ 0 h 18288"/>
+            </a:gdLst>
+            <a:ahLst/>
+            <a:cxnLst>
+              <a:cxn ang="0">
+                <a:pos x="csX0" y="csY0"/>
+              </a:cxn>
+              <a:cxn ang="0">
+                <a:pos x="csX1" y="csY1"/>
+              </a:cxn>
+              <a:cxn ang="0">
+                <a:pos x="csX2" y="csY2"/>
+              </a:cxn>
+              <a:cxn ang="0">
+                <a:pos x="csX3" y="csY3"/>
+              </a:cxn>
+              <a:cxn ang="0">
+                <a:pos x="csX4" y="csY4"/>
+              </a:cxn>
+              <a:cxn ang="0">
+                <a:pos x="csX5" y="csY5"/>
+              </a:cxn>
+              <a:cxn ang="0">
+                <a:pos x="csX6" y="csY6"/>
+              </a:cxn>
+              <a:cxn ang="0">
+                <a:pos x="csX7" y="csY7"/>
+              </a:cxn>
+              <a:cxn ang="0">
+                <a:pos x="csX8" y="csY8"/>
+              </a:cxn>
+              <a:cxn ang="0">
+                <a:pos x="csX9" y="csY9"/>
+              </a:cxn>
+              <a:cxn ang="0">
+                <a:pos x="csX10" y="csY10"/>
+              </a:cxn>
+              <a:cxn ang="0">
+                <a:pos x="csX11" y="csY11"/>
+              </a:cxn>
+              <a:cxn ang="0">
+                <a:pos x="csX12" y="csY12"/>
+              </a:cxn>
+            </a:cxnLst>
+            <a:rect l="l" t="t" r="r" b="b"/>
+            <a:pathLst>
+              <a:path w="3291840" h="18288" fill="none" extrusionOk="0">
+                <a:moveTo>
+                  <a:pt x="0" y="0"/>
+                </a:moveTo>
+                <a:cubicBezTo>
+                  <a:pt x="173077" y="-20031"/>
+                  <a:pt x="443104" y="6424"/>
+                  <a:pt x="658368" y="0"/>
+                </a:cubicBezTo>
+                <a:cubicBezTo>
+                  <a:pt x="873632" y="-6424"/>
+                  <a:pt x="1034028" y="11764"/>
+                  <a:pt x="1283818" y="0"/>
+                </a:cubicBezTo>
+                <a:cubicBezTo>
+                  <a:pt x="1533608" y="-11764"/>
+                  <a:pt x="1691227" y="-30112"/>
+                  <a:pt x="1909267" y="0"/>
+                </a:cubicBezTo>
+                <a:cubicBezTo>
+                  <a:pt x="2127307" y="30112"/>
+                  <a:pt x="2272465" y="-18735"/>
+                  <a:pt x="2633472" y="0"/>
+                </a:cubicBezTo>
+                <a:cubicBezTo>
+                  <a:pt x="2994479" y="18735"/>
+                  <a:pt x="3023324" y="-32030"/>
+                  <a:pt x="3291840" y="0"/>
+                </a:cubicBezTo>
+                <a:cubicBezTo>
+                  <a:pt x="3291406" y="7551"/>
+                  <a:pt x="3291373" y="9822"/>
+                  <a:pt x="3291840" y="18288"/>
+                </a:cubicBezTo>
+                <a:cubicBezTo>
+                  <a:pt x="3048445" y="38989"/>
+                  <a:pt x="2846548" y="-14400"/>
+                  <a:pt x="2633472" y="18288"/>
+                </a:cubicBezTo>
+                <a:cubicBezTo>
+                  <a:pt x="2420396" y="50976"/>
+                  <a:pt x="2304099" y="6336"/>
+                  <a:pt x="2073859" y="18288"/>
+                </a:cubicBezTo>
+                <a:cubicBezTo>
+                  <a:pt x="1843619" y="30240"/>
+                  <a:pt x="1706926" y="10778"/>
+                  <a:pt x="1448410" y="18288"/>
+                </a:cubicBezTo>
+                <a:cubicBezTo>
+                  <a:pt x="1189894" y="25798"/>
+                  <a:pt x="1002278" y="8992"/>
+                  <a:pt x="822960" y="18288"/>
+                </a:cubicBezTo>
+                <a:cubicBezTo>
+                  <a:pt x="643642" y="27585"/>
+                  <a:pt x="307039" y="38051"/>
+                  <a:pt x="0" y="18288"/>
+                </a:cubicBezTo>
+                <a:cubicBezTo>
+                  <a:pt x="60" y="11696"/>
+                  <a:pt x="66" y="3758"/>
+                  <a:pt x="0" y="0"/>
+                </a:cubicBezTo>
+                <a:close/>
+              </a:path>
+              <a:path w="3291840" h="18288" stroke="0" extrusionOk="0">
+                <a:moveTo>
+                  <a:pt x="0" y="0"/>
+                </a:moveTo>
+                <a:cubicBezTo>
+                  <a:pt x="195850" y="28018"/>
+                  <a:pt x="434891" y="17390"/>
+                  <a:pt x="592531" y="0"/>
+                </a:cubicBezTo>
+                <a:cubicBezTo>
+                  <a:pt x="750171" y="-17390"/>
+                  <a:pt x="1018709" y="32200"/>
+                  <a:pt x="1316736" y="0"/>
+                </a:cubicBezTo>
+                <a:cubicBezTo>
+                  <a:pt x="1614763" y="-32200"/>
+                  <a:pt x="1696480" y="-11367"/>
+                  <a:pt x="1876349" y="0"/>
+                </a:cubicBezTo>
+                <a:cubicBezTo>
+                  <a:pt x="2056218" y="11367"/>
+                  <a:pt x="2193364" y="13433"/>
+                  <a:pt x="2435962" y="0"/>
+                </a:cubicBezTo>
+                <a:cubicBezTo>
+                  <a:pt x="2678560" y="-13433"/>
+                  <a:pt x="3010901" y="-42367"/>
+                  <a:pt x="3291840" y="0"/>
+                </a:cubicBezTo>
+                <a:cubicBezTo>
+                  <a:pt x="3291758" y="4406"/>
+                  <a:pt x="3291751" y="9982"/>
+                  <a:pt x="3291840" y="18288"/>
+                </a:cubicBezTo>
+                <a:cubicBezTo>
+                  <a:pt x="3108993" y="14228"/>
+                  <a:pt x="2952658" y="46900"/>
+                  <a:pt x="2666390" y="18288"/>
+                </a:cubicBezTo>
+                <a:cubicBezTo>
+                  <a:pt x="2380122" y="-10324"/>
+                  <a:pt x="2263855" y="41055"/>
+                  <a:pt x="2040941" y="18288"/>
+                </a:cubicBezTo>
+                <a:cubicBezTo>
+                  <a:pt x="1818027" y="-4479"/>
+                  <a:pt x="1675097" y="6509"/>
+                  <a:pt x="1415491" y="18288"/>
+                </a:cubicBezTo>
+                <a:cubicBezTo>
+                  <a:pt x="1155885" y="30068"/>
+                  <a:pt x="852976" y="36210"/>
+                  <a:pt x="691286" y="18288"/>
+                </a:cubicBezTo>
+                <a:cubicBezTo>
+                  <a:pt x="529596" y="366"/>
+                  <a:pt x="187183" y="13912"/>
+                  <a:pt x="0" y="18288"/>
+                </a:cubicBezTo>
+                <a:cubicBezTo>
+                  <a:pt x="189" y="14288"/>
+                  <a:pt x="-703" y="3747"/>
+                  <a:pt x="0" y="0"/>
+                </a:cubicBezTo>
+                <a:close/>
+              </a:path>
+            </a:pathLst>
+          </a:custGeom>
+          <a:solidFill>
+            <a:schemeClr val="accent2"/>
+          </a:solidFill>
+          <a:ln w="41275" cap="rnd">
+            <a:solidFill>
+              <a:schemeClr val="accent2"/>
+            </a:solidFill>
+            <a:round/>
+            <a:extLst>
+              <a:ext uri="{C807C97D-BFC1-408E-A445-0C87EB9F89A2}">
+                <ask:lineSketchStyleProps xmlns:ask="http://schemas.microsoft.com/office/drawing/2018/sketchyshapes" sd="2863741219">
+                  <a:prstGeom prst="rect">
+                    <a:avLst/>
+                  </a:prstGeom>
+                  <ask:type>
+                    <ask:lineSketchFreehand/>
+                  </ask:type>
+                </ask:lineSketchStyleProps>
+              </a:ext>
+            </a:extLst>
+          </a:ln>
+        </p:spPr>
+        <p:style>
+          <a:lnRef idx="2">
+            <a:schemeClr val="accent1">
+              <a:shade val="50000"/>
+            </a:schemeClr>
+          </a:lnRef>
+          <a:fillRef idx="1">
+            <a:schemeClr val="accent1"/>
+          </a:fillRef>
+          <a:effectRef idx="0">
+            <a:schemeClr val="accent1"/>
+          </a:effectRef>
+          <a:fontRef idx="minor">
+            <a:schemeClr val="lt1"/>
+          </a:fontRef>
+        </p:style>
+        <p:txBody>
+          <a:bodyPr rtlCol="0" anchor="ctr"/>
+          <a:lstStyle/>
+          <a:p>
+            <a:pPr algn="ctr"/>
+            <a:endParaRPr lang="en-US"/>
+          </a:p>
+        </p:txBody>
+      </p:sp>
+      <p:pic>
+        <p:nvPicPr>
+          <p:cNvPr id="7" name="Picture 6" descr="A yellow circle with a blue center&#10;&#10;AI-generated content may be incorrect.">
+            <a:extLst>
+              <a:ext uri="{FF2B5EF4-FFF2-40B4-BE49-F238E27FC236}">
+                <a16:creationId xmlns:a16="http://schemas.microsoft.com/office/drawing/2014/main" id="{0C1ECB9C-2624-71BF-70EA-1F69CE1EB032}"/>
+              </a:ext>
+            </a:extLst>
+          </p:cNvPr>
+          <p:cNvPicPr>
+            <a:picLocks noChangeAspect="1"/>
+          </p:cNvPicPr>
+          <p:nvPr/>
+        </p:nvPicPr>
+        <p:blipFill>
+          <a:blip r:embed="rId2"/>
+          <a:stretch>
+            <a:fillRect/>
+          </a:stretch>
+        </p:blipFill>
+        <p:spPr>
+          <a:xfrm>
+            <a:off x="1337878" y="2642616"/>
+            <a:ext cx="3578740" cy="3605784"/>
+          </a:xfrm>
+          <a:prstGeom prst="rect">
+            <a:avLst/>
+          </a:prstGeom>
+        </p:spPr>
+      </p:pic>
+      <p:pic>
+        <p:nvPicPr>
+          <p:cNvPr id="6" name="Content Placeholder 5">
+            <a:extLst>
+              <a:ext uri="{FF2B5EF4-FFF2-40B4-BE49-F238E27FC236}">
+                <a16:creationId xmlns:a16="http://schemas.microsoft.com/office/drawing/2014/main" id="{C550AD97-3311-9FD8-AE41-C541F41EB31D}"/>
+              </a:ext>
+            </a:extLst>
+          </p:cNvPr>
+          <p:cNvPicPr>
+            <a:picLocks noGrp="1" noChangeAspect="1"/>
+          </p:cNvPicPr>
+          <p:nvPr>
+            <p:ph idx="1"/>
+          </p:nvPr>
+        </p:nvPicPr>
+        <p:blipFill>
+          <a:blip r:embed="rId3"/>
+          <a:stretch>
+            <a:fillRect/>
+          </a:stretch>
+        </p:blipFill>
+        <p:spPr>
+          <a:xfrm>
+            <a:off x="7249752" y="2642616"/>
+            <a:ext cx="3623903" cy="3605784"/>
+          </a:xfrm>
+          <a:prstGeom prst="rect">
+            <a:avLst/>
+          </a:prstGeom>
+        </p:spPr>
+      </p:pic>
+    </p:spTree>
+    <p:extLst>
+      <p:ext uri="{BB962C8B-B14F-4D97-AF65-F5344CB8AC3E}">
+        <p14:creationId xmlns:p14="http://schemas.microsoft.com/office/powerpoint/2010/main" val="464883383"/>
+      </p:ext>
+    </p:extLst>
+  </p:cSld>
+  <p:clrMapOvr>
+    <a:masterClrMapping/>
+  </p:clrMapOvr>
+</p:sld>
+</file>
+
+<file path=ppt/slides/slide9.xml><?xml version="1.0" encoding="utf-8"?>
+<p:sld xmlns:a="http://schemas.openxmlformats.org/drawingml/2006/main" xmlns:r="http://schemas.openxmlformats.org/officeDocument/2006/relationships" xmlns:p="http://schemas.openxmlformats.org/presentationml/2006/main">
+  <p:cSld>
+    <p:spTree>
+      <p:nvGrpSpPr>
+        <p:cNvPr id="1" name=""/>
+        <p:cNvGrpSpPr/>
+        <p:nvPr/>
+      </p:nvGrpSpPr>
+      <p:grpSpPr>
+        <a:xfrm>
+          <a:off x="0" y="0"/>
+          <a:ext cx="0" cy="0"/>
+          <a:chOff x="0" y="0"/>
+          <a:chExt cx="0" cy="0"/>
+        </a:xfrm>
+      </p:grpSpPr>
+      <p:sp useBgFill="1">
+        <p:nvSpPr>
+          <p:cNvPr id="8" name="Rectangle 7">
+            <a:extLst>
+              <a:ext uri="{FF2B5EF4-FFF2-40B4-BE49-F238E27FC236}">
+                <a16:creationId xmlns:a16="http://schemas.microsoft.com/office/drawing/2014/main" id="{B6CDA21F-E7AF-4C75-8395-33F58D5B0E45}"/>
+              </a:ext>
+              <a:ext uri="{C183D7F6-B498-43B3-948B-1728B52AA6E4}">
+                <adec:decorative xmlns:adec="http://schemas.microsoft.com/office/drawing/2017/decorative" val="1"/>
+              </a:ext>
+            </a:extLst>
+          </p:cNvPr>
+          <p:cNvSpPr>
+            <a:spLocks noGrp="1" noRot="1" noChangeAspect="1" noMove="1" noResize="1" noEditPoints="1" noAdjustHandles="1" noChangeArrowheads="1" noChangeShapeType="1" noTextEdit="1"/>
+          </p:cNvSpPr>
+          <p:nvPr>
+            <p:extLst>
+              <p:ext uri="{386F3935-93C4-4BCD-93E2-E3B085C9AB24}">
+                <p16:designElem xmlns:p16="http://schemas.microsoft.com/office/powerpoint/2015/main" val="1"/>
+              </p:ext>
+            </p:extLst>
+          </p:nvPr>
+        </p:nvSpPr>
+        <p:spPr>
+          <a:xfrm>
+            <a:off x="0" y="0"/>
+            <a:ext cx="12191999" cy="6857365"/>
+          </a:xfrm>
+          <a:prstGeom prst="rect">
+            <a:avLst/>
+          </a:prstGeom>
+          <a:ln>
+            <a:noFill/>
+          </a:ln>
+        </p:spPr>
+        <p:style>
+          <a:lnRef idx="2">
+            <a:schemeClr val="accent1">
+              <a:shade val="50000"/>
+            </a:schemeClr>
+          </a:lnRef>
+          <a:fillRef idx="1">
+            <a:schemeClr val="accent1"/>
+          </a:fillRef>
+          <a:effectRef idx="0">
+            <a:schemeClr val="accent1"/>
+          </a:effectRef>
+          <a:fontRef idx="minor">
+            <a:schemeClr val="lt1"/>
+          </a:fontRef>
+        </p:style>
+        <p:txBody>
+          <a:bodyPr rtlCol="0" anchor="ctr"/>
+          <a:lstStyle/>
+          <a:p>
+            <a:pPr algn="ctr"/>
+            <a:endParaRPr lang="en-US"/>
+          </a:p>
+        </p:txBody>
+      </p:sp>
+      <p:grpSp>
+        <p:nvGrpSpPr>
+          <p:cNvPr id="10" name="Group 9">
+            <a:extLst>
+              <a:ext uri="{FF2B5EF4-FFF2-40B4-BE49-F238E27FC236}">
+                <a16:creationId xmlns:a16="http://schemas.microsoft.com/office/drawing/2014/main" id="{AE1C45F0-260A-458C-96ED-C1F6D2151219}"/>
+              </a:ext>
+              <a:ext uri="{C183D7F6-B498-43B3-948B-1728B52AA6E4}">
+                <adec:decorative xmlns:adec="http://schemas.microsoft.com/office/drawing/2017/decorative" val="1"/>
+              </a:ext>
+            </a:extLst>
+          </p:cNvPr>
+          <p:cNvGrpSpPr>
+            <a:grpSpLocks noGrp="1" noUngrp="1" noRot="1" noChangeAspect="1" noMove="1" noResize="1"/>
+          </p:cNvGrpSpPr>
+          <p:nvPr>
+            <p:extLst>
+              <p:ext uri="{386F3935-93C4-4BCD-93E2-E3B085C9AB24}">
+                <p16:designElem xmlns:p16="http://schemas.microsoft.com/office/powerpoint/2015/main" val="1"/>
+              </p:ext>
+            </p:extLst>
+          </p:nvPr>
+        </p:nvGrpSpPr>
+        <p:grpSpPr>
+          <a:xfrm>
+            <a:off x="4" y="1216597"/>
+            <a:ext cx="731521" cy="673460"/>
+            <a:chOff x="3940602" y="308034"/>
+            <a:chExt cx="2116791" cy="3428999"/>
+          </a:xfrm>
+          <a:solidFill>
+            <a:schemeClr val="accent4"/>
+          </a:solidFill>
+        </p:grpSpPr>
+        <p:sp>
+          <p:nvSpPr>
+            <p:cNvPr id="11" name="Rectangle 10">
+              <a:extLst>
+                <a:ext uri="{FF2B5EF4-FFF2-40B4-BE49-F238E27FC236}">
+                  <a16:creationId xmlns:a16="http://schemas.microsoft.com/office/drawing/2014/main" id="{A6604B49-AD5C-4590-B051-06C8222ECD99}"/>
+                </a:ext>
+                <a:ext uri="{C183D7F6-B498-43B3-948B-1728B52AA6E4}">
+                  <adec:decorative xmlns:adec="http://schemas.microsoft.com/office/drawing/2017/decorative" val="1"/>
+                </a:ext>
+              </a:extLst>
+            </p:cNvPr>
+            <p:cNvSpPr/>
+            <p:nvPr>
+              <p:extLst>
+                <p:ext uri="{386F3935-93C4-4BCD-93E2-E3B085C9AB24}">
+                  <p16:designElem xmlns:p16="http://schemas.microsoft.com/office/powerpoint/2015/main" val="1"/>
+                </p:ext>
+              </p:extLst>
+            </p:nvPr>
+          </p:nvSpPr>
+          <p:spPr>
+            <a:xfrm>
+              <a:off x="3940602" y="308034"/>
+              <a:ext cx="566743" cy="3428999"/>
+            </a:xfrm>
+            <a:prstGeom prst="rect">
+              <a:avLst/>
+            </a:prstGeom>
+            <a:grpFill/>
+            <a:ln>
+              <a:noFill/>
+            </a:ln>
+          </p:spPr>
+          <p:style>
+            <a:lnRef idx="2">
+              <a:schemeClr val="accent1">
+                <a:shade val="50000"/>
+              </a:schemeClr>
+            </a:lnRef>
+            <a:fillRef idx="1">
+              <a:schemeClr val="accent1"/>
+            </a:fillRef>
+            <a:effectRef idx="0">
+              <a:schemeClr val="accent1"/>
+            </a:effectRef>
+            <a:fontRef idx="minor">
+              <a:schemeClr val="lt1"/>
+            </a:fontRef>
+          </p:style>
+          <p:txBody>
+            <a:bodyPr rtlCol="0" anchor="ctr"/>
+            <a:lstStyle/>
+            <a:p>
+              <a:pPr algn="ctr"/>
+              <a:endParaRPr lang="en-US"/>
+            </a:p>
+          </p:txBody>
+        </p:sp>
+        <p:sp>
+          <p:nvSpPr>
+            <p:cNvPr id="12" name="Rectangle 11">
+              <a:extLst>
+                <a:ext uri="{FF2B5EF4-FFF2-40B4-BE49-F238E27FC236}">
+                  <a16:creationId xmlns:a16="http://schemas.microsoft.com/office/drawing/2014/main" id="{743ECCAF-29C5-4537-947C-7EA1292463DB}"/>
+                </a:ext>
+                <a:ext uri="{C183D7F6-B498-43B3-948B-1728B52AA6E4}">
+                  <adec:decorative xmlns:adec="http://schemas.microsoft.com/office/drawing/2017/decorative" val="1"/>
+                </a:ext>
+              </a:extLst>
+            </p:cNvPr>
+            <p:cNvSpPr/>
+            <p:nvPr>
+              <p:extLst>
+                <p:ext uri="{386F3935-93C4-4BCD-93E2-E3B085C9AB24}">
+                  <p16:designElem xmlns:p16="http://schemas.microsoft.com/office/powerpoint/2015/main" val="1"/>
+                </p:ext>
+              </p:extLst>
+            </p:nvPr>
+          </p:nvSpPr>
+          <p:spPr>
+            <a:xfrm>
+              <a:off x="4715626" y="308034"/>
+              <a:ext cx="566743" cy="3428999"/>
+            </a:xfrm>
+            <a:prstGeom prst="rect">
+              <a:avLst/>
+            </a:prstGeom>
+            <a:grpFill/>
+            <a:ln>
+              <a:noFill/>
+            </a:ln>
+          </p:spPr>
+          <p:style>
+            <a:lnRef idx="2">
+              <a:schemeClr val="accent1">
+                <a:shade val="50000"/>
+              </a:schemeClr>
+            </a:lnRef>
+            <a:fillRef idx="1">
+              <a:schemeClr val="accent1"/>
+            </a:fillRef>
+            <a:effectRef idx="0">
+              <a:schemeClr val="accent1"/>
+            </a:effectRef>
+            <a:fontRef idx="minor">
+              <a:schemeClr val="lt1"/>
+            </a:fontRef>
+          </p:style>
+          <p:txBody>
+            <a:bodyPr rtlCol="0" anchor="ctr"/>
+            <a:lstStyle/>
+            <a:p>
+              <a:pPr algn="ctr"/>
+              <a:endParaRPr lang="en-US"/>
+            </a:p>
+          </p:txBody>
+        </p:sp>
+        <p:sp>
+          <p:nvSpPr>
+            <p:cNvPr id="13" name="Rectangle 12">
+              <a:extLst>
+                <a:ext uri="{FF2B5EF4-FFF2-40B4-BE49-F238E27FC236}">
+                  <a16:creationId xmlns:a16="http://schemas.microsoft.com/office/drawing/2014/main" id="{ED49787B-8DE6-4467-AD0A-8DECC6E0C2D6}"/>
+                </a:ext>
+                <a:ext uri="{C183D7F6-B498-43B3-948B-1728B52AA6E4}">
+                  <adec:decorative xmlns:adec="http://schemas.microsoft.com/office/drawing/2017/decorative" val="1"/>
+                </a:ext>
+              </a:extLst>
+            </p:cNvPr>
+            <p:cNvSpPr/>
+            <p:nvPr>
+              <p:extLst>
+                <p:ext uri="{386F3935-93C4-4BCD-93E2-E3B085C9AB24}">
+                  <p16:designElem xmlns:p16="http://schemas.microsoft.com/office/powerpoint/2015/main" val="1"/>
+                </p:ext>
+              </p:extLst>
+            </p:nvPr>
+          </p:nvSpPr>
+          <p:spPr>
+            <a:xfrm>
+              <a:off x="5490650" y="308034"/>
+              <a:ext cx="566743" cy="3428999"/>
+            </a:xfrm>
+            <a:prstGeom prst="rect">
+              <a:avLst/>
+            </a:prstGeom>
+            <a:grpFill/>
+            <a:ln>
+              <a:noFill/>
+            </a:ln>
+          </p:spPr>
+          <p:style>
+            <a:lnRef idx="2">
+              <a:schemeClr val="accent1">
+                <a:shade val="50000"/>
+              </a:schemeClr>
+            </a:lnRef>
+            <a:fillRef idx="1">
+              <a:schemeClr val="accent1"/>
+            </a:fillRef>
+            <a:effectRef idx="0">
+              <a:schemeClr val="accent1"/>
+            </a:effectRef>
+            <a:fontRef idx="minor">
+              <a:schemeClr val="lt1"/>
+            </a:fontRef>
+          </p:style>
+          <p:txBody>
+            <a:bodyPr rtlCol="0" anchor="ctr"/>
+            <a:lstStyle/>
+            <a:p>
+              <a:pPr algn="ctr"/>
+              <a:endParaRPr lang="en-US"/>
+            </a:p>
+          </p:txBody>
+        </p:sp>
+      </p:grpSp>
+      <p:sp>
+        <p:nvSpPr>
+          <p:cNvPr id="15" name="Rectangle 14">
+            <a:extLst>
+              <a:ext uri="{FF2B5EF4-FFF2-40B4-BE49-F238E27FC236}">
+                <a16:creationId xmlns:a16="http://schemas.microsoft.com/office/drawing/2014/main" id="{D5B0017B-2ECA-49AF-B397-DC140825DF8D}"/>
+              </a:ext>
+              <a:ext uri="{C183D7F6-B498-43B3-948B-1728B52AA6E4}">
+                <adec:decorative xmlns:adec="http://schemas.microsoft.com/office/drawing/2017/decorative" val="1"/>
+              </a:ext>
+            </a:extLst>
+          </p:cNvPr>
+          <p:cNvSpPr>
+            <a:spLocks noGrp="1" noRot="1" noChangeAspect="1" noMove="1" noResize="1" noEditPoints="1" noAdjustHandles="1" noChangeArrowheads="1" noChangeShapeType="1" noTextEdit="1"/>
+          </p:cNvSpPr>
+          <p:nvPr>
+            <p:extLst>
+              <p:ext uri="{386F3935-93C4-4BCD-93E2-E3B085C9AB24}">
+                <p16:designElem xmlns:p16="http://schemas.microsoft.com/office/powerpoint/2015/main" val="1"/>
+              </p:ext>
+            </p:extLst>
+          </p:nvPr>
+        </p:nvSpPr>
+        <p:spPr>
+          <a:xfrm>
+            <a:off x="640079" y="613954"/>
+            <a:ext cx="10907487" cy="1894116"/>
+          </a:xfrm>
+          <a:prstGeom prst="rect">
+            <a:avLst/>
+          </a:prstGeom>
+          <a:solidFill>
+            <a:schemeClr val="bg1"/>
+          </a:solidFill>
+          <a:ln>
+            <a:noFill/>
+          </a:ln>
+          <a:effectLst>
+            <a:outerShdw blurRad="139700" dist="127000" dir="5400000" algn="t" rotWithShape="0">
+              <a:prstClr val="black">
+                <a:alpha val="15000"/>
+              </a:prstClr>
+            </a:outerShdw>
+          </a:effectLst>
+        </p:spPr>
+        <p:style>
+          <a:lnRef idx="2">
+            <a:schemeClr val="accent1">
+              <a:shade val="50000"/>
+            </a:schemeClr>
+          </a:lnRef>
+          <a:fillRef idx="1">
+            <a:schemeClr val="accent1"/>
+          </a:fillRef>
+          <a:effectRef idx="0">
+            <a:schemeClr val="accent1"/>
+          </a:effectRef>
+          <a:fontRef idx="minor">
+            <a:schemeClr val="lt1"/>
+          </a:fontRef>
+        </p:style>
+        <p:txBody>
+          <a:bodyPr rtlCol="0" anchor="ctr"/>
+          <a:lstStyle/>
+          <a:p>
+            <a:pPr algn="ctr"/>
+            <a:endParaRPr lang="en-US"/>
+          </a:p>
+        </p:txBody>
+      </p:sp>
+      <p:sp>
+        <p:nvSpPr>
+          <p:cNvPr id="4" name="Rectangle 3">
+            <a:extLst>
+              <a:ext uri="{FF2B5EF4-FFF2-40B4-BE49-F238E27FC236}">
+                <a16:creationId xmlns:a16="http://schemas.microsoft.com/office/drawing/2014/main" id="{0B9FB95B-49A7-551E-5184-17AD5AD6319A}"/>
+              </a:ext>
+            </a:extLst>
+          </p:cNvPr>
+          <p:cNvSpPr/>
+          <p:nvPr/>
+        </p:nvSpPr>
+        <p:spPr>
+          <a:xfrm>
+            <a:off x="640079" y="2508070"/>
+            <a:ext cx="10907487" cy="3634099"/>
+          </a:xfrm>
+          <a:prstGeom prst="rect">
+            <a:avLst/>
+          </a:prstGeom>
+        </p:spPr>
+        <p:style>
+          <a:lnRef idx="2">
+            <a:schemeClr val="dk1">
+              <a:shade val="15000"/>
+            </a:schemeClr>
+          </a:lnRef>
+          <a:fillRef idx="1">
+            <a:schemeClr val="dk1"/>
+          </a:fillRef>
+          <a:effectRef idx="0">
+            <a:schemeClr val="dk1"/>
+          </a:effectRef>
+          <a:fontRef idx="minor">
+            <a:schemeClr val="lt1"/>
+          </a:fontRef>
+        </p:style>
+        <p:txBody>
+          <a:bodyPr rtlCol="0" anchor="ctr"/>
+          <a:lstStyle/>
+          <a:p>
+            <a:pPr algn="ctr"/>
+            <a:endParaRPr lang="en-US"/>
+          </a:p>
+        </p:txBody>
+      </p:sp>
+      <p:sp>
+        <p:nvSpPr>
+          <p:cNvPr id="2" name="Title 1">
+            <a:extLst>
+              <a:ext uri="{FF2B5EF4-FFF2-40B4-BE49-F238E27FC236}">
+                <a16:creationId xmlns:a16="http://schemas.microsoft.com/office/drawing/2014/main" id="{8EBF0BB0-096F-E5B1-09A5-B57C2D99AF69}"/>
+              </a:ext>
+            </a:extLst>
+          </p:cNvPr>
+          <p:cNvSpPr>
+            <a:spLocks noGrp="1"/>
+          </p:cNvSpPr>
+          <p:nvPr>
+            <p:ph type="title"/>
+          </p:nvPr>
+        </p:nvSpPr>
+        <p:spPr>
+          <a:xfrm>
+            <a:off x="1043631" y="809898"/>
+            <a:ext cx="9942716" cy="1554480"/>
+          </a:xfrm>
+        </p:spPr>
+        <p:txBody>
+          <a:bodyPr anchor="ctr">
+            <a:normAutofit/>
+          </a:bodyPr>
+          <a:lstStyle/>
+          <a:p>
+            <a:r>
+              <a:rPr lang="en-US" sz="4800"/>
+              <a:t>Current and Future Work Items</a:t>
+            </a:r>
+          </a:p>
+        </p:txBody>
+      </p:sp>
+      <p:sp>
+        <p:nvSpPr>
+          <p:cNvPr id="3" name="Content Placeholder 2">
+            <a:extLst>
+              <a:ext uri="{FF2B5EF4-FFF2-40B4-BE49-F238E27FC236}">
+                <a16:creationId xmlns:a16="http://schemas.microsoft.com/office/drawing/2014/main" id="{9460E459-A6E5-A227-7974-F93D7642A902}"/>
+              </a:ext>
+            </a:extLst>
+          </p:cNvPr>
+          <p:cNvSpPr>
+            <a:spLocks noGrp="1"/>
+          </p:cNvSpPr>
+          <p:nvPr>
+            <p:ph idx="1"/>
+          </p:nvPr>
+        </p:nvSpPr>
+        <p:spPr>
+          <a:xfrm>
+            <a:off x="1045028" y="2290918"/>
+            <a:ext cx="9941319" cy="2969340"/>
+          </a:xfrm>
+        </p:spPr>
+        <p:txBody>
+          <a:bodyPr anchor="ctr">
+            <a:normAutofit/>
+          </a:bodyPr>
+          <a:lstStyle/>
+          <a:p>
+            <a:r>
+              <a:rPr lang="en-US" sz="2400" dirty="0"/>
+              <a:t>Better servo/actuation simulation</a:t>
+            </a:r>
+          </a:p>
+          <a:p>
+            <a:r>
+              <a:rPr lang="en-US" sz="2400" dirty="0"/>
+              <a:t>Adjust Yaw/Pitch/Roll PID variables</a:t>
+            </a:r>
+          </a:p>
+          <a:p>
+            <a:r>
+              <a:rPr lang="en-US" sz="2400" dirty="0"/>
+              <a:t>Modify or Replace Flight Controller block to support other transformations</a:t>
+            </a:r>
+          </a:p>
+          <a:p>
+            <a:r>
+              <a:rPr lang="en-US" sz="2400" dirty="0"/>
+              <a:t>Adjust motor variables to better match the EDF power and behavior.</a:t>
+            </a:r>
+          </a:p>
+          <a:p>
+            <a:r>
+              <a:rPr lang="en-US" sz="2400" dirty="0"/>
+              <a:t>Adjust Power system variables so we can accurately simulate motor power consumption. </a:t>
+            </a:r>
+          </a:p>
+        </p:txBody>
+      </p:sp>
+      <p:cxnSp>
+        <p:nvCxnSpPr>
+          <p:cNvPr id="17" name="Straight Connector 16">
+            <a:extLst>
+              <a:ext uri="{FF2B5EF4-FFF2-40B4-BE49-F238E27FC236}">
+                <a16:creationId xmlns:a16="http://schemas.microsoft.com/office/drawing/2014/main" id="{6CF1BAF6-AD41-4082-B212-8A1F9A2E8779}"/>
+              </a:ext>
+              <a:ext uri="{C183D7F6-B498-43B3-948B-1728B52AA6E4}">
+                <adec:decorative xmlns:adec="http://schemas.microsoft.com/office/drawing/2017/decorative" val="1"/>
+              </a:ext>
+            </a:extLst>
+          </p:cNvPr>
+          <p:cNvCxnSpPr>
+            <a:cxnSpLocks noGrp="1" noRot="1" noChangeAspect="1" noMove="1" noResize="1" noEditPoints="1" noAdjustHandles="1" noChangeArrowheads="1" noChangeShapeType="1"/>
+          </p:cNvCxnSpPr>
+          <p:nvPr>
+            <p:extLst>
+              <p:ext uri="{386F3935-93C4-4BCD-93E2-E3B085C9AB24}">
+                <p16:designElem xmlns:p16="http://schemas.microsoft.com/office/powerpoint/2015/main" val="1"/>
+              </p:ext>
+            </p:extLst>
+          </p:nvPr>
+        </p:nvCxnSpPr>
+        <p:spPr>
+          <a:xfrm flipH="1">
+            <a:off x="838200" y="6485313"/>
+            <a:ext cx="10515600" cy="0"/>
+          </a:xfrm>
+          <a:prstGeom prst="line">
+            <a:avLst/>
+          </a:prstGeom>
+          <a:ln w="57150">
+            <a:solidFill>
+              <a:schemeClr val="accent4"/>
+            </a:solidFill>
+          </a:ln>
+        </p:spPr>
+        <p:style>
+          <a:lnRef idx="1">
+            <a:schemeClr val="accent1"/>
+          </a:lnRef>
+          <a:fillRef idx="0">
+            <a:schemeClr val="accent1"/>
+          </a:fillRef>
+          <a:effectRef idx="0">
+            <a:schemeClr val="accent1"/>
+          </a:effectRef>
+          <a:fontRef idx="minor">
+            <a:schemeClr val="tx1"/>
+          </a:fontRef>
+        </p:style>
+      </p:cxnSp>
+    </p:spTree>
+    <p:extLst>
+      <p:ext uri="{BB962C8B-B14F-4D97-AF65-F5344CB8AC3E}">
+        <p14:creationId xmlns:p14="http://schemas.microsoft.com/office/powerpoint/2010/main" val="987459789"/>
       </p:ext>
     </p:extLst>
   </p:cSld>
